--- a/courses/ooad/sessions/s14.pptx
+++ b/courses/ooad/sessions/s14.pptx
@@ -412,7 +412,7 @@
   </p:cSld>
   <p:clrMap bg1="lt1" tx1="dk1" bg2="lt2" tx2="dk2" accent1="accent1" accent2="accent2" accent3="accent3" accent4="accent4" accent5="accent5" accent6="accent6" hlink="hlink" folHlink="folHlink"/>
   <p:notesStyle>
-    <a:lvl1pPr marL="0" algn="l" defTabSz="914400" rtl="0" eaLnBrk="1" latinLnBrk="1" hangingPunct="1">
+    <a:lvl1pPr marL="0" algn="l" defTabSz="914400" rtl="0" eaLnBrk="1" latinLnBrk="0" hangingPunct="1">
       <a:defRPr sz="1200" kern="1200">
         <a:solidFill>
           <a:schemeClr val="tx1"/>
@@ -422,7 +422,7 @@
         <a:cs typeface="+mn-cs"/>
       </a:defRPr>
     </a:lvl1pPr>
-    <a:lvl2pPr marL="457200" algn="l" defTabSz="914400" rtl="0" eaLnBrk="1" latinLnBrk="1" hangingPunct="1">
+    <a:lvl2pPr marL="457200" algn="l" defTabSz="914400" rtl="0" eaLnBrk="1" latinLnBrk="0" hangingPunct="1">
       <a:defRPr sz="1200" kern="1200">
         <a:solidFill>
           <a:schemeClr val="tx1"/>
@@ -432,7 +432,7 @@
         <a:cs typeface="+mn-cs"/>
       </a:defRPr>
     </a:lvl2pPr>
-    <a:lvl3pPr marL="914400" algn="l" defTabSz="914400" rtl="0" eaLnBrk="1" latinLnBrk="1" hangingPunct="1">
+    <a:lvl3pPr marL="914400" algn="l" defTabSz="914400" rtl="0" eaLnBrk="1" latinLnBrk="0" hangingPunct="1">
       <a:defRPr sz="1200" kern="1200">
         <a:solidFill>
           <a:schemeClr val="tx1"/>
@@ -442,7 +442,7 @@
         <a:cs typeface="+mn-cs"/>
       </a:defRPr>
     </a:lvl3pPr>
-    <a:lvl4pPr marL="1371600" algn="l" defTabSz="914400" rtl="0" eaLnBrk="1" latinLnBrk="1" hangingPunct="1">
+    <a:lvl4pPr marL="1371600" algn="l" defTabSz="914400" rtl="0" eaLnBrk="1" latinLnBrk="0" hangingPunct="1">
       <a:defRPr sz="1200" kern="1200">
         <a:solidFill>
           <a:schemeClr val="tx1"/>
@@ -452,7 +452,7 @@
         <a:cs typeface="+mn-cs"/>
       </a:defRPr>
     </a:lvl4pPr>
-    <a:lvl5pPr marL="1828800" algn="l" defTabSz="914400" rtl="0" eaLnBrk="1" latinLnBrk="1" hangingPunct="1">
+    <a:lvl5pPr marL="1828800" algn="l" defTabSz="914400" rtl="0" eaLnBrk="1" latinLnBrk="0" hangingPunct="1">
       <a:defRPr sz="1200" kern="1200">
         <a:solidFill>
           <a:schemeClr val="tx1"/>
@@ -462,7 +462,7 @@
         <a:cs typeface="+mn-cs"/>
       </a:defRPr>
     </a:lvl5pPr>
-    <a:lvl6pPr marL="2286000" algn="l" defTabSz="914400" rtl="0" eaLnBrk="1" latinLnBrk="1" hangingPunct="1">
+    <a:lvl6pPr marL="2286000" algn="l" defTabSz="914400" rtl="0" eaLnBrk="1" latinLnBrk="0" hangingPunct="1">
       <a:defRPr sz="1200" kern="1200">
         <a:solidFill>
           <a:schemeClr val="tx1"/>
@@ -472,7 +472,7 @@
         <a:cs typeface="+mn-cs"/>
       </a:defRPr>
     </a:lvl6pPr>
-    <a:lvl7pPr marL="2743200" algn="l" defTabSz="914400" rtl="0" eaLnBrk="1" latinLnBrk="1" hangingPunct="1">
+    <a:lvl7pPr marL="2743200" algn="l" defTabSz="914400" rtl="0" eaLnBrk="1" latinLnBrk="0" hangingPunct="1">
       <a:defRPr sz="1200" kern="1200">
         <a:solidFill>
           <a:schemeClr val="tx1"/>
@@ -482,7 +482,7 @@
         <a:cs typeface="+mn-cs"/>
       </a:defRPr>
     </a:lvl7pPr>
-    <a:lvl8pPr marL="3200400" algn="l" defTabSz="914400" rtl="0" eaLnBrk="1" latinLnBrk="1" hangingPunct="1">
+    <a:lvl8pPr marL="3200400" algn="l" defTabSz="914400" rtl="0" eaLnBrk="1" latinLnBrk="0" hangingPunct="1">
       <a:defRPr sz="1200" kern="1200">
         <a:solidFill>
           <a:schemeClr val="tx1"/>
@@ -492,7 +492,7 @@
         <a:cs typeface="+mn-cs"/>
       </a:defRPr>
     </a:lvl8pPr>
-    <a:lvl9pPr marL="3657600" algn="l" defTabSz="914400" rtl="0" eaLnBrk="1" latinLnBrk="1" hangingPunct="1">
+    <a:lvl9pPr marL="3657600" algn="l" defTabSz="914400" rtl="0" eaLnBrk="1" latinLnBrk="0" hangingPunct="1">
       <a:defRPr sz="1200" kern="1200">
         <a:solidFill>
           <a:schemeClr val="tx1"/>
@@ -833,7 +833,7 @@
             <a:pPr lvl="0"/>
             <a:r>
               <a:rPr lang="ko-KR" sz="1200"/>
-              <a:t>이 테스트는 에이전트가 수정하기 전에 실패해야 한다(빨강). 확인 지점 「09」의 둘째 행이다.</a:t>
+              <a:t>이 테스트는 에이전트가 수정하기 전에 실패해야 한다(빨강). 확인 지점 「09. 확인 지점」의 둘째 행이다.</a:t>
             </a:r>
           </a:p>
           <a:p>
@@ -901,7 +901,7 @@
             <a:pPr lvl="0"/>
             <a:r>
               <a:rPr lang="ko-KR" sz="1200"/>
-              <a:t>에이전트는 맥락으로 받은 선례(onRefundCompleted)와 같은 모양으로 고쳤다. 선례를 맥락에 넣은 이유다(「04」).</a:t>
+              <a:t>에이전트는 맥락으로 받은 선례(onRefundCompleted)와 같은 모양으로 고쳤다. 선례를 맥락에 넣은 이유다(「04. 맥락은 유한하다」).</a:t>
             </a:r>
           </a:p>
           <a:p>
@@ -2754,7 +2754,7 @@
   <p:hf hdr="0" ftr="0" dt="0"/>
   <p:txStyles>
     <p:titleStyle>
-      <a:lvl1pPr algn="l" rtl="0" eaLnBrk="0" fontAlgn="base" latinLnBrk="1" hangingPunct="0">
+      <a:lvl1pPr algn="l" rtl="0" eaLnBrk="0" fontAlgn="base" latinLnBrk="0" hangingPunct="0">
         <a:spcBef>
           <a:spcPct val="0"/>
         </a:spcBef>
@@ -2770,7 +2770,7 @@
           <a:cs typeface="+mj-cs"/>
         </a:defRPr>
       </a:lvl1pPr>
-      <a:lvl2pPr algn="l" rtl="0" eaLnBrk="0" fontAlgn="base" latinLnBrk="1" hangingPunct="0">
+      <a:lvl2pPr algn="l" rtl="0" eaLnBrk="0" fontAlgn="base" latinLnBrk="0" hangingPunct="0">
         <a:spcBef>
           <a:spcPct val="0"/>
         </a:spcBef>
@@ -2785,7 +2785,7 @@
           <a:ea typeface="맑은 고딕" pitchFamily="50" charset="-127"/>
         </a:defRPr>
       </a:lvl2pPr>
-      <a:lvl3pPr algn="l" rtl="0" eaLnBrk="0" fontAlgn="base" latinLnBrk="1" hangingPunct="0">
+      <a:lvl3pPr algn="l" rtl="0" eaLnBrk="0" fontAlgn="base" latinLnBrk="0" hangingPunct="0">
         <a:spcBef>
           <a:spcPct val="0"/>
         </a:spcBef>
@@ -2800,7 +2800,7 @@
           <a:ea typeface="맑은 고딕" pitchFamily="50" charset="-127"/>
         </a:defRPr>
       </a:lvl3pPr>
-      <a:lvl4pPr algn="l" rtl="0" eaLnBrk="0" fontAlgn="base" latinLnBrk="1" hangingPunct="0">
+      <a:lvl4pPr algn="l" rtl="0" eaLnBrk="0" fontAlgn="base" latinLnBrk="0" hangingPunct="0">
         <a:spcBef>
           <a:spcPct val="0"/>
         </a:spcBef>
@@ -2815,7 +2815,7 @@
           <a:ea typeface="맑은 고딕" pitchFamily="50" charset="-127"/>
         </a:defRPr>
       </a:lvl4pPr>
-      <a:lvl5pPr algn="l" rtl="0" eaLnBrk="0" fontAlgn="base" latinLnBrk="1" hangingPunct="0">
+      <a:lvl5pPr algn="l" rtl="0" eaLnBrk="0" fontAlgn="base" latinLnBrk="0" hangingPunct="0">
         <a:spcBef>
           <a:spcPct val="0"/>
         </a:spcBef>
@@ -2830,7 +2830,7 @@
           <a:ea typeface="맑은 고딕" pitchFamily="50" charset="-127"/>
         </a:defRPr>
       </a:lvl5pPr>
-      <a:lvl6pPr marL="457200" algn="ctr" rtl="0" fontAlgn="base" latinLnBrk="1">
+      <a:lvl6pPr marL="457200" algn="ctr" rtl="0" fontAlgn="base" latinLnBrk="0">
         <a:spcBef>
           <a:spcPct val="0"/>
         </a:spcBef>
@@ -2845,7 +2845,7 @@
           <a:ea typeface="맑은 고딕" pitchFamily="50" charset="-127"/>
         </a:defRPr>
       </a:lvl6pPr>
-      <a:lvl7pPr marL="914400" algn="ctr" rtl="0" fontAlgn="base" latinLnBrk="1">
+      <a:lvl7pPr marL="914400" algn="ctr" rtl="0" fontAlgn="base" latinLnBrk="0">
         <a:spcBef>
           <a:spcPct val="0"/>
         </a:spcBef>
@@ -2860,7 +2860,7 @@
           <a:ea typeface="맑은 고딕" pitchFamily="50" charset="-127"/>
         </a:defRPr>
       </a:lvl7pPr>
-      <a:lvl8pPr marL="1371600" algn="ctr" rtl="0" fontAlgn="base" latinLnBrk="1">
+      <a:lvl8pPr marL="1371600" algn="ctr" rtl="0" fontAlgn="base" latinLnBrk="0">
         <a:spcBef>
           <a:spcPct val="0"/>
         </a:spcBef>
@@ -2875,7 +2875,7 @@
           <a:ea typeface="맑은 고딕" pitchFamily="50" charset="-127"/>
         </a:defRPr>
       </a:lvl8pPr>
-      <a:lvl9pPr marL="1828800" algn="ctr" rtl="0" fontAlgn="base" latinLnBrk="1">
+      <a:lvl9pPr marL="1828800" algn="ctr" rtl="0" fontAlgn="base" latinLnBrk="0">
         <a:spcBef>
           <a:spcPct val="0"/>
         </a:spcBef>
@@ -2892,7 +2892,7 @@
       </a:lvl9pPr>
     </p:titleStyle>
     <p:bodyStyle>
-      <a:lvl1pPr marL="342900" indent="-342900" algn="l" rtl="0" eaLnBrk="0" fontAlgn="base" latinLnBrk="1" hangingPunct="0">
+      <a:lvl1pPr marL="342900" indent="-342900" algn="l" rtl="0" eaLnBrk="0" fontAlgn="base" latinLnBrk="0" hangingPunct="0">
         <a:spcBef>
           <a:spcPct val="20000"/>
         </a:spcBef>
@@ -2910,7 +2910,7 @@
           <a:cs typeface="+mn-cs"/>
         </a:defRPr>
       </a:lvl1pPr>
-      <a:lvl2pPr marL="742950" indent="-285750" algn="l" rtl="0" eaLnBrk="0" fontAlgn="base" latinLnBrk="1" hangingPunct="0">
+      <a:lvl2pPr marL="742950" indent="-285750" algn="l" rtl="0" eaLnBrk="0" fontAlgn="base" latinLnBrk="0" hangingPunct="0">
         <a:spcBef>
           <a:spcPct val="20000"/>
         </a:spcBef>
@@ -2928,7 +2928,7 @@
           <a:cs typeface="+mn-cs"/>
         </a:defRPr>
       </a:lvl2pPr>
-      <a:lvl3pPr marL="1143000" indent="-228600" algn="l" rtl="0" eaLnBrk="0" fontAlgn="base" latinLnBrk="1" hangingPunct="0">
+      <a:lvl3pPr marL="1143000" indent="-228600" algn="l" rtl="0" eaLnBrk="0" fontAlgn="base" latinLnBrk="0" hangingPunct="0">
         <a:spcBef>
           <a:spcPct val="20000"/>
         </a:spcBef>
@@ -2946,7 +2946,7 @@
           <a:cs typeface="+mn-cs"/>
         </a:defRPr>
       </a:lvl3pPr>
-      <a:lvl4pPr marL="1600200" indent="-228600" algn="l" rtl="0" eaLnBrk="0" fontAlgn="base" latinLnBrk="1" hangingPunct="0">
+      <a:lvl4pPr marL="1600200" indent="-228600" algn="l" rtl="0" eaLnBrk="0" fontAlgn="base" latinLnBrk="0" hangingPunct="0">
         <a:spcBef>
           <a:spcPct val="20000"/>
         </a:spcBef>
@@ -2964,7 +2964,7 @@
           <a:cs typeface="+mn-cs"/>
         </a:defRPr>
       </a:lvl4pPr>
-      <a:lvl5pPr marL="2057400" indent="-228600" algn="l" rtl="0" eaLnBrk="0" fontAlgn="base" latinLnBrk="1" hangingPunct="0">
+      <a:lvl5pPr marL="2057400" indent="-228600" algn="l" rtl="0" eaLnBrk="0" fontAlgn="base" latinLnBrk="0" hangingPunct="0">
         <a:spcBef>
           <a:spcPct val="20000"/>
         </a:spcBef>
@@ -2982,7 +2982,7 @@
           <a:cs typeface="+mn-cs"/>
         </a:defRPr>
       </a:lvl5pPr>
-      <a:lvl6pPr marL="2514600" indent="-228600" algn="l" defTabSz="914400" rtl="0" eaLnBrk="1" latinLnBrk="1" hangingPunct="1">
+      <a:lvl6pPr marL="2514600" indent="-228600" algn="l" defTabSz="914400" rtl="0" eaLnBrk="1" latinLnBrk="0" hangingPunct="1">
         <a:spcBef>
           <a:spcPct val="20000"/>
         </a:spcBef>
@@ -2997,7 +2997,7 @@
           <a:cs typeface="+mn-cs"/>
         </a:defRPr>
       </a:lvl6pPr>
-      <a:lvl7pPr marL="2971800" indent="-228600" algn="l" defTabSz="914400" rtl="0" eaLnBrk="1" latinLnBrk="1" hangingPunct="1">
+      <a:lvl7pPr marL="2971800" indent="-228600" algn="l" defTabSz="914400" rtl="0" eaLnBrk="1" latinLnBrk="0" hangingPunct="1">
         <a:spcBef>
           <a:spcPct val="20000"/>
         </a:spcBef>
@@ -3012,7 +3012,7 @@
           <a:cs typeface="+mn-cs"/>
         </a:defRPr>
       </a:lvl7pPr>
-      <a:lvl8pPr marL="3429000" indent="-228600" algn="l" defTabSz="914400" rtl="0" eaLnBrk="1" latinLnBrk="1" hangingPunct="1">
+      <a:lvl8pPr marL="3429000" indent="-228600" algn="l" defTabSz="914400" rtl="0" eaLnBrk="1" latinLnBrk="0" hangingPunct="1">
         <a:spcBef>
           <a:spcPct val="20000"/>
         </a:spcBef>
@@ -3027,7 +3027,7 @@
           <a:cs typeface="+mn-cs"/>
         </a:defRPr>
       </a:lvl8pPr>
-      <a:lvl9pPr marL="3886200" indent="-228600" algn="l" defTabSz="914400" rtl="0" eaLnBrk="1" latinLnBrk="1" hangingPunct="1">
+      <a:lvl9pPr marL="3886200" indent="-228600" algn="l" defTabSz="914400" rtl="0" eaLnBrk="1" latinLnBrk="0" hangingPunct="1">
         <a:spcBef>
           <a:spcPct val="20000"/>
         </a:spcBef>
@@ -3047,7 +3047,7 @@
       <a:defPPr>
         <a:defRPr lang="ko-KR"/>
       </a:defPPr>
-      <a:lvl1pPr marL="0" algn="l" defTabSz="914400" rtl="0" eaLnBrk="1" latinLnBrk="1" hangingPunct="1">
+      <a:lvl1pPr marL="0" algn="l" defTabSz="914400" rtl="0" eaLnBrk="1" latinLnBrk="0" hangingPunct="1">
         <a:defRPr sz="1800" kern="1200">
           <a:solidFill>
             <a:schemeClr val="tx1"/>
@@ -3057,7 +3057,7 @@
           <a:cs typeface="+mn-cs"/>
         </a:defRPr>
       </a:lvl1pPr>
-      <a:lvl2pPr marL="457200" algn="l" defTabSz="914400" rtl="0" eaLnBrk="1" latinLnBrk="1" hangingPunct="1">
+      <a:lvl2pPr marL="457200" algn="l" defTabSz="914400" rtl="0" eaLnBrk="1" latinLnBrk="0" hangingPunct="1">
         <a:defRPr sz="1800" kern="1200">
           <a:solidFill>
             <a:schemeClr val="tx1"/>
@@ -3067,7 +3067,7 @@
           <a:cs typeface="+mn-cs"/>
         </a:defRPr>
       </a:lvl2pPr>
-      <a:lvl3pPr marL="914400" algn="l" defTabSz="914400" rtl="0" eaLnBrk="1" latinLnBrk="1" hangingPunct="1">
+      <a:lvl3pPr marL="914400" algn="l" defTabSz="914400" rtl="0" eaLnBrk="1" latinLnBrk="0" hangingPunct="1">
         <a:defRPr sz="1800" kern="1200">
           <a:solidFill>
             <a:schemeClr val="tx1"/>
@@ -3077,7 +3077,7 @@
           <a:cs typeface="+mn-cs"/>
         </a:defRPr>
       </a:lvl3pPr>
-      <a:lvl4pPr marL="1371600" algn="l" defTabSz="914400" rtl="0" eaLnBrk="1" latinLnBrk="1" hangingPunct="1">
+      <a:lvl4pPr marL="1371600" algn="l" defTabSz="914400" rtl="0" eaLnBrk="1" latinLnBrk="0" hangingPunct="1">
         <a:defRPr sz="1800" kern="1200">
           <a:solidFill>
             <a:schemeClr val="tx1"/>
@@ -3087,7 +3087,7 @@
           <a:cs typeface="+mn-cs"/>
         </a:defRPr>
       </a:lvl4pPr>
-      <a:lvl5pPr marL="1828800" algn="l" defTabSz="914400" rtl="0" eaLnBrk="1" latinLnBrk="1" hangingPunct="1">
+      <a:lvl5pPr marL="1828800" algn="l" defTabSz="914400" rtl="0" eaLnBrk="1" latinLnBrk="0" hangingPunct="1">
         <a:defRPr sz="1800" kern="1200">
           <a:solidFill>
             <a:schemeClr val="tx1"/>
@@ -3097,7 +3097,7 @@
           <a:cs typeface="+mn-cs"/>
         </a:defRPr>
       </a:lvl5pPr>
-      <a:lvl6pPr marL="2286000" algn="l" defTabSz="914400" rtl="0" eaLnBrk="1" latinLnBrk="1" hangingPunct="1">
+      <a:lvl6pPr marL="2286000" algn="l" defTabSz="914400" rtl="0" eaLnBrk="1" latinLnBrk="0" hangingPunct="1">
         <a:defRPr sz="1800" kern="1200">
           <a:solidFill>
             <a:schemeClr val="tx1"/>
@@ -3107,7 +3107,7 @@
           <a:cs typeface="+mn-cs"/>
         </a:defRPr>
       </a:lvl6pPr>
-      <a:lvl7pPr marL="2743200" algn="l" defTabSz="914400" rtl="0" eaLnBrk="1" latinLnBrk="1" hangingPunct="1">
+      <a:lvl7pPr marL="2743200" algn="l" defTabSz="914400" rtl="0" eaLnBrk="1" latinLnBrk="0" hangingPunct="1">
         <a:defRPr sz="1800" kern="1200">
           <a:solidFill>
             <a:schemeClr val="tx1"/>
@@ -3117,7 +3117,7 @@
           <a:cs typeface="+mn-cs"/>
         </a:defRPr>
       </a:lvl7pPr>
-      <a:lvl8pPr marL="3200400" algn="l" defTabSz="914400" rtl="0" eaLnBrk="1" latinLnBrk="1" hangingPunct="1">
+      <a:lvl8pPr marL="3200400" algn="l" defTabSz="914400" rtl="0" eaLnBrk="1" latinLnBrk="0" hangingPunct="1">
         <a:defRPr sz="1800" kern="1200">
           <a:solidFill>
             <a:schemeClr val="tx1"/>
@@ -3127,7 +3127,7 @@
           <a:cs typeface="+mn-cs"/>
         </a:defRPr>
       </a:lvl8pPr>
-      <a:lvl9pPr marL="3657600" algn="l" defTabSz="914400" rtl="0" eaLnBrk="1" latinLnBrk="1" hangingPunct="1">
+      <a:lvl9pPr marL="3657600" algn="l" defTabSz="914400" rtl="0" eaLnBrk="1" latinLnBrk="0" hangingPunct="1">
         <a:defRPr sz="1800" kern="1200">
           <a:solidFill>
             <a:schemeClr val="tx1"/>
@@ -4874,7 +4874,7 @@
                 <a:latin typeface="맑은 고딕"/>
                 <a:ea typeface="맑은 고딕"/>
               </a:rPr>
-              <a:t>Anthropic, 2026, www</a:t>
+              <a:t>[Anthropic]</a:t>
             </a:r>
           </a:p>
         </p:txBody>
@@ -6087,7 +6087,7 @@
                 <a:latin typeface="맑은 고딕"/>
                 <a:ea typeface="맑은 고딕"/>
               </a:rPr>
-              <a:t>Birgitta Böckeler, 2026</a:t>
+              <a:t>[Böckeler 2026]</a:t>
             </a:r>
           </a:p>
         </p:txBody>
@@ -7111,7 +7111,7 @@
                 <a:latin typeface="맑은 고딕"/>
                 <a:ea typeface="맑은 고딕"/>
               </a:rPr>
-              <a:t>Birgitta Böckeler, 2026</a:t>
+              <a:t>[Böckeler 2026]</a:t>
             </a:r>
           </a:p>
         </p:txBody>
@@ -8234,7 +8234,7 @@
                 <a:latin typeface="맑은 고딕"/>
                 <a:ea typeface="맑은 고딕"/>
               </a:rPr>
-              <a:t>(「09」)</a:t>
+              <a:t>(「09. 확인 지점」)</a:t>
             </a:r>
             <a:r>
               <a:rPr sz="1800" b="0">
@@ -10375,7 +10375,7 @@
                 <a:latin typeface="맑은 고딕"/>
                 <a:ea typeface="맑은 고딕"/>
               </a:rPr>
-              <a:t>Kent Beck, 2025</a:t>
+              <a:t>[Beck 2025]</a:t>
             </a:r>
           </a:p>
           <a:p>
@@ -10471,7 +10471,7 @@
                 <a:latin typeface="맑은 고딕"/>
                 <a:ea typeface="맑은 고딕"/>
               </a:rPr>
-              <a:t>(「07」)</a:t>
+              <a:t>(「07. 맥락 파일」)</a:t>
             </a:r>
             <a:r>
               <a:rPr sz="1600" b="0">
@@ -10511,7 +10511,7 @@
                 <a:latin typeface="맑은 고딕"/>
                 <a:ea typeface="맑은 고딕"/>
               </a:rPr>
-              <a:t>(「09」)</a:t>
+              <a:t>(「09. 확인 지점」)</a:t>
             </a:r>
             <a:r>
               <a:rPr sz="1600" b="0">
@@ -10885,7 +10885,7 @@
                 <a:latin typeface="맑은 고딕"/>
                 <a:ea typeface="맑은 고딕"/>
               </a:rPr>
-              <a:t>(「04」)</a:t>
+              <a:t>(「04. 맥락은 유한하다」)</a:t>
             </a:r>
             <a:r>
               <a:rPr sz="1600" b="0">
@@ -11239,7 +11239,7 @@
                 <a:latin typeface="맑은 고딕"/>
                 <a:ea typeface="맑은 고딕"/>
               </a:rPr>
-              <a:t>(「03」)</a:t>
+              <a:t>(「03. 에이전트에게 맡길 과제」)</a:t>
             </a:r>
             <a:r>
               <a:rPr sz="1600" b="0">
@@ -11279,7 +11279,7 @@
                 <a:latin typeface="맑은 고딕"/>
                 <a:ea typeface="맑은 고딕"/>
               </a:rPr>
-              <a:t>(「07」)</a:t>
+              <a:t>(「07. 맥락 파일」)</a:t>
             </a:r>
             <a:r>
               <a:rPr sz="1600" b="0">
@@ -15604,6 +15604,27 @@
             </a:r>
           </a:p>
           <a:p>
+            <a:pPr marL="342900" indent="0">
+              <a:spcBef>
+                <a:spcPts val="600"/>
+              </a:spcBef>
+              <a:spcAft>
+                <a:spcPts val="600"/>
+              </a:spcAft>
+              <a:buNone/>
+            </a:pPr>
+            <a:r>
+              <a:rPr sz="1800" b="1">
+                <a:solidFill>
+                  <a:srgbClr val="000000"/>
+                </a:solidFill>
+                <a:latin typeface="맑은 고딕"/>
+                <a:ea typeface="맑은 고딕"/>
+              </a:rPr>
+              <a:t>AI-native SW공학의 핵심</a:t>
+            </a:r>
+          </a:p>
+          <a:p>
             <a:pPr lvl="2" marL="723900" indent="-368300">
               <a:spcBef>
                 <a:spcPts val="600"/>
@@ -15616,6 +15637,16 @@
               <a:buChar char=""/>
             </a:pPr>
             <a:r>
+              <a:rPr sz="1800" b="1">
+                <a:solidFill>
+                  <a:srgbClr val="000000"/>
+                </a:solidFill>
+                <a:latin typeface="맑은 고딕"/>
+                <a:ea typeface="맑은 고딕"/>
+              </a:rPr>
+              <a:t>원칙</a:t>
+            </a:r>
+            <a:r>
               <a:rPr sz="1800" b="0">
                 <a:solidFill>
                   <a:srgbClr val="000000"/>
@@ -15623,30 +15654,7 @@
                 <a:latin typeface="맑은 고딕"/>
                 <a:ea typeface="맑은 고딕"/>
               </a:rPr>
-              <a:t>AI-native SW공학의 핵심</a:t>
-            </a:r>
-          </a:p>
-          <a:p>
-            <a:pPr lvl="3" marL="1077913" indent="-354013">
-              <a:spcBef>
-                <a:spcPts val="600"/>
-              </a:spcBef>
-              <a:spcAft>
-                <a:spcPts val="600"/>
-              </a:spcAft>
-              <a:buSzPct val="90000"/>
-              <a:buFont typeface="Wingdings" pitchFamily="2" charset="2"/>
-              <a:buChar char=""/>
-            </a:pPr>
-            <a:r>
-              <a:rPr sz="1600" b="1">
-                <a:solidFill>
-                  <a:srgbClr val="000000"/>
-                </a:solidFill>
-                <a:latin typeface="맑은 고딕"/>
-                <a:ea typeface="맑은 고딕"/>
-              </a:rPr>
-              <a:t>원칙</a:t>
+              <a:t> —</a:t>
             </a:r>
             <a:r>
               <a:rPr sz="1600" b="0">
@@ -15656,229 +15664,7 @@
                 <a:latin typeface="맑은 고딕"/>
                 <a:ea typeface="맑은 고딕"/>
               </a:rPr>
-              <a:t> —</a:t>
-            </a:r>
-            <a:r>
-              <a:rPr sz="1400" b="0">
-                <a:solidFill>
-                  <a:srgbClr val="000000"/>
-                </a:solidFill>
-                <a:latin typeface="맑은 고딕"/>
-                <a:ea typeface="맑은 고딕"/>
-              </a:rPr>
               <a:t> 자동화의 품질은 문제·모델·경계·책임의 판단 품질을 넘어서기 어렵다</a:t>
-            </a:r>
-          </a:p>
-          <a:p>
-            <a:pPr lvl="3" marL="1077913" indent="-354013">
-              <a:spcBef>
-                <a:spcPts val="600"/>
-              </a:spcBef>
-              <a:spcAft>
-                <a:spcPts val="600"/>
-              </a:spcAft>
-              <a:buSzPct val="90000"/>
-              <a:buFont typeface="Wingdings" pitchFamily="2" charset="2"/>
-              <a:buChar char=""/>
-            </a:pPr>
-            <a:r>
-              <a:rPr sz="1600" b="1">
-                <a:solidFill>
-                  <a:srgbClr val="000000"/>
-                </a:solidFill>
-                <a:latin typeface="맑은 고딕"/>
-                <a:ea typeface="맑은 고딕"/>
-              </a:rPr>
-              <a:t>맥락</a:t>
-            </a:r>
-            <a:r>
-              <a:rPr sz="1600" b="0">
-                <a:solidFill>
-                  <a:srgbClr val="000000"/>
-                </a:solidFill>
-                <a:latin typeface="맑은 고딕"/>
-                <a:ea typeface="맑은 고딕"/>
-              </a:rPr>
-              <a:t> —</a:t>
-            </a:r>
-            <a:r>
-              <a:rPr sz="1400" b="0">
-                <a:solidFill>
-                  <a:srgbClr val="000000"/>
-                </a:solidFill>
-                <a:latin typeface="맑은 고딕"/>
-                <a:ea typeface="맑은 고딕"/>
-              </a:rPr>
-              <a:t> 판단을 형식 있는 고신호로 고르고, 공통 규칙은 짧은 맥락 파일에 둔다</a:t>
-            </a:r>
-          </a:p>
-          <a:p>
-            <a:pPr lvl="3" marL="1077913" indent="-354013">
-              <a:spcBef>
-                <a:spcPts val="600"/>
-              </a:spcBef>
-              <a:spcAft>
-                <a:spcPts val="600"/>
-              </a:spcAft>
-              <a:buSzPct val="90000"/>
-              <a:buFont typeface="Wingdings" pitchFamily="2" charset="2"/>
-              <a:buChar char=""/>
-            </a:pPr>
-            <a:r>
-              <a:rPr sz="1600" b="1">
-                <a:solidFill>
-                  <a:srgbClr val="000000"/>
-                </a:solidFill>
-                <a:latin typeface="맑은 고딕"/>
-                <a:ea typeface="맑은 고딕"/>
-              </a:rPr>
-              <a:t>역할</a:t>
-            </a:r>
-            <a:r>
-              <a:rPr sz="1600" b="0">
-                <a:solidFill>
-                  <a:srgbClr val="000000"/>
-                </a:solidFill>
-                <a:latin typeface="맑은 고딕"/>
-                <a:ea typeface="맑은 고딕"/>
-              </a:rPr>
-              <a:t> —</a:t>
-            </a:r>
-            <a:r>
-              <a:rPr sz="1400" b="0">
-                <a:solidFill>
-                  <a:srgbClr val="000000"/>
-                </a:solidFill>
-                <a:latin typeface="맑은 고딕"/>
-                <a:ea typeface="맑은 고딕"/>
-              </a:rPr>
-              <a:t> 사람은 판단과 최종 책임, 에이전트는 실행. 확인 지점은 evidence를 본다</a:t>
-            </a:r>
-          </a:p>
-          <a:p>
-            <a:pPr lvl="3" marL="1077913" indent="-354013">
-              <a:spcBef>
-                <a:spcPts val="600"/>
-              </a:spcBef>
-              <a:spcAft>
-                <a:spcPts val="600"/>
-              </a:spcAft>
-              <a:buSzPct val="90000"/>
-              <a:buFont typeface="Wingdings" pitchFamily="2" charset="2"/>
-              <a:buChar char=""/>
-            </a:pPr>
-            <a:r>
-              <a:rPr sz="1600" b="1">
-                <a:solidFill>
-                  <a:srgbClr val="000000"/>
-                </a:solidFill>
-                <a:latin typeface="맑은 고딕"/>
-                <a:ea typeface="맑은 고딕"/>
-              </a:rPr>
-              <a:t>구성</a:t>
-            </a:r>
-            <a:r>
-              <a:rPr sz="1600" b="0">
-                <a:solidFill>
-                  <a:srgbClr val="000000"/>
-                </a:solidFill>
-                <a:latin typeface="맑은 고딕"/>
-                <a:ea typeface="맑은 고딕"/>
-              </a:rPr>
-              <a:t> —</a:t>
-            </a:r>
-            <a:r>
-              <a:rPr sz="1400" b="0">
-                <a:solidFill>
-                  <a:srgbClr val="000000"/>
-                </a:solidFill>
-                <a:latin typeface="맑은 고딕"/>
-                <a:ea typeface="맑은 고딕"/>
-              </a:rPr>
-              <a:t> 가드레일</a:t>
-            </a:r>
-            <a:r>
-              <a:rPr sz="1000" b="0">
-                <a:solidFill>
-                  <a:srgbClr val="000000"/>
-                </a:solidFill>
-                <a:latin typeface="맑은 고딕"/>
-                <a:ea typeface="맑은 고딕"/>
-              </a:rPr>
-              <a:t>(가이드)</a:t>
-            </a:r>
-            <a:r>
-              <a:rPr sz="1400" b="0">
-                <a:solidFill>
-                  <a:srgbClr val="000000"/>
-                </a:solidFill>
-                <a:latin typeface="맑은 고딕"/>
-                <a:ea typeface="맑은 고딕"/>
-              </a:rPr>
-              <a:t>과 하네스</a:t>
-            </a:r>
-            <a:r>
-              <a:rPr sz="1000" b="0">
-                <a:solidFill>
-                  <a:srgbClr val="000000"/>
-                </a:solidFill>
-                <a:latin typeface="맑은 고딕"/>
-                <a:ea typeface="맑은 고딕"/>
-              </a:rPr>
-              <a:t>(센서)</a:t>
-            </a:r>
-            <a:r>
-              <a:rPr sz="1400" b="0">
-                <a:solidFill>
-                  <a:srgbClr val="000000"/>
-                </a:solidFill>
-                <a:latin typeface="맑은 고딕"/>
-                <a:ea typeface="맑은 고딕"/>
-              </a:rPr>
-              <a:t>를 짝으로 둔다</a:t>
-            </a:r>
-          </a:p>
-          <a:p>
-            <a:pPr lvl="3" marL="1077913" indent="-354013">
-              <a:spcBef>
-                <a:spcPts val="600"/>
-              </a:spcBef>
-              <a:spcAft>
-                <a:spcPts val="600"/>
-              </a:spcAft>
-              <a:buSzPct val="90000"/>
-              <a:buFont typeface="Wingdings" pitchFamily="2" charset="2"/>
-              <a:buChar char=""/>
-            </a:pPr>
-            <a:r>
-              <a:rPr sz="1600" b="1">
-                <a:solidFill>
-                  <a:srgbClr val="000000"/>
-                </a:solidFill>
-                <a:latin typeface="맑은 고딕"/>
-                <a:ea typeface="맑은 고딕"/>
-              </a:rPr>
-              <a:t>잘못된 관행</a:t>
-            </a:r>
-            <a:r>
-              <a:rPr sz="1600" b="0">
-                <a:solidFill>
-                  <a:srgbClr val="000000"/>
-                </a:solidFill>
-                <a:latin typeface="맑은 고딕"/>
-                <a:ea typeface="맑은 고딕"/>
-              </a:rPr>
-              <a:t> —</a:t>
-            </a:r>
-            <a:r>
-              <a:rPr sz="1400" b="0">
-                <a:solidFill>
-                  <a:srgbClr val="000000"/>
-                </a:solidFill>
-                <a:latin typeface="맑은 고딕"/>
-                <a:ea typeface="맑은 고딕"/>
-              </a:rPr>
-              <a:t> 테스트를 끄는 에이전트, 맥락 쏟아붓기, 판단까지 맡기기</a:t>
             </a:r>
           </a:p>
           <a:p>
@@ -15894,6 +15680,16 @@
               <a:buChar char=""/>
             </a:pPr>
             <a:r>
+              <a:rPr sz="1800" b="1">
+                <a:solidFill>
+                  <a:srgbClr val="000000"/>
+                </a:solidFill>
+                <a:latin typeface="맑은 고딕"/>
+                <a:ea typeface="맑은 고딕"/>
+              </a:rPr>
+              <a:t>맥락</a:t>
+            </a:r>
+            <a:r>
               <a:rPr sz="1800" b="0">
                 <a:solidFill>
                   <a:srgbClr val="000000"/>
@@ -15901,11 +15697,21 @@
                 <a:latin typeface="맑은 고딕"/>
                 <a:ea typeface="맑은 고딕"/>
               </a:rPr>
-              <a:t>다음 세션</a:t>
-            </a:r>
-          </a:p>
-          <a:p>
-            <a:pPr lvl="3" marL="1077913" indent="-354013">
+              <a:t> —</a:t>
+            </a:r>
+            <a:r>
+              <a:rPr sz="1600" b="0">
+                <a:solidFill>
+                  <a:srgbClr val="000000"/>
+                </a:solidFill>
+                <a:latin typeface="맑은 고딕"/>
+                <a:ea typeface="맑은 고딕"/>
+              </a:rPr>
+              <a:t> 판단을 형식 있는 고신호로 고르고, 공통 규칙은 짧은 맥락 파일에 둔다</a:t>
+            </a:r>
+          </a:p>
+          <a:p>
+            <a:pPr lvl="2" marL="723900" indent="-368300">
               <a:spcBef>
                 <a:spcPts val="600"/>
               </a:spcBef>
@@ -15914,9 +15720,29 @@
               </a:spcAft>
               <a:buSzPct val="90000"/>
               <a:buFont typeface="Wingdings" pitchFamily="2" charset="2"/>
-              <a:buChar char=""/>
+              <a:buChar char=""/>
             </a:pPr>
             <a:r>
+              <a:rPr sz="1800" b="1">
+                <a:solidFill>
+                  <a:srgbClr val="000000"/>
+                </a:solidFill>
+                <a:latin typeface="맑은 고딕"/>
+                <a:ea typeface="맑은 고딕"/>
+              </a:rPr>
+              <a:t>역할</a:t>
+            </a:r>
+            <a:r>
+              <a:rPr sz="1800" b="0">
+                <a:solidFill>
+                  <a:srgbClr val="000000"/>
+                </a:solidFill>
+                <a:latin typeface="맑은 고딕"/>
+                <a:ea typeface="맑은 고딕"/>
+              </a:rPr>
+              <a:t> —</a:t>
+            </a:r>
+            <a:r>
               <a:rPr sz="1600" b="0">
                 <a:solidFill>
                   <a:srgbClr val="000000"/>
@@ -15924,10 +15750,180 @@
                 <a:latin typeface="맑은 고딕"/>
                 <a:ea typeface="맑은 고딕"/>
               </a:rPr>
+              <a:t> 사람은 판단과 최종 책임, 에이전트는 실행. 확인 지점은 evidence를 본다</a:t>
+            </a:r>
+          </a:p>
+          <a:p>
+            <a:pPr lvl="2" marL="723900" indent="-368300">
+              <a:spcBef>
+                <a:spcPts val="600"/>
+              </a:spcBef>
+              <a:spcAft>
+                <a:spcPts val="600"/>
+              </a:spcAft>
+              <a:buSzPct val="90000"/>
+              <a:buFont typeface="Wingdings" pitchFamily="2" charset="2"/>
+              <a:buChar char=""/>
+            </a:pPr>
+            <a:r>
+              <a:rPr sz="1800" b="1">
+                <a:solidFill>
+                  <a:srgbClr val="000000"/>
+                </a:solidFill>
+                <a:latin typeface="맑은 고딕"/>
+                <a:ea typeface="맑은 고딕"/>
+              </a:rPr>
+              <a:t>구성</a:t>
+            </a:r>
+            <a:r>
+              <a:rPr sz="1800" b="0">
+                <a:solidFill>
+                  <a:srgbClr val="000000"/>
+                </a:solidFill>
+                <a:latin typeface="맑은 고딕"/>
+                <a:ea typeface="맑은 고딕"/>
+              </a:rPr>
+              <a:t> —</a:t>
+            </a:r>
+            <a:r>
+              <a:rPr sz="1600" b="0">
+                <a:solidFill>
+                  <a:srgbClr val="000000"/>
+                </a:solidFill>
+                <a:latin typeface="맑은 고딕"/>
+                <a:ea typeface="맑은 고딕"/>
+              </a:rPr>
+              <a:t> 가드레일</a:t>
+            </a:r>
+            <a:r>
+              <a:rPr sz="1200" b="0">
+                <a:solidFill>
+                  <a:srgbClr val="000000"/>
+                </a:solidFill>
+                <a:latin typeface="맑은 고딕"/>
+                <a:ea typeface="맑은 고딕"/>
+              </a:rPr>
+              <a:t>(가이드)</a:t>
+            </a:r>
+            <a:r>
+              <a:rPr sz="1600" b="0">
+                <a:solidFill>
+                  <a:srgbClr val="000000"/>
+                </a:solidFill>
+                <a:latin typeface="맑은 고딕"/>
+                <a:ea typeface="맑은 고딕"/>
+              </a:rPr>
+              <a:t>과 하네스</a:t>
+            </a:r>
+            <a:r>
+              <a:rPr sz="1200" b="0">
+                <a:solidFill>
+                  <a:srgbClr val="000000"/>
+                </a:solidFill>
+                <a:latin typeface="맑은 고딕"/>
+                <a:ea typeface="맑은 고딕"/>
+              </a:rPr>
+              <a:t>(센서)</a:t>
+            </a:r>
+            <a:r>
+              <a:rPr sz="1600" b="0">
+                <a:solidFill>
+                  <a:srgbClr val="000000"/>
+                </a:solidFill>
+                <a:latin typeface="맑은 고딕"/>
+                <a:ea typeface="맑은 고딕"/>
+              </a:rPr>
+              <a:t>를 짝으로 둔다</a:t>
+            </a:r>
+          </a:p>
+          <a:p>
+            <a:pPr lvl="2" marL="723900" indent="-368300">
+              <a:spcBef>
+                <a:spcPts val="600"/>
+              </a:spcBef>
+              <a:spcAft>
+                <a:spcPts val="600"/>
+              </a:spcAft>
+              <a:buSzPct val="90000"/>
+              <a:buFont typeface="Wingdings" pitchFamily="2" charset="2"/>
+              <a:buChar char=""/>
+            </a:pPr>
+            <a:r>
+              <a:rPr sz="1800" b="1">
+                <a:solidFill>
+                  <a:srgbClr val="000000"/>
+                </a:solidFill>
+                <a:latin typeface="맑은 고딕"/>
+                <a:ea typeface="맑은 고딕"/>
+              </a:rPr>
+              <a:t>잘못된 관행</a:t>
+            </a:r>
+            <a:r>
+              <a:rPr sz="1800" b="0">
+                <a:solidFill>
+                  <a:srgbClr val="000000"/>
+                </a:solidFill>
+                <a:latin typeface="맑은 고딕"/>
+                <a:ea typeface="맑은 고딕"/>
+              </a:rPr>
+              <a:t> —</a:t>
+            </a:r>
+            <a:r>
+              <a:rPr sz="1600" b="0">
+                <a:solidFill>
+                  <a:srgbClr val="000000"/>
+                </a:solidFill>
+                <a:latin typeface="맑은 고딕"/>
+                <a:ea typeface="맑은 고딕"/>
+              </a:rPr>
+              <a:t> 테스트를 끄는 에이전트, 맥락 쏟아붓기, 판단까지 맡기기</a:t>
+            </a:r>
+          </a:p>
+          <a:p>
+            <a:pPr marL="342900" indent="0">
+              <a:spcBef>
+                <a:spcPts val="600"/>
+              </a:spcBef>
+              <a:spcAft>
+                <a:spcPts val="600"/>
+              </a:spcAft>
+              <a:buNone/>
+            </a:pPr>
+            <a:r>
+              <a:rPr sz="1800" b="1">
+                <a:solidFill>
+                  <a:srgbClr val="000000"/>
+                </a:solidFill>
+                <a:latin typeface="맑은 고딕"/>
+                <a:ea typeface="맑은 고딕"/>
+              </a:rPr>
+              <a:t>다음 세션</a:t>
+            </a:r>
+          </a:p>
+          <a:p>
+            <a:pPr lvl="2" marL="723900" indent="-368300">
+              <a:spcBef>
+                <a:spcPts val="600"/>
+              </a:spcBef>
+              <a:spcAft>
+                <a:spcPts val="600"/>
+              </a:spcAft>
+              <a:buSzPct val="90000"/>
+              <a:buFont typeface="Wingdings" pitchFamily="2" charset="2"/>
+              <a:buChar char=""/>
+            </a:pPr>
+            <a:r>
+              <a:rPr sz="1800" b="0">
+                <a:solidFill>
+                  <a:srgbClr val="000000"/>
+                </a:solidFill>
+                <a:latin typeface="맑은 고딕"/>
+                <a:ea typeface="맑은 고딕"/>
+              </a:rPr>
               <a:t>"</a:t>
             </a:r>
             <a:r>
-              <a:rPr sz="1600" b="1">
+              <a:rPr sz="1800" b="1">
                 <a:solidFill>
                   <a:srgbClr val="000000"/>
                 </a:solidFill>
@@ -15937,17 +15933,17 @@
               <a:t>후속 AI-native SW공학 과정</a:t>
             </a:r>
             <a:r>
+              <a:rPr sz="1800" b="0">
+                <a:solidFill>
+                  <a:srgbClr val="000000"/>
+                </a:solidFill>
+                <a:latin typeface="맑은 고딕"/>
+                <a:ea typeface="맑은 고딕"/>
+              </a:rPr>
+              <a:t>" —</a:t>
+            </a:r>
+            <a:r>
               <a:rPr sz="1600" b="0">
-                <a:solidFill>
-                  <a:srgbClr val="000000"/>
-                </a:solidFill>
-                <a:latin typeface="맑은 고딕"/>
-                <a:ea typeface="맑은 고딕"/>
-              </a:rPr>
-              <a:t>" —</a:t>
-            </a:r>
-            <a:r>
-              <a:rPr sz="1400" b="0">
                 <a:solidFill>
                   <a:srgbClr val="000000"/>
                 </a:solidFill>
@@ -19489,7 +19485,7 @@
                 <a:latin typeface="맑은 고딕"/>
                 <a:ea typeface="맑은 고딕"/>
               </a:rPr>
-              <a:t>Anthropic, 2025</a:t>
+              <a:t>[Anthropic 2025]</a:t>
             </a:r>
           </a:p>
         </p:txBody>
@@ -23916,7 +23912,7 @@
                 <a:latin typeface="맑은 고딕"/>
                 <a:ea typeface="맑은 고딕"/>
               </a:rPr>
-              <a:t>Anthropic, 2024</a:t>
+              <a:t>[Anthropic 2024]</a:t>
             </a:r>
           </a:p>
         </p:txBody>

--- a/courses/ooad/sessions/s14.pptx
+++ b/courses/ooad/sessions/s14.pptx
@@ -1220,7 +1220,7 @@
             <a:pPr lvl="0"/>
             <a:r>
               <a:rPr lang="ko-KR" sz="1200"/>
-              <a:t>"01. OOAD 개요"의 「32. AI 기반 소프트웨어공학」에서 예고한 구분 — 사람이 최종 책임지는 판단, 사람과 AI의 협업, AI가 주도할 수 있는 실행 — 을 실제 과제에 적용한다.</a:t>
+              <a:t>"01. OOAD 개요"의 「AI-native SW공학」에서 예고한 구분 — 사람이 최종 책임지는 판단, 사람과 AI의 협업, AI가 주도할 수 있는 실행 — 을 실제 과제에 적용한다.</a:t>
             </a:r>
           </a:p>
           <a:p>
@@ -3576,6 +3576,68 @@
               <a:t>15. 센서가 가리키는 판단</a:t>
             </a:r>
           </a:p>
+          <a:p>
+            <a:pPr lvl="1" marL="355600" indent="0">
+              <a:spcBef>
+                <a:spcPts val="300"/>
+              </a:spcBef>
+              <a:spcAft>
+                <a:spcPts val="300"/>
+              </a:spcAft>
+              <a:buNone/>
+            </a:pPr>
+            <a:r>
+              <a:rPr sz="1600" b="0">
+                <a:solidFill>
+                  <a:srgbClr val="000000"/>
+                </a:solidFill>
+                <a:latin typeface="맑은 고딕"/>
+                <a:ea typeface="맑은 고딕"/>
+              </a:rPr>
+              <a:t>16. 잘못된 관행 —</a:t>
+            </a:r>
+            <a:r>
+              <a:rPr sz="1400" b="0">
+                <a:solidFill>
+                  <a:srgbClr val="000000"/>
+                </a:solidFill>
+                <a:latin typeface="맑은 고딕"/>
+                <a:ea typeface="맑은 고딕"/>
+              </a:rPr>
+              <a:t> 테스트를 끄는 에이전트</a:t>
+            </a:r>
+          </a:p>
+          <a:p>
+            <a:pPr lvl="1" marL="355600" indent="0">
+              <a:spcBef>
+                <a:spcPts val="300"/>
+              </a:spcBef>
+              <a:spcAft>
+                <a:spcPts val="300"/>
+              </a:spcAft>
+              <a:buNone/>
+            </a:pPr>
+            <a:r>
+              <a:rPr sz="1600" b="0">
+                <a:solidFill>
+                  <a:srgbClr val="000000"/>
+                </a:solidFill>
+                <a:latin typeface="맑은 고딕"/>
+                <a:ea typeface="맑은 고딕"/>
+              </a:rPr>
+              <a:t>17. 잘못된 관행 —</a:t>
+            </a:r>
+            <a:r>
+              <a:rPr sz="1400" b="0">
+                <a:solidFill>
+                  <a:srgbClr val="000000"/>
+                </a:solidFill>
+                <a:latin typeface="맑은 고딕"/>
+                <a:ea typeface="맑은 고딕"/>
+              </a:rPr>
+              <a:t> 맥락 쏟아붓기</a:t>
+            </a:r>
+          </a:p>
         </p:txBody>
       </p:sp>
       <p:sp>
@@ -3680,68 +3742,6 @@
             <a:normAutofit/>
           </a:bodyPr>
           <a:lstStyle/>
-          <a:p>
-            <a:pPr lvl="1" marL="355600" indent="0">
-              <a:spcBef>
-                <a:spcPts val="300"/>
-              </a:spcBef>
-              <a:spcAft>
-                <a:spcPts val="300"/>
-              </a:spcAft>
-              <a:buNone/>
-            </a:pPr>
-            <a:r>
-              <a:rPr sz="1600" b="0">
-                <a:solidFill>
-                  <a:srgbClr val="000000"/>
-                </a:solidFill>
-                <a:latin typeface="맑은 고딕"/>
-                <a:ea typeface="맑은 고딕"/>
-              </a:rPr>
-              <a:t>16. 잘못된 관행 —</a:t>
-            </a:r>
-            <a:r>
-              <a:rPr sz="1400" b="0">
-                <a:solidFill>
-                  <a:srgbClr val="000000"/>
-                </a:solidFill>
-                <a:latin typeface="맑은 고딕"/>
-                <a:ea typeface="맑은 고딕"/>
-              </a:rPr>
-              <a:t> 테스트를 끄는 에이전트</a:t>
-            </a:r>
-          </a:p>
-          <a:p>
-            <a:pPr lvl="1" marL="355600" indent="0">
-              <a:spcBef>
-                <a:spcPts val="300"/>
-              </a:spcBef>
-              <a:spcAft>
-                <a:spcPts val="300"/>
-              </a:spcAft>
-              <a:buNone/>
-            </a:pPr>
-            <a:r>
-              <a:rPr sz="1600" b="0">
-                <a:solidFill>
-                  <a:srgbClr val="000000"/>
-                </a:solidFill>
-                <a:latin typeface="맑은 고딕"/>
-                <a:ea typeface="맑은 고딕"/>
-              </a:rPr>
-              <a:t>17. 잘못된 관행 —</a:t>
-            </a:r>
-            <a:r>
-              <a:rPr sz="1400" b="0">
-                <a:solidFill>
-                  <a:srgbClr val="000000"/>
-                </a:solidFill>
-                <a:latin typeface="맑은 고딕"/>
-                <a:ea typeface="맑은 고딕"/>
-              </a:rPr>
-              <a:t> 맥락 쏟아붓기</a:t>
-            </a:r>
-          </a:p>
           <a:p>
             <a:pPr lvl="1" marL="355600" indent="0">
               <a:spcBef>
@@ -11969,7 +11969,7 @@
         <p:spPr>
           <a:xfrm>
             <a:off x="365760" y="960120"/>
-            <a:ext cx="8622792" cy="5522976"/>
+            <a:ext cx="8622792" cy="5352345"/>
           </a:xfrm>
         </p:spPr>
         <p:txBody>
@@ -12852,7 +12852,7 @@
         <p:spPr>
           <a:xfrm>
             <a:off x="233172" y="1414318"/>
-            <a:ext cx="4338828" cy="5068778"/>
+            <a:ext cx="4338828" cy="4898147"/>
           </a:xfrm>
         </p:spPr>
         <p:txBody>
@@ -13183,7 +13183,7 @@
         <p:spPr>
           <a:xfrm>
             <a:off x="4572000" y="1414318"/>
-            <a:ext cx="4439412" cy="5068778"/>
+            <a:ext cx="4439412" cy="4898147"/>
           </a:xfrm>
         </p:spPr>
         <p:txBody>
@@ -14911,7 +14911,7 @@
         <p:spPr>
           <a:xfrm>
             <a:off x="233172" y="1414318"/>
-            <a:ext cx="4338828" cy="5068778"/>
+            <a:ext cx="4338828" cy="4898147"/>
           </a:xfrm>
         </p:spPr>
         <p:txBody>
@@ -15162,7 +15162,7 @@
         <p:spPr>
           <a:xfrm>
             <a:off x="4572000" y="1414318"/>
-            <a:ext cx="4439412" cy="5068778"/>
+            <a:ext cx="4439412" cy="4898147"/>
           </a:xfrm>
         </p:spPr>
         <p:txBody>

--- a/courses/ooad/sessions/s14.pptx
+++ b/courses/ooad/sessions/s14.pptx
@@ -28,10 +28,6 @@
     <p:sldId id="273" r:id="javaLecture18"/>
     <p:sldId id="274" r:id="javaLecture19"/>
     <p:sldId id="275" r:id="javaLecture20"/>
-    <p:sldId id="276" r:id="javaLecture21"/>
-    <p:sldId id="277" r:id="javaLecture22"/>
-    <p:sldId id="278" r:id="javaLecture23"/>
-    <p:sldId id="279" r:id="javaLecture24"/>
   </p:sldIdLst>
   <p:sldSz cx="9144000" cy="6858000" type="screen4x3"/>
   <p:notesSz cx="6858000" cy="9144000"/>
@@ -1241,257 +1237,6 @@
 </file>
 
 <file path=ppt/notesSlides/notesSlide20.xml><?xml version="1.0" encoding="utf-8"?>
-<p:notes xmlns:a="http://schemas.openxmlformats.org/drawingml/2006/main" xmlns:r="http://schemas.openxmlformats.org/officeDocument/2006/relationships" xmlns:p="http://schemas.openxmlformats.org/presentationml/2006/main">
-  <p:cSld>
-    <p:spTree>
-      <p:nvGrpSpPr>
-        <p:cNvPr id="1" name=""/>
-        <p:cNvGrpSpPr/>
-        <p:nvPr/>
-      </p:nvGrpSpPr>
-      <p:grpSpPr>
-        <a:xfrm>
-          <a:off x="0" y="0"/>
-          <a:ext cx="0" cy="0"/>
-          <a:chOff x="0" y="0"/>
-          <a:chExt cx="0" cy="0"/>
-        </a:xfrm>
-      </p:grpSpPr>
-      <p:sp>
-        <p:nvSpPr>
-          <p:cNvPr id="2" name="슬라이드 이미지 개체 틀"/>
-          <p:cNvSpPr/>
-          <p:nvPr>
-            <p:ph type="sldImg" idx="2"/>
-          </p:nvPr>
-        </p:nvSpPr>
-        <p:spPr/>
-        <p:txBody>
-          <a:bodyPr/>
-          <a:lstStyle/>
-          <a:p/>
-        </p:txBody>
-      </p:sp>
-      <p:sp>
-        <p:nvSpPr>
-          <p:cNvPr id="3" name="슬라이드 노트 개체 틀"/>
-          <p:cNvSpPr/>
-          <p:nvPr>
-            <p:ph type="body" idx="3"/>
-          </p:nvPr>
-        </p:nvSpPr>
-        <p:spPr/>
-        <p:txBody>
-          <a:bodyPr/>
-          <a:lstStyle/>
-          <a:p>
-            <a:pPr lvl="0"/>
-            <a:r>
-              <a:rPr lang="ko-KR" sz="1200"/>
-              <a:t>LLM은 맥락 패키지에 모든 산출물을 넣거나, 상태 기계의 결정을 에이전트에게 맡기는 계획을 쓰기 쉽다. 점검 항목 1·2로 되돌린다.</a:t>
-            </a:r>
-          </a:p>
-          <a:p>
-            <a:pPr lvl="0"/>
-            <a:r>
-              <a:rPr lang="ko-KR" sz="1200"/>
-              <a:t>실습의 결과물을 실제 코딩 에이전트에게 주고 결과를 확인하게 할 수도 있다. 시간이 없으면 계획까지로 충분하다.</a:t>
-            </a:r>
-          </a:p>
-        </p:txBody>
-      </p:sp>
-    </p:spTree>
-  </p:cSld>
-  <p:clrMapOvr>
-    <a:masterClrMapping/>
-  </p:clrMapOvr>
-</p:notes>
-</file>
-
-<file path=ppt/notesSlides/notesSlide21.xml><?xml version="1.0" encoding="utf-8"?>
-<p:notes xmlns:a="http://schemas.openxmlformats.org/drawingml/2006/main" xmlns:r="http://schemas.openxmlformats.org/officeDocument/2006/relationships" xmlns:p="http://schemas.openxmlformats.org/presentationml/2006/main">
-  <p:cSld>
-    <p:spTree>
-      <p:nvGrpSpPr>
-        <p:cNvPr id="1" name=""/>
-        <p:cNvGrpSpPr/>
-        <p:nvPr/>
-      </p:nvGrpSpPr>
-      <p:grpSpPr>
-        <a:xfrm>
-          <a:off x="0" y="0"/>
-          <a:ext cx="0" cy="0"/>
-          <a:chOff x="0" y="0"/>
-          <a:chExt cx="0" cy="0"/>
-        </a:xfrm>
-      </p:grpSpPr>
-      <p:sp>
-        <p:nvSpPr>
-          <p:cNvPr id="2" name="슬라이드 이미지 개체 틀"/>
-          <p:cNvSpPr/>
-          <p:nvPr>
-            <p:ph type="sldImg" idx="2"/>
-          </p:nvPr>
-        </p:nvSpPr>
-        <p:spPr/>
-        <p:txBody>
-          <a:bodyPr/>
-          <a:lstStyle/>
-          <a:p/>
-        </p:txBody>
-      </p:sp>
-      <p:sp>
-        <p:nvSpPr>
-          <p:cNvPr id="3" name="슬라이드 노트 개체 틀"/>
-          <p:cNvSpPr/>
-          <p:nvPr>
-            <p:ph type="body" idx="3"/>
-          </p:nvPr>
-        </p:nvSpPr>
-        <p:spPr/>
-        <p:txBody>
-          <a:bodyPr/>
-          <a:lstStyle/>
-          <a:p>
-            <a:pPr lvl="0"/>
-            <a:r>
-              <a:rPr lang="ko-KR" sz="1200"/>
-              <a:t>배송 요청 일괄 처리(24시간 전)의 코드도 선례로 줄 수 있다. 배송 요청됨으로 바뀌는 곳이 그 코드이기 때문이다.</a:t>
-            </a:r>
-          </a:p>
-        </p:txBody>
-      </p:sp>
-    </p:spTree>
-  </p:cSld>
-  <p:clrMapOvr>
-    <a:masterClrMapping/>
-  </p:clrMapOvr>
-</p:notes>
-</file>
-
-<file path=ppt/notesSlides/notesSlide22.xml><?xml version="1.0" encoding="utf-8"?>
-<p:notes xmlns:a="http://schemas.openxmlformats.org/drawingml/2006/main" xmlns:r="http://schemas.openxmlformats.org/officeDocument/2006/relationships" xmlns:p="http://schemas.openxmlformats.org/presentationml/2006/main">
-  <p:cSld>
-    <p:spTree>
-      <p:nvGrpSpPr>
-        <p:cNvPr id="1" name=""/>
-        <p:cNvGrpSpPr/>
-        <p:nvPr/>
-      </p:nvGrpSpPr>
-      <p:grpSpPr>
-        <a:xfrm>
-          <a:off x="0" y="0"/>
-          <a:ext cx="0" cy="0"/>
-          <a:chOff x="0" y="0"/>
-          <a:chExt cx="0" cy="0"/>
-        </a:xfrm>
-      </p:grpSpPr>
-      <p:sp>
-        <p:nvSpPr>
-          <p:cNvPr id="2" name="슬라이드 이미지 개체 틀"/>
-          <p:cNvSpPr/>
-          <p:nvPr>
-            <p:ph type="sldImg" idx="2"/>
-          </p:nvPr>
-        </p:nvSpPr>
-        <p:spPr/>
-        <p:txBody>
-          <a:bodyPr/>
-          <a:lstStyle/>
-          <a:p/>
-        </p:txBody>
-      </p:sp>
-      <p:sp>
-        <p:nvSpPr>
-          <p:cNvPr id="3" name="슬라이드 노트 개체 틀"/>
-          <p:cNvSpPr/>
-          <p:nvPr>
-            <p:ph type="body" idx="3"/>
-          </p:nvPr>
-        </p:nvSpPr>
-        <p:spPr/>
-        <p:txBody>
-          <a:bodyPr/>
-          <a:lstStyle/>
-          <a:p>
-            <a:pPr lvl="0"/>
-            <a:r>
-              <a:rPr lang="ko-KR" sz="1200"/>
-              <a:t>"12. 구현·검증·DevOps와 SW공학 피드백" 실습의 feedback 배치 (안)과 같은 테스트다. 사람을 위해 만든 센서가 에이전트의 센서가 된다.</a:t>
-            </a:r>
-          </a:p>
-        </p:txBody>
-      </p:sp>
-    </p:spTree>
-  </p:cSld>
-  <p:clrMapOvr>
-    <a:masterClrMapping/>
-  </p:clrMapOvr>
-</p:notes>
-</file>
-
-<file path=ppt/notesSlides/notesSlide23.xml><?xml version="1.0" encoding="utf-8"?>
-<p:notes xmlns:a="http://schemas.openxmlformats.org/drawingml/2006/main" xmlns:r="http://schemas.openxmlformats.org/officeDocument/2006/relationships" xmlns:p="http://schemas.openxmlformats.org/presentationml/2006/main">
-  <p:cSld>
-    <p:spTree>
-      <p:nvGrpSpPr>
-        <p:cNvPr id="1" name=""/>
-        <p:cNvGrpSpPr/>
-        <p:nvPr/>
-      </p:nvGrpSpPr>
-      <p:grpSpPr>
-        <a:xfrm>
-          <a:off x="0" y="0"/>
-          <a:ext cx="0" cy="0"/>
-          <a:chOff x="0" y="0"/>
-          <a:chExt cx="0" cy="0"/>
-        </a:xfrm>
-      </p:grpSpPr>
-      <p:sp>
-        <p:nvSpPr>
-          <p:cNvPr id="2" name="슬라이드 이미지 개체 틀"/>
-          <p:cNvSpPr/>
-          <p:nvPr>
-            <p:ph type="sldImg" idx="2"/>
-          </p:nvPr>
-        </p:nvSpPr>
-        <p:spPr/>
-        <p:txBody>
-          <a:bodyPr/>
-          <a:lstStyle/>
-          <a:p/>
-        </p:txBody>
-      </p:sp>
-      <p:sp>
-        <p:nvSpPr>
-          <p:cNvPr id="3" name="슬라이드 노트 개체 틀"/>
-          <p:cNvSpPr/>
-          <p:nvPr>
-            <p:ph type="body" idx="3"/>
-          </p:nvPr>
-        </p:nvSpPr>
-        <p:spPr/>
-        <p:txBody>
-          <a:bodyPr/>
-          <a:lstStyle/>
-          <a:p>
-            <a:pPr lvl="0"/>
-            <a:r>
-              <a:rPr lang="ko-KR" sz="1200"/>
-              <a:t>과정의 산출물이 문서로 끝나지 않고 에이전트의 맥락과 센서로 이어진다는 것이 이 과정의 마지막 메시지다.</a:t>
-            </a:r>
-          </a:p>
-        </p:txBody>
-      </p:sp>
-    </p:spTree>
-  </p:cSld>
-  <p:clrMapOvr>
-    <a:masterClrMapping/>
-  </p:clrMapOvr>
-</p:notes>
-</file>
-
-<file path=ppt/notesSlides/notesSlide24.xml><?xml version="1.0" encoding="utf-8"?>
 <p:notes xmlns:a="http://schemas.openxmlformats.org/drawingml/2006/main" xmlns:r="http://schemas.openxmlformats.org/officeDocument/2006/relationships" xmlns:p="http://schemas.openxmlformats.org/presentationml/2006/main">
   <p:cSld>
     <p:spTree>
@@ -3791,131 +3536,7 @@
                 <a:latin typeface="맑은 고딕"/>
                 <a:ea typeface="맑은 고딕"/>
               </a:rPr>
-              <a:t>19. 실습 —</a:t>
-            </a:r>
-            <a:r>
-              <a:rPr sz="1400" b="0">
-                <a:solidFill>
-                  <a:srgbClr val="000000"/>
-                </a:solidFill>
-                <a:latin typeface="맑은 고딕"/>
-                <a:ea typeface="맑은 고딕"/>
-              </a:rPr>
-              <a:t> 에이전트에게 맡기기</a:t>
-            </a:r>
-          </a:p>
-          <a:p>
-            <a:pPr lvl="1" marL="355600" indent="0">
-              <a:spcBef>
-                <a:spcPts val="300"/>
-              </a:spcBef>
-              <a:spcAft>
-                <a:spcPts val="300"/>
-              </a:spcAft>
-              <a:buNone/>
-            </a:pPr>
-            <a:r>
-              <a:rPr sz="1600" b="0">
-                <a:solidFill>
-                  <a:srgbClr val="000000"/>
-                </a:solidFill>
-                <a:latin typeface="맑은 고딕"/>
-                <a:ea typeface="맑은 고딕"/>
-              </a:rPr>
-              <a:t>20. 맥락 패키지 </a:t>
-            </a:r>
-            <a:r>
-              <a:rPr sz="1200" b="0">
-                <a:solidFill>
-                  <a:srgbClr val="000000"/>
-                </a:solidFill>
-                <a:latin typeface="맑은 고딕"/>
-                <a:ea typeface="맑은 고딕"/>
-              </a:rPr>
-              <a:t>(안)</a:t>
-            </a:r>
-          </a:p>
-          <a:p>
-            <a:pPr lvl="1" marL="355600" indent="0">
-              <a:spcBef>
-                <a:spcPts val="300"/>
-              </a:spcBef>
-              <a:spcAft>
-                <a:spcPts val="300"/>
-              </a:spcAft>
-              <a:buNone/>
-            </a:pPr>
-            <a:r>
-              <a:rPr sz="1600" b="0">
-                <a:solidFill>
-                  <a:srgbClr val="000000"/>
-                </a:solidFill>
-                <a:latin typeface="맑은 고딕"/>
-                <a:ea typeface="맑은 고딕"/>
-              </a:rPr>
-              <a:t>21. 검증 계획 </a:t>
-            </a:r>
-            <a:r>
-              <a:rPr sz="1200" b="0">
-                <a:solidFill>
-                  <a:srgbClr val="000000"/>
-                </a:solidFill>
-                <a:latin typeface="맑은 고딕"/>
-                <a:ea typeface="맑은 고딕"/>
-              </a:rPr>
-              <a:t>(안)</a:t>
-            </a:r>
-          </a:p>
-          <a:p>
-            <a:pPr lvl="1" marL="355600" indent="0">
-              <a:spcBef>
-                <a:spcPts val="300"/>
-              </a:spcBef>
-              <a:spcAft>
-                <a:spcPts val="300"/>
-              </a:spcAft>
-              <a:buNone/>
-            </a:pPr>
-            <a:r>
-              <a:rPr sz="1600" b="0">
-                <a:solidFill>
-                  <a:srgbClr val="000000"/>
-                </a:solidFill>
-                <a:latin typeface="맑은 고딕"/>
-                <a:ea typeface="맑은 고딕"/>
-              </a:rPr>
-              <a:t>22. 과정 보완 </a:t>
-            </a:r>
-            <a:r>
-              <a:rPr sz="1200" b="0">
-                <a:solidFill>
-                  <a:srgbClr val="000000"/>
-                </a:solidFill>
-                <a:latin typeface="맑은 고딕"/>
-                <a:ea typeface="맑은 고딕"/>
-              </a:rPr>
-              <a:t>(안)</a:t>
-            </a:r>
-          </a:p>
-          <a:p>
-            <a:pPr lvl="1" marL="355600" indent="0">
-              <a:spcBef>
-                <a:spcPts val="300"/>
-              </a:spcBef>
-              <a:spcAft>
-                <a:spcPts val="300"/>
-              </a:spcAft>
-              <a:buNone/>
-            </a:pPr>
-            <a:r>
-              <a:rPr sz="1600" b="0">
-                <a:solidFill>
-                  <a:srgbClr val="000000"/>
-                </a:solidFill>
-                <a:latin typeface="맑은 고딕"/>
-                <a:ea typeface="맑은 고딕"/>
-              </a:rPr>
-              <a:t>23. 요약</a:t>
+              <a:t>19. 요약</a:t>
             </a:r>
           </a:p>
         </p:txBody>
@@ -4089,8 +3710,8 @@
           </p:nvPr>
         </p:nvGraphicFramePr>
         <p:xfrm>
-          <a:off x="2109025" y="3058085"/>
-          <a:ext cx="4912360" cy="3873500"/>
+          <a:off x="2067115" y="3058085"/>
+          <a:ext cx="4996180" cy="3873500"/>
         </p:xfrm>
         <a:graphic>
           <a:graphicData uri="http://schemas.openxmlformats.org/drawingml/2006/table">
@@ -4098,7 +3719,7 @@
               <a:tblPr/>
               <a:tblGrid>
                 <a:gridCol w="947420"/>
-                <a:gridCol w="3964940"/>
+                <a:gridCol w="4048760"/>
               </a:tblGrid>
               <a:tr h="288000">
                 <a:tc>
@@ -4307,7 +3928,7 @@
                           <a:ea typeface="맑은 고딕" panose="020B0503020000020004" pitchFamily="34" charset="-127"/>
                           <a:cs typeface="맑은 고딕"/>
                         </a:rPr>
-                        <a:t>고칠 곳이 order 안인가, 테스트가 과제를 재현하는가</a:t>
+                        <a:t>고칠 곳이 order 안인가, 테스트가 과제를 재현하는가?</a:t>
                       </a:r>
                     </a:p>
                   </a:txBody>
@@ -4531,7 +4152,7 @@
                           <a:ea typeface="맑은 고딕" panose="020B0503020000020004" pitchFamily="34" charset="-127"/>
                           <a:cs typeface="맑은 고딕"/>
                         </a:rPr>
-                        <a:t>기대값이 바뀌지 않았는가, 계약이 상태 기계와 같은가</a:t>
+                        <a:t>기대값이 바뀌지 않았는가, 계약이 상태 기계와 같은가?</a:t>
                       </a:r>
                     </a:p>
                   </a:txBody>
@@ -11832,7 +11453,7 @@
                 <a:latin typeface="맑은 고딕"/>
                 <a:ea typeface="맑은 고딕"/>
               </a:rPr>
-              <a:t>19. 실습 — 에이전트에게 맡기기</a:t>
+              <a:t>19. 요약</a:t>
             </a:r>
           </a:p>
         </p:txBody>
@@ -11868,3596 +11489,6 @@
                 </a:solidFill>
               </a:rPr>
               <a:t>- 20 -</a:t>
-            </a:r>
-          </a:p>
-        </p:txBody>
-      </p:sp>
-      <p:sp>
-        <p:nvSpPr>
-          <p:cNvPr id="5" name="텍스트 개체 틀 4">
-            <a:extLst>
-              <a:ext uri="{FF2B5EF4-FFF2-40B4-BE49-F238E27FC236}">
-                <a16:creationId xmlns:a16="http://schemas.microsoft.com/office/drawing/2014/main" id="{D66274C8-E16F-5AEB-614B-D8D32DA3E8C6}"/>
-              </a:ext>
-            </a:extLst>
-          </p:cNvPr>
-          <p:cNvSpPr>
-            <a:spLocks noGrp="1"/>
-          </p:cNvSpPr>
-          <p:nvPr>
-            <p:ph type="body" sz="quarter" idx="11"/>
-          </p:nvPr>
-        </p:nvSpPr>
-        <p:spPr/>
-        <p:txBody>
-          <a:bodyPr/>
-          <a:lstStyle/>
-          <a:p>
-            <a:r>
-              <a:rPr kumimoji="1" lang="en-US" altLang="ko-KR" sz="1400" dirty="0" err="1"/>
-              <a:t>14. AI-native SW공학</a:t>
-            </a:r>
-          </a:p>
-        </p:txBody>
-      </p:sp>
-      <p:sp>
-        <p:nvSpPr>
-          <p:cNvPr id="6" name="텍스트 개체 틀 5">
-            <a:extLst>
-              <a:ext uri="{FF2B5EF4-FFF2-40B4-BE49-F238E27FC236}">
-                <a16:creationId xmlns:a16="http://schemas.microsoft.com/office/drawing/2014/main" id="{A24E58E1-194B-A320-AEEE-24D08685BB67}"/>
-              </a:ext>
-            </a:extLst>
-          </p:cNvPr>
-          <p:cNvSpPr>
-            <a:spLocks noGrp="1"/>
-          </p:cNvSpPr>
-          <p:nvPr>
-            <p:ph type="body" sz="quarter" idx="12"/>
-          </p:nvPr>
-        </p:nvSpPr>
-        <p:spPr/>
-        <p:txBody>
-          <a:bodyPr/>
-          <a:lstStyle/>
-          <a:p>
-            <a:endParaRPr kumimoji="1" lang="ko-KR" altLang="en-US" dirty="0"/>
-          </a:p>
-        </p:txBody>
-      </p:sp>
-      <p:sp>
-        <p:nvSpPr>
-          <p:cNvPr id="7" name="텍스트 개체 틀 6">
-            <a:extLst>
-              <a:ext uri="{FF2B5EF4-FFF2-40B4-BE49-F238E27FC236}">
-                <a16:creationId xmlns:a16="http://schemas.microsoft.com/office/drawing/2014/main" id="{A219F420-613B-6234-45F6-0955A9A4505F}"/>
-              </a:ext>
-            </a:extLst>
-          </p:cNvPr>
-          <p:cNvSpPr>
-            <a:spLocks noGrp="1"/>
-          </p:cNvSpPr>
-          <p:nvPr>
-            <p:ph type="body" sz="quarter" idx="13"/>
-          </p:nvPr>
-        </p:nvSpPr>
-        <p:spPr/>
-        <p:txBody>
-          <a:bodyPr/>
-          <a:lstStyle/>
-          <a:p>
-            <a:endParaRPr kumimoji="1" lang="en-US" altLang="ko-KR" dirty="0"/>
-          </a:p>
-        </p:txBody>
-      </p:sp>
-      <p:sp>
-        <p:nvSpPr>
-          <p:cNvPr id="8" name="내용 개체 틀 7">
-            <a:extLst>
-              <a:ext uri="{FF2B5EF4-FFF2-40B4-BE49-F238E27FC236}">
-                <a16:creationId xmlns:a16="http://schemas.microsoft.com/office/drawing/2014/main" id="{BEBA2C4A-B0BF-F2E4-EA6E-614C99CBA184}"/>
-              </a:ext>
-            </a:extLst>
-          </p:cNvPr>
-          <p:cNvSpPr>
-            <a:spLocks noGrp="1"/>
-          </p:cNvSpPr>
-          <p:nvPr>
-            <p:ph idx="1"/>
-          </p:nvPr>
-        </p:nvSpPr>
-        <p:spPr>
-          <a:xfrm>
-            <a:off x="365760" y="960120"/>
-            <a:ext cx="8622792" cy="5352345"/>
-          </a:xfrm>
-        </p:spPr>
-        <p:txBody>
-          <a:bodyPr>
-            <a:normAutofit/>
-          </a:bodyPr>
-          <a:lstStyle/>
-          <a:p>
-            <a:pPr marL="0" indent="0">
-              <a:spcBef>
-                <a:spcPts val="300"/>
-              </a:spcBef>
-              <a:spcAft>
-                <a:spcPts val="300"/>
-              </a:spcAft>
-              <a:buNone/>
-            </a:pPr>
-            <a:r>
-              <a:rPr sz="1600" b="0">
-                <a:solidFill>
-                  <a:srgbClr val="000000"/>
-                </a:solidFill>
-                <a:latin typeface="맑은 고딕"/>
-                <a:ea typeface="맑은 고딕"/>
-              </a:rPr>
-              <a:t>실습 12에서 정한 회차 상태 </a:t>
-            </a:r>
-            <a:r>
-              <a:rPr sz="1600" b="1">
-                <a:solidFill>
-                  <a:srgbClr val="000000"/>
-                </a:solidFill>
-                <a:latin typeface="맑은 고딕"/>
-                <a:ea typeface="맑은 고딕"/>
-              </a:rPr>
-              <a:t>배송 요청됨</a:t>
-            </a:r>
-            <a:r>
-              <a:rPr sz="1600" b="0">
-                <a:solidFill>
-                  <a:srgbClr val="000000"/>
-                </a:solidFill>
-                <a:latin typeface="맑은 고딕"/>
-                <a:ea typeface="맑은 고딕"/>
-              </a:rPr>
-              <a:t>의 구현을 에이전트에게 맡기기 위한 </a:t>
-            </a:r>
-            <a:r>
-              <a:rPr sz="1600" b="1">
-                <a:solidFill>
-                  <a:srgbClr val="000000"/>
-                </a:solidFill>
-                <a:latin typeface="맑은 고딕"/>
-                <a:ea typeface="맑은 고딕"/>
-              </a:rPr>
-              <a:t>맥락 패키지</a:t>
-            </a:r>
-            <a:r>
-              <a:rPr sz="1600" b="0">
-                <a:solidFill>
-                  <a:srgbClr val="000000"/>
-                </a:solidFill>
-                <a:latin typeface="맑은 고딕"/>
-                <a:ea typeface="맑은 고딕"/>
-              </a:rPr>
-              <a:t>와 </a:t>
-            </a:r>
-            <a:r>
-              <a:rPr sz="1600" b="1">
-                <a:solidFill>
-                  <a:srgbClr val="000000"/>
-                </a:solidFill>
-                <a:latin typeface="맑은 고딕"/>
-                <a:ea typeface="맑은 고딕"/>
-              </a:rPr>
-              <a:t>검증 계획</a:t>
-            </a:r>
-            <a:r>
-              <a:rPr sz="1600" b="0">
-                <a:solidFill>
-                  <a:srgbClr val="000000"/>
-                </a:solidFill>
-                <a:latin typeface="맑은 고딕"/>
-                <a:ea typeface="맑은 고딕"/>
-              </a:rPr>
-              <a:t>을 LLM과 함께 만들고, 점검 항목으로 </a:t>
-            </a:r>
-            <a:r>
-              <a:rPr sz="1600" b="1">
-                <a:solidFill>
-                  <a:srgbClr val="000000"/>
-                </a:solidFill>
-                <a:latin typeface="맑은 고딕"/>
-                <a:ea typeface="맑은 고딕"/>
-              </a:rPr>
-              <a:t>피드백</a:t>
-            </a:r>
-            <a:r>
-              <a:rPr sz="1600" b="0">
-                <a:solidFill>
-                  <a:srgbClr val="000000"/>
-                </a:solidFill>
-                <a:latin typeface="맑은 고딕"/>
-                <a:ea typeface="맑은 고딕"/>
-              </a:rPr>
-              <a:t>하여 완성하십시오.</a:t>
-            </a:r>
-          </a:p>
-          <a:p>
-            <a:pPr lvl="2" marL="723900" indent="-368300">
-              <a:spcBef>
-                <a:spcPts val="300"/>
-              </a:spcBef>
-              <a:spcAft>
-                <a:spcPts val="300"/>
-              </a:spcAft>
-              <a:buSzPct val="90000"/>
-              <a:buFont typeface="Wingdings" pitchFamily="2" charset="2"/>
-              <a:buChar char=""/>
-            </a:pPr>
-            <a:r>
-              <a:rPr sz="1800" b="1">
-                <a:solidFill>
-                  <a:srgbClr val="000000"/>
-                </a:solidFill>
-                <a:latin typeface="맑은 고딕"/>
-                <a:ea typeface="맑은 고딕"/>
-              </a:rPr>
-              <a:t>투입물</a:t>
-            </a:r>
-          </a:p>
-          <a:p>
-            <a:pPr lvl="3" marL="723900" indent="0">
-              <a:spcBef>
-                <a:spcPts val="300"/>
-              </a:spcBef>
-              <a:spcAft>
-                <a:spcPts val="300"/>
-              </a:spcAft>
-              <a:buNone/>
-            </a:pPr>
-            <a:r>
-              <a:rPr sz="1600" b="0">
-                <a:solidFill>
-                  <a:srgbClr val="000000"/>
-                </a:solidFill>
-                <a:latin typeface="맑은 고딕"/>
-                <a:ea typeface="맑은 고딕"/>
-              </a:rPr>
-              <a:t>실습 2~13의 </a:t>
-            </a:r>
-            <a:r>
-              <a:rPr sz="1600" b="1">
-                <a:solidFill>
-                  <a:srgbClr val="000000"/>
-                </a:solidFill>
-                <a:latin typeface="맑은 고딕"/>
-                <a:ea typeface="맑은 고딕"/>
-              </a:rPr>
-              <a:t>산출물 전체</a:t>
-            </a:r>
-            <a:r>
-              <a:rPr sz="1600" b="0">
-                <a:solidFill>
-                  <a:srgbClr val="000000"/>
-                </a:solidFill>
-                <a:latin typeface="맑은 고딕"/>
-                <a:ea typeface="맑은 고딕"/>
-              </a:rPr>
-              <a:t>와 실습 12의 보완 </a:t>
-            </a:r>
-            <a:r>
-              <a:rPr sz="1000" b="0">
-                <a:solidFill>
-                  <a:srgbClr val="000000"/>
-                </a:solidFill>
-                <a:latin typeface="맑은 고딕"/>
-                <a:ea typeface="맑은 고딕"/>
-              </a:rPr>
-              <a:t>(안)</a:t>
-            </a:r>
-          </a:p>
-          <a:p>
-            <a:pPr lvl="2" marL="723900" indent="-368300">
-              <a:spcBef>
-                <a:spcPts val="300"/>
-              </a:spcBef>
-              <a:spcAft>
-                <a:spcPts val="300"/>
-              </a:spcAft>
-              <a:buSzPct val="90000"/>
-              <a:buFont typeface="Wingdings" pitchFamily="2" charset="2"/>
-              <a:buChar char=""/>
-            </a:pPr>
-            <a:r>
-              <a:rPr sz="1800" b="1">
-                <a:solidFill>
-                  <a:srgbClr val="000000"/>
-                </a:solidFill>
-                <a:latin typeface="맑은 고딕"/>
-                <a:ea typeface="맑은 고딕"/>
-              </a:rPr>
-              <a:t>프롬프트</a:t>
-            </a:r>
-          </a:p>
-          <a:p>
-            <a:pPr lvl="3" marL="723900" indent="0">
-              <a:spcBef>
-                <a:spcPts val="300"/>
-              </a:spcBef>
-              <a:spcAft>
-                <a:spcPts val="300"/>
-              </a:spcAft>
-              <a:buNone/>
-            </a:pPr>
-            <a:r>
-              <a:rPr sz="1600" b="0">
-                <a:solidFill>
-                  <a:srgbClr val="000000"/>
-                </a:solidFill>
-                <a:latin typeface="맑은 고딕"/>
-                <a:ea typeface="맑은 고딕"/>
-              </a:rPr>
-              <a:t>① "배송 요청됨 구현 과제에 줄 </a:t>
-            </a:r>
-            <a:r>
-              <a:rPr sz="1600" b="1">
-                <a:solidFill>
-                  <a:srgbClr val="000000"/>
-                </a:solidFill>
-                <a:latin typeface="맑은 고딕"/>
-                <a:ea typeface="맑은 고딕"/>
-              </a:rPr>
-              <a:t>맥락 패키지</a:t>
-            </a:r>
-            <a:r>
-              <a:rPr sz="1000" b="0">
-                <a:solidFill>
-                  <a:srgbClr val="000000"/>
-                </a:solidFill>
-                <a:latin typeface="맑은 고딕"/>
-                <a:ea typeface="맑은 고딕"/>
-              </a:rPr>
-              <a:t>(맥락 파일의 규칙, 줄 산출물, 주지 않을 산출물)</a:t>
-            </a:r>
-            <a:r>
-              <a:rPr sz="1600" b="0">
-                <a:solidFill>
-                  <a:srgbClr val="000000"/>
-                </a:solidFill>
-                <a:latin typeface="맑은 고딕"/>
-                <a:ea typeface="맑은 고딕"/>
-              </a:rPr>
-              <a:t>를 써줘."</a:t>
-            </a:r>
-          </a:p>
-          <a:p>
-            <a:pPr lvl="3" marL="723900" indent="0">
-              <a:spcBef>
-                <a:spcPts val="300"/>
-              </a:spcBef>
-              <a:spcAft>
-                <a:spcPts val="300"/>
-              </a:spcAft>
-              <a:buNone/>
-            </a:pPr>
-            <a:r>
-              <a:rPr sz="1600" b="0">
-                <a:solidFill>
-                  <a:srgbClr val="000000"/>
-                </a:solidFill>
-                <a:latin typeface="맑은 고딕"/>
-                <a:ea typeface="맑은 고딕"/>
-              </a:rPr>
-              <a:t>② "이 과제의 </a:t>
-            </a:r>
-            <a:r>
-              <a:rPr sz="1600" b="1">
-                <a:solidFill>
-                  <a:srgbClr val="000000"/>
-                </a:solidFill>
-                <a:latin typeface="맑은 고딕"/>
-                <a:ea typeface="맑은 고딕"/>
-              </a:rPr>
-              <a:t>확인 지점</a:t>
-            </a:r>
-            <a:r>
-              <a:rPr sz="1600" b="0">
-                <a:solidFill>
-                  <a:srgbClr val="000000"/>
-                </a:solidFill>
-                <a:latin typeface="맑은 고딕"/>
-                <a:ea typeface="맑은 고딕"/>
-              </a:rPr>
-              <a:t>과 </a:t>
-            </a:r>
-            <a:r>
-              <a:rPr sz="1600" b="1">
-                <a:solidFill>
-                  <a:srgbClr val="000000"/>
-                </a:solidFill>
-                <a:latin typeface="맑은 고딕"/>
-                <a:ea typeface="맑은 고딕"/>
-              </a:rPr>
-              <a:t>센서</a:t>
-            </a:r>
-            <a:r>
-              <a:rPr sz="1000" b="0">
-                <a:solidFill>
-                  <a:srgbClr val="000000"/>
-                </a:solidFill>
-                <a:latin typeface="맑은 고딕"/>
-                <a:ea typeface="맑은 고딕"/>
-              </a:rPr>
-              <a:t>(테스트·검사)</a:t>
-            </a:r>
-            <a:r>
-              <a:rPr sz="1600" b="0">
-                <a:solidFill>
-                  <a:srgbClr val="000000"/>
-                </a:solidFill>
-                <a:latin typeface="맑은 고딕"/>
-                <a:ea typeface="맑은 고딕"/>
-              </a:rPr>
-              <a:t>를 표로 써줘. 각 센서가 실패하면 에이전트가 고칠지 멈출지도 써줘."</a:t>
-            </a:r>
-          </a:p>
-          <a:p>
-            <a:pPr lvl="2" marL="723900" indent="-368300">
-              <a:spcBef>
-                <a:spcPts val="300"/>
-              </a:spcBef>
-              <a:spcAft>
-                <a:spcPts val="300"/>
-              </a:spcAft>
-              <a:buSzPct val="90000"/>
-              <a:buFont typeface="Wingdings" pitchFamily="2" charset="2"/>
-              <a:buChar char=""/>
-            </a:pPr>
-            <a:r>
-              <a:rPr sz="1800" b="1">
-                <a:solidFill>
-                  <a:srgbClr val="000000"/>
-                </a:solidFill>
-                <a:latin typeface="맑은 고딕"/>
-                <a:ea typeface="맑은 고딕"/>
-              </a:rPr>
-              <a:t>점검 항목</a:t>
-            </a:r>
-          </a:p>
-          <a:p>
-            <a:pPr lvl="3" marL="947420" indent="-223520">
-              <a:spcBef>
-                <a:spcPts val="300"/>
-              </a:spcBef>
-              <a:spcAft>
-                <a:spcPts val="300"/>
-              </a:spcAft>
-              <a:buNone/>
-            </a:pPr>
-            <a:r>
-              <a:rPr sz="1600" b="0">
-                <a:solidFill>
-                  <a:srgbClr val="000000"/>
-                </a:solidFill>
-                <a:latin typeface="맑은 고딕"/>
-                <a:ea typeface="맑은 고딕"/>
-              </a:rPr>
-              <a:t>1. </a:t>
-            </a:r>
-            <a:r>
-              <a:rPr sz="1600" b="1">
-                <a:solidFill>
-                  <a:srgbClr val="000000"/>
-                </a:solidFill>
-                <a:latin typeface="맑은 고딕"/>
-                <a:ea typeface="맑은 고딕"/>
-              </a:rPr>
-              <a:t>판단</a:t>
-            </a:r>
-            <a:r>
-              <a:rPr sz="1600" b="0">
-                <a:solidFill>
-                  <a:srgbClr val="000000"/>
-                </a:solidFill>
-                <a:latin typeface="맑은 고딕"/>
-                <a:ea typeface="맑은 고딕"/>
-              </a:rPr>
-              <a:t> —</a:t>
-            </a:r>
-            <a:r>
-              <a:rPr sz="1050" b="0">
-                <a:solidFill>
-                  <a:srgbClr val="000000"/>
-                </a:solidFill>
-                <a:latin typeface="맑은 고딕"/>
-                <a:ea typeface="맑은 고딕"/>
-              </a:rPr>
-              <a:t> 사람이 먼저 정할 것</a:t>
-            </a:r>
-            <a:r>
-              <a:rPr sz="850" b="0">
-                <a:solidFill>
-                  <a:srgbClr val="000000"/>
-                </a:solidFill>
-                <a:latin typeface="맑은 고딕"/>
-                <a:ea typeface="맑은 고딕"/>
-              </a:rPr>
-              <a:t>(상태 기계·해지 계약)</a:t>
-            </a:r>
-            <a:r>
-              <a:rPr sz="1050" b="0">
-                <a:solidFill>
-                  <a:srgbClr val="000000"/>
-                </a:solidFill>
-                <a:latin typeface="맑은 고딕"/>
-                <a:ea typeface="맑은 고딕"/>
-              </a:rPr>
-              <a:t>을 맥락에서 확정했는가?</a:t>
-            </a:r>
-          </a:p>
-          <a:p>
-            <a:pPr lvl="3" marL="947420" indent="-223520">
-              <a:spcBef>
-                <a:spcPts val="300"/>
-              </a:spcBef>
-              <a:spcAft>
-                <a:spcPts val="300"/>
-              </a:spcAft>
-              <a:buNone/>
-            </a:pPr>
-            <a:r>
-              <a:rPr sz="1600" b="0">
-                <a:solidFill>
-                  <a:srgbClr val="000000"/>
-                </a:solidFill>
-                <a:latin typeface="맑은 고딕"/>
-                <a:ea typeface="맑은 고딕"/>
-              </a:rPr>
-              <a:t>2. </a:t>
-            </a:r>
-            <a:r>
-              <a:rPr sz="1600" b="1">
-                <a:solidFill>
-                  <a:srgbClr val="000000"/>
-                </a:solidFill>
-                <a:latin typeface="맑은 고딕"/>
-                <a:ea typeface="맑은 고딕"/>
-              </a:rPr>
-              <a:t>고신호</a:t>
-            </a:r>
-            <a:r>
-              <a:rPr sz="1600" b="0">
-                <a:solidFill>
-                  <a:srgbClr val="000000"/>
-                </a:solidFill>
-                <a:latin typeface="맑은 고딕"/>
-                <a:ea typeface="맑은 고딕"/>
-              </a:rPr>
-              <a:t> —</a:t>
-            </a:r>
-            <a:r>
-              <a:rPr sz="1050" b="0">
-                <a:solidFill>
-                  <a:srgbClr val="000000"/>
-                </a:solidFill>
-                <a:latin typeface="맑은 고딕"/>
-                <a:ea typeface="맑은 고딕"/>
-              </a:rPr>
-              <a:t> 맥락이 과제의 판단을 바꾸는 것만 담았는가?</a:t>
-            </a:r>
-          </a:p>
-          <a:p>
-            <a:pPr lvl="3" marL="947420" indent="-223520">
-              <a:spcBef>
-                <a:spcPts val="300"/>
-              </a:spcBef>
-              <a:spcAft>
-                <a:spcPts val="300"/>
-              </a:spcAft>
-              <a:buNone/>
-            </a:pPr>
-            <a:r>
-              <a:rPr sz="1600" b="0">
-                <a:solidFill>
-                  <a:srgbClr val="000000"/>
-                </a:solidFill>
-                <a:latin typeface="맑은 고딕"/>
-                <a:ea typeface="맑은 고딕"/>
-              </a:rPr>
-              <a:t>3. </a:t>
-            </a:r>
-            <a:r>
-              <a:rPr sz="1600" b="1">
-                <a:solidFill>
-                  <a:srgbClr val="000000"/>
-                </a:solidFill>
-                <a:latin typeface="맑은 고딕"/>
-                <a:ea typeface="맑은 고딕"/>
-              </a:rPr>
-              <a:t>짝</a:t>
-            </a:r>
-            <a:r>
-              <a:rPr sz="1600" b="0">
-                <a:solidFill>
-                  <a:srgbClr val="000000"/>
-                </a:solidFill>
-                <a:latin typeface="맑은 고딕"/>
-                <a:ea typeface="맑은 고딕"/>
-              </a:rPr>
-              <a:t> —</a:t>
-            </a:r>
-            <a:r>
-              <a:rPr sz="1050" b="0">
-                <a:solidFill>
-                  <a:srgbClr val="000000"/>
-                </a:solidFill>
-                <a:latin typeface="맑은 고딕"/>
-                <a:ea typeface="맑은 고딕"/>
-              </a:rPr>
-              <a:t> 가이드마다 짝이 되는 센서가 있는가?</a:t>
-            </a:r>
-          </a:p>
-          <a:p>
-            <a:pPr lvl="3" marL="947420" indent="-223520">
-              <a:spcBef>
-                <a:spcPts val="300"/>
-              </a:spcBef>
-              <a:spcAft>
-                <a:spcPts val="300"/>
-              </a:spcAft>
-              <a:buNone/>
-            </a:pPr>
-            <a:r>
-              <a:rPr sz="1600" b="0">
-                <a:solidFill>
-                  <a:srgbClr val="000000"/>
-                </a:solidFill>
-                <a:latin typeface="맑은 고딕"/>
-                <a:ea typeface="맑은 고딕"/>
-              </a:rPr>
-              <a:t>4. </a:t>
-            </a:r>
-            <a:r>
-              <a:rPr sz="1600" b="1">
-                <a:solidFill>
-                  <a:srgbClr val="000000"/>
-                </a:solidFill>
-                <a:latin typeface="맑은 고딕"/>
-                <a:ea typeface="맑은 고딕"/>
-              </a:rPr>
-              <a:t>멈춤</a:t>
-            </a:r>
-            <a:r>
-              <a:rPr sz="1600" b="0">
-                <a:solidFill>
-                  <a:srgbClr val="000000"/>
-                </a:solidFill>
-                <a:latin typeface="맑은 고딕"/>
-                <a:ea typeface="맑은 고딕"/>
-              </a:rPr>
-              <a:t> —</a:t>
-            </a:r>
-            <a:r>
-              <a:rPr sz="1050" b="0">
-                <a:solidFill>
-                  <a:srgbClr val="000000"/>
-                </a:solidFill>
-                <a:latin typeface="맑은 고딕"/>
-                <a:ea typeface="맑은 고딕"/>
-              </a:rPr>
-              <a:t> 기대값·상태 전이·의존 규칙의 변경에서 멈추게 했는가?</a:t>
-            </a:r>
-          </a:p>
-          <a:p>
-            <a:pPr lvl="3" marL="947420" indent="-223520">
-              <a:spcBef>
-                <a:spcPts val="300"/>
-              </a:spcBef>
-              <a:spcAft>
-                <a:spcPts val="300"/>
-              </a:spcAft>
-              <a:buNone/>
-            </a:pPr>
-            <a:r>
-              <a:rPr sz="1600" b="0">
-                <a:solidFill>
-                  <a:srgbClr val="000000"/>
-                </a:solidFill>
-                <a:latin typeface="맑은 고딕"/>
-                <a:ea typeface="맑은 고딕"/>
-              </a:rPr>
-              <a:t>5. </a:t>
-            </a:r>
-            <a:r>
-              <a:rPr sz="1600" b="1">
-                <a:solidFill>
-                  <a:srgbClr val="000000"/>
-                </a:solidFill>
-                <a:latin typeface="맑은 고딕"/>
-                <a:ea typeface="맑은 고딕"/>
-              </a:rPr>
-              <a:t>evidence</a:t>
-            </a:r>
-            <a:r>
-              <a:rPr sz="1600" b="0">
-                <a:solidFill>
-                  <a:srgbClr val="000000"/>
-                </a:solidFill>
-                <a:latin typeface="맑은 고딕"/>
-                <a:ea typeface="맑은 고딕"/>
-              </a:rPr>
-              <a:t> —</a:t>
-            </a:r>
-            <a:r>
-              <a:rPr sz="1050" b="0">
-                <a:solidFill>
-                  <a:srgbClr val="000000"/>
-                </a:solidFill>
-                <a:latin typeface="맑은 고딕"/>
-                <a:ea typeface="맑은 고딕"/>
-              </a:rPr>
-              <a:t> 완료를 테스트 출력으로 보이게 했는가?</a:t>
-            </a:r>
-          </a:p>
-          <a:p>
-            <a:pPr lvl="2" marL="723900" indent="-368300">
-              <a:spcBef>
-                <a:spcPts val="300"/>
-              </a:spcBef>
-              <a:spcAft>
-                <a:spcPts val="300"/>
-              </a:spcAft>
-              <a:buSzPct val="90000"/>
-              <a:buFont typeface="Wingdings" pitchFamily="2" charset="2"/>
-              <a:buChar char=""/>
-            </a:pPr>
-            <a:r>
-              <a:rPr sz="1800" b="1">
-                <a:solidFill>
-                  <a:srgbClr val="000000"/>
-                </a:solidFill>
-                <a:latin typeface="맑은 고딕"/>
-                <a:ea typeface="맑은 고딕"/>
-              </a:rPr>
-              <a:t>결과물</a:t>
-            </a:r>
-            <a:r>
-              <a:rPr sz="1800" b="0">
-                <a:solidFill>
-                  <a:srgbClr val="000000"/>
-                </a:solidFill>
-                <a:latin typeface="맑은 고딕"/>
-                <a:ea typeface="맑은 고딕"/>
-              </a:rPr>
-              <a:t> —</a:t>
-            </a:r>
-            <a:r>
-              <a:rPr sz="1050" b="0">
-                <a:solidFill>
-                  <a:srgbClr val="000000"/>
-                </a:solidFill>
-                <a:latin typeface="맑은 고딕"/>
-                <a:ea typeface="맑은 고딕"/>
-              </a:rPr>
-              <a:t> 맥락 패키지와 검증 계획. 후속 AI-native SW공학 과정의 입력이 됩니다.</a:t>
-            </a:r>
-          </a:p>
-        </p:txBody>
-      </p:sp>
-    </p:spTree>
-    <p:extLst>
-      <p:ext uri="{BB962C8B-B14F-4D97-AF65-F5344CB8AC3E}">
-        <p14:creationId xmlns:p14="http://schemas.microsoft.com/office/powerpoint/2010/main" val="3555436673"/>
-      </p:ext>
-    </p:extLst>
-  </p:cSld>
-  <p:clrMapOvr>
-    <a:masterClrMapping/>
-  </p:clrMapOvr>
-</p:sld>
-</file>
-
-<file path=ppt/slides/slide21.xml><?xml version="1.0" encoding="utf-8"?>
-<p:sld xmlns:a="http://schemas.openxmlformats.org/drawingml/2006/main" xmlns:r="http://schemas.openxmlformats.org/officeDocument/2006/relationships" xmlns:p="http://schemas.openxmlformats.org/presentationml/2006/main">
-  <p:cSld>
-    <p:spTree>
-      <p:nvGrpSpPr>
-        <p:cNvPr id="1" name="">
-          <a:extLst>
-            <a:ext uri="{FF2B5EF4-FFF2-40B4-BE49-F238E27FC236}">
-              <a16:creationId xmlns:a16="http://schemas.microsoft.com/office/drawing/2014/main" id="{8E4F1F13-426B-086B-7D8C-9A58A0F879DB}"/>
-            </a:ext>
-          </a:extLst>
-        </p:cNvPr>
-        <p:cNvGrpSpPr/>
-        <p:nvPr/>
-      </p:nvGrpSpPr>
-      <p:grpSpPr>
-        <a:xfrm>
-          <a:off x="0" y="0"/>
-          <a:ext cx="0" cy="0"/>
-          <a:chOff x="0" y="0"/>
-          <a:chExt cx="0" cy="0"/>
-        </a:xfrm>
-      </p:grpSpPr>
-      <p:sp>
-        <p:nvSpPr>
-          <p:cNvPr id="2" name="제목 1">
-            <a:extLst>
-              <a:ext uri="{FF2B5EF4-FFF2-40B4-BE49-F238E27FC236}">
-                <a16:creationId xmlns:a16="http://schemas.microsoft.com/office/drawing/2014/main" id="{AA26A92D-924E-0575-9551-F8FD7BFD3FAD}"/>
-              </a:ext>
-            </a:extLst>
-          </p:cNvPr>
-          <p:cNvSpPr>
-            <a:spLocks noGrp="1"/>
-          </p:cNvSpPr>
-          <p:nvPr>
-            <p:ph type="title"/>
-          </p:nvPr>
-        </p:nvSpPr>
-        <p:spPr/>
-        <p:txBody>
-          <a:bodyPr/>
-          <a:lstStyle/>
-          <a:p>
-            <a:r>
-              <a:rPr sz="2400" b="1">
-                <a:solidFill>
-                  <a:srgbClr val="000000"/>
-                </a:solidFill>
-                <a:latin typeface="맑은 고딕"/>
-                <a:ea typeface="맑은 고딕"/>
-              </a:rPr>
-              <a:t>20. 맥락 패키지 </a:t>
-            </a:r>
-            <a:r>
-              <a:rPr sz="1800" b="1">
-                <a:solidFill>
-                  <a:srgbClr val="000000"/>
-                </a:solidFill>
-                <a:latin typeface="맑은 고딕"/>
-                <a:ea typeface="맑은 고딕"/>
-              </a:rPr>
-              <a:t>(안)</a:t>
-            </a:r>
-          </a:p>
-        </p:txBody>
-      </p:sp>
-      <p:sp>
-        <p:nvSpPr>
-          <p:cNvPr id="3" name="슬라이드 번호 개체 틀 2">
-            <a:extLst>
-              <a:ext uri="{FF2B5EF4-FFF2-40B4-BE49-F238E27FC236}">
-                <a16:creationId xmlns:a16="http://schemas.microsoft.com/office/drawing/2014/main" id="{12CF30EE-4DFD-8063-56B8-B8689E76DFCA}"/>
-              </a:ext>
-            </a:extLst>
-          </p:cNvPr>
-          <p:cNvSpPr>
-            <a:spLocks noGrp="1"/>
-          </p:cNvSpPr>
-          <p:nvPr>
-            <p:ph type="sldNum" sz="quarter" idx="10"/>
-          </p:nvPr>
-        </p:nvSpPr>
-        <p:spPr/>
-        <p:txBody>
-          <a:bodyPr/>
-          <a:lstStyle/>
-          <a:p>
-            <a:pPr>
-              <a:defRPr/>
-            </a:pPr>
-            <a:r>
-              <a:rPr lang="en-US" altLang="ko-KR">
-                <a:solidFill>
-                  <a:prstClr val="black"/>
-                </a:solidFill>
-              </a:rPr>
-              <a:t>- 21 -</a:t>
-            </a:r>
-          </a:p>
-        </p:txBody>
-      </p:sp>
-      <p:sp>
-        <p:nvSpPr>
-          <p:cNvPr id="5" name="텍스트 개체 틀 4">
-            <a:extLst>
-              <a:ext uri="{FF2B5EF4-FFF2-40B4-BE49-F238E27FC236}">
-                <a16:creationId xmlns:a16="http://schemas.microsoft.com/office/drawing/2014/main" id="{D66274C8-E16F-5AEB-614B-D8D32DA3E8C6}"/>
-              </a:ext>
-            </a:extLst>
-          </p:cNvPr>
-          <p:cNvSpPr>
-            <a:spLocks noGrp="1"/>
-          </p:cNvSpPr>
-          <p:nvPr>
-            <p:ph type="body" sz="quarter" idx="11"/>
-          </p:nvPr>
-        </p:nvSpPr>
-        <p:spPr/>
-        <p:txBody>
-          <a:bodyPr/>
-          <a:lstStyle/>
-          <a:p>
-            <a:r>
-              <a:rPr kumimoji="1" lang="en-US" altLang="ko-KR" sz="1400" dirty="0" err="1"/>
-              <a:t>14. AI-native SW공학</a:t>
-            </a:r>
-          </a:p>
-        </p:txBody>
-      </p:sp>
-      <p:sp>
-        <p:nvSpPr>
-          <p:cNvPr id="6" name="텍스트 개체 틀 5">
-            <a:extLst>
-              <a:ext uri="{FF2B5EF4-FFF2-40B4-BE49-F238E27FC236}">
-                <a16:creationId xmlns:a16="http://schemas.microsoft.com/office/drawing/2014/main" id="{A24E58E1-194B-A320-AEEE-24D08685BB67}"/>
-              </a:ext>
-            </a:extLst>
-          </p:cNvPr>
-          <p:cNvSpPr>
-            <a:spLocks noGrp="1"/>
-          </p:cNvSpPr>
-          <p:nvPr>
-            <p:ph type="body" sz="quarter" idx="12"/>
-          </p:nvPr>
-        </p:nvSpPr>
-        <p:spPr/>
-        <p:txBody>
-          <a:bodyPr/>
-          <a:lstStyle/>
-          <a:p>
-            <a:endParaRPr kumimoji="1" lang="ko-KR" altLang="en-US" dirty="0"/>
-          </a:p>
-        </p:txBody>
-      </p:sp>
-      <p:sp>
-        <p:nvSpPr>
-          <p:cNvPr id="7" name="텍스트 개체 틀 6">
-            <a:extLst>
-              <a:ext uri="{FF2B5EF4-FFF2-40B4-BE49-F238E27FC236}">
-                <a16:creationId xmlns:a16="http://schemas.microsoft.com/office/drawing/2014/main" id="{A219F420-613B-6234-45F6-0955A9A4505F}"/>
-              </a:ext>
-            </a:extLst>
-          </p:cNvPr>
-          <p:cNvSpPr>
-            <a:spLocks noGrp="1"/>
-          </p:cNvSpPr>
-          <p:nvPr>
-            <p:ph type="body" sz="quarter" idx="13"/>
-          </p:nvPr>
-        </p:nvSpPr>
-        <p:spPr/>
-        <p:txBody>
-          <a:bodyPr/>
-          <a:lstStyle/>
-          <a:p>
-            <a:endParaRPr kumimoji="1" lang="en-US" altLang="ko-KR" dirty="0"/>
-          </a:p>
-        </p:txBody>
-      </p:sp>
-      <p:sp>
-        <p:nvSpPr>
-          <p:cNvPr id="8" name="내용 개체 틀 7">
-            <a:extLst>
-              <a:ext uri="{FF2B5EF4-FFF2-40B4-BE49-F238E27FC236}">
-                <a16:creationId xmlns:a16="http://schemas.microsoft.com/office/drawing/2014/main" id="{BEBA2C4A-B0BF-F2E4-EA6E-614C99CBA184}"/>
-              </a:ext>
-            </a:extLst>
-          </p:cNvPr>
-          <p:cNvSpPr>
-            <a:spLocks noGrp="1"/>
-          </p:cNvSpPr>
-          <p:nvPr>
-            <p:ph idx="1"/>
-          </p:nvPr>
-        </p:nvSpPr>
-        <p:spPr>
-          <a:xfrm>
-            <a:off x="233172" y="1414318"/>
-            <a:ext cx="4338828" cy="4898147"/>
-          </a:xfrm>
-        </p:spPr>
-        <p:txBody>
-          <a:bodyPr>
-            <a:normAutofit/>
-          </a:bodyPr>
-          <a:lstStyle/>
-          <a:p>
-            <a:pPr lvl="2" marL="228600" indent="-182880">
-              <a:spcBef>
-                <a:spcPts val="300"/>
-              </a:spcBef>
-              <a:spcAft>
-                <a:spcPts val="300"/>
-              </a:spcAft>
-              <a:buSzPct val="90000"/>
-              <a:buFont typeface="Wingdings" pitchFamily="2" charset="2"/>
-              <a:buChar char=""/>
-            </a:pPr>
-            <a:r>
-              <a:rPr sz="1400" b="1">
-                <a:solidFill>
-                  <a:srgbClr val="000000"/>
-                </a:solidFill>
-                <a:latin typeface="맑은 고딕"/>
-                <a:ea typeface="맑은 고딕"/>
-              </a:rPr>
-              <a:t>맥락 파일의 규칙</a:t>
-            </a:r>
-          </a:p>
-          <a:p>
-            <a:pPr lvl="3" marL="457200" indent="-182880">
-              <a:spcBef>
-                <a:spcPts val="300"/>
-              </a:spcBef>
-              <a:spcAft>
-                <a:spcPts val="300"/>
-              </a:spcAft>
-              <a:buSzPct val="90000"/>
-              <a:buFont typeface="Wingdings" pitchFamily="2" charset="2"/>
-              <a:buChar char=""/>
-            </a:pPr>
-            <a:r>
-              <a:rPr sz="1200" b="1">
-                <a:solidFill>
-                  <a:srgbClr val="000000"/>
-                </a:solidFill>
-                <a:latin typeface="맑은 고딕"/>
-                <a:ea typeface="맑은 고딕"/>
-              </a:rPr>
-              <a:t>이름</a:t>
-            </a:r>
-            <a:r>
-              <a:rPr sz="1200" b="0">
-                <a:solidFill>
-                  <a:srgbClr val="000000"/>
-                </a:solidFill>
-                <a:latin typeface="맑은 고딕"/>
-                <a:ea typeface="맑은 고딕"/>
-              </a:rPr>
-              <a:t> —</a:t>
-            </a:r>
-            <a:r>
-              <a:rPr sz="1000" b="0">
-                <a:solidFill>
-                  <a:srgbClr val="000000"/>
-                </a:solidFill>
-                <a:latin typeface="맑은 고딕"/>
-                <a:ea typeface="맑은 고딕"/>
-              </a:rPr>
-              <a:t> 용어집의 영문명(</a:t>
-            </a:r>
-            <a:r>
-              <a:rPr sz="1000" b="0">
-                <a:solidFill>
-                  <a:srgbClr val="000000"/>
-                </a:solidFill>
-                <a:latin typeface="맑은 고딕"/>
-                <a:ea typeface="맑은 고딕"/>
-              </a:rPr>
-              <a:t>RoundStatus</a:t>
-            </a:r>
-            <a:r>
-              <a:rPr sz="1000" b="0">
-                <a:solidFill>
-                  <a:srgbClr val="000000"/>
-                </a:solidFill>
-                <a:latin typeface="맑은 고딕"/>
-                <a:ea typeface="맑은 고딕"/>
-              </a:rPr>
-              <a:t>, </a:t>
-            </a:r>
-            <a:r>
-              <a:rPr sz="1000" b="0">
-                <a:solidFill>
-                  <a:srgbClr val="000000"/>
-                </a:solidFill>
-                <a:latin typeface="맑은 고딕"/>
-                <a:ea typeface="맑은 고딕"/>
-              </a:rPr>
-              <a:t>DELIVERY_REQUESTED</a:t>
-            </a:r>
-            <a:r>
-              <a:rPr sz="1000" b="0">
-                <a:solidFill>
-                  <a:srgbClr val="000000"/>
-                </a:solidFill>
-                <a:latin typeface="맑은 고딕"/>
-                <a:ea typeface="맑은 고딕"/>
-              </a:rPr>
-              <a:t>)을 쓴다.</a:t>
-            </a:r>
-          </a:p>
-          <a:p>
-            <a:pPr lvl="3" marL="457200" indent="-182880">
-              <a:spcBef>
-                <a:spcPts val="300"/>
-              </a:spcBef>
-              <a:spcAft>
-                <a:spcPts val="300"/>
-              </a:spcAft>
-              <a:buSzPct val="90000"/>
-              <a:buFont typeface="Wingdings" pitchFamily="2" charset="2"/>
-              <a:buChar char=""/>
-            </a:pPr>
-            <a:r>
-              <a:rPr sz="1200" b="1">
-                <a:solidFill>
-                  <a:srgbClr val="000000"/>
-                </a:solidFill>
-                <a:latin typeface="맑은 고딕"/>
-                <a:ea typeface="맑은 고딕"/>
-              </a:rPr>
-              <a:t>책임</a:t>
-            </a:r>
-            <a:r>
-              <a:rPr sz="1200" b="0">
-                <a:solidFill>
-                  <a:srgbClr val="000000"/>
-                </a:solidFill>
-                <a:latin typeface="맑은 고딕"/>
-                <a:ea typeface="맑은 고딕"/>
-              </a:rPr>
-              <a:t> —</a:t>
-            </a:r>
-            <a:r>
-              <a:rPr sz="1000" b="0">
-                <a:solidFill>
-                  <a:srgbClr val="000000"/>
-                </a:solidFill>
-                <a:latin typeface="맑은 고딕"/>
-                <a:ea typeface="맑은 고딕"/>
-              </a:rPr>
-              <a:t> 회차 상태의 규칙은 </a:t>
-            </a:r>
-            <a:r>
-              <a:rPr sz="1000" b="0">
-                <a:solidFill>
-                  <a:srgbClr val="000000"/>
-                </a:solidFill>
-                <a:latin typeface="맑은 고딕"/>
-                <a:ea typeface="맑은 고딕"/>
-              </a:rPr>
-              <a:t>DeliveryRound</a:t>
-            </a:r>
-            <a:r>
-              <a:rPr sz="1000" b="0">
-                <a:solidFill>
-                  <a:srgbClr val="000000"/>
-                </a:solidFill>
-                <a:latin typeface="맑은 고딕"/>
-                <a:ea typeface="맑은 고딕"/>
-              </a:rPr>
-              <a:t>에 둔다.</a:t>
-            </a:r>
-          </a:p>
-          <a:p>
-            <a:pPr lvl="3" marL="457200" indent="-182880">
-              <a:spcBef>
-                <a:spcPts val="300"/>
-              </a:spcBef>
-              <a:spcAft>
-                <a:spcPts val="300"/>
-              </a:spcAft>
-              <a:buSzPct val="90000"/>
-              <a:buFont typeface="Wingdings" pitchFamily="2" charset="2"/>
-              <a:buChar char=""/>
-            </a:pPr>
-            <a:r>
-              <a:rPr sz="1200" b="1">
-                <a:solidFill>
-                  <a:srgbClr val="000000"/>
-                </a:solidFill>
-                <a:latin typeface="맑은 고딕"/>
-                <a:ea typeface="맑은 고딕"/>
-              </a:rPr>
-              <a:t>멈춤</a:t>
-            </a:r>
-            <a:r>
-              <a:rPr sz="1200" b="0">
-                <a:solidFill>
-                  <a:srgbClr val="000000"/>
-                </a:solidFill>
-                <a:latin typeface="맑은 고딕"/>
-                <a:ea typeface="맑은 고딕"/>
-              </a:rPr>
-              <a:t> —</a:t>
-            </a:r>
-            <a:r>
-              <a:rPr sz="1000" b="0">
-                <a:solidFill>
-                  <a:srgbClr val="000000"/>
-                </a:solidFill>
-                <a:latin typeface="맑은 고딕"/>
-                <a:ea typeface="맑은 고딕"/>
-              </a:rPr>
-              <a:t> 상태 전이·테스트 기대값을 바꿔야 하면 제안하고 멈춘다.</a:t>
-            </a:r>
-          </a:p>
-        </p:txBody>
-      </p:sp>
-      <p:sp>
-        <p:nvSpPr>
-          <p:cNvPr id="9" name="내용 개체 틀 7">
-            <a:extLst>
-              <a:ext uri="{FF2B5EF4-FFF2-40B4-BE49-F238E27FC236}">
-                <a16:creationId xmlns:a16="http://schemas.microsoft.com/office/drawing/2014/main" id="{BEBA2C4A-B0BF-F2E4-EA6E-614C99CBA184}"/>
-              </a:ext>
-            </a:extLst>
-          </p:cNvPr>
-          <p:cNvSpPr>
-            <a:spLocks noGrp="1"/>
-          </p:cNvSpPr>
-          <p:nvPr>
-            <p:ph idx="1"/>
-          </p:nvPr>
-        </p:nvSpPr>
-        <p:spPr>
-          <a:xfrm>
-            <a:off x="233172" y="960120"/>
-            <a:ext cx="8778240" cy="454198"/>
-          </a:xfrm>
-        </p:spPr>
-        <p:txBody>
-          <a:bodyPr>
-            <a:normAutofit/>
-          </a:bodyPr>
-          <a:lstStyle/>
-          <a:p>
-            <a:pPr marL="0" indent="0">
-              <a:spcBef>
-                <a:spcPts val="300"/>
-              </a:spcBef>
-              <a:spcAft>
-                <a:spcPts val="300"/>
-              </a:spcAft>
-              <a:buNone/>
-            </a:pPr>
-            <a:r>
-              <a:rPr sz="1400" b="0">
-                <a:solidFill>
-                  <a:srgbClr val="000000"/>
-                </a:solidFill>
-                <a:latin typeface="맑은 고딕"/>
-                <a:ea typeface="맑은 고딕"/>
-              </a:rPr>
-              <a:t>과제의 판단을 바꾸는 것만 담았다. 맥락 파일의 </a:t>
-            </a:r>
-            <a:r>
-              <a:rPr sz="1400" b="1">
-                <a:solidFill>
-                  <a:srgbClr val="000000"/>
-                </a:solidFill>
-                <a:latin typeface="맑은 고딕"/>
-                <a:ea typeface="맑은 고딕"/>
-              </a:rPr>
-              <a:t>규칙</a:t>
-            </a:r>
-            <a:r>
-              <a:rPr sz="1400" b="0">
-                <a:solidFill>
-                  <a:srgbClr val="000000"/>
-                </a:solidFill>
-                <a:latin typeface="맑은 고딕"/>
-                <a:ea typeface="맑은 고딕"/>
-              </a:rPr>
-              <a:t>과 과제에 줄 </a:t>
-            </a:r>
-            <a:r>
-              <a:rPr sz="1400" b="1">
-                <a:solidFill>
-                  <a:srgbClr val="000000"/>
-                </a:solidFill>
-                <a:latin typeface="맑은 고딕"/>
-                <a:ea typeface="맑은 고딕"/>
-              </a:rPr>
-              <a:t>산출물</a:t>
-            </a:r>
-            <a:r>
-              <a:rPr sz="1400" b="0">
-                <a:solidFill>
-                  <a:srgbClr val="000000"/>
-                </a:solidFill>
-                <a:latin typeface="맑은 고딕"/>
-                <a:ea typeface="맑은 고딕"/>
-              </a:rPr>
-              <a:t>을 나눴다.</a:t>
-            </a:r>
-          </a:p>
-        </p:txBody>
-      </p:sp>
-      <p:sp>
-        <p:nvSpPr>
-          <p:cNvPr id="10" name="내용 개체 틀 7">
-            <a:extLst>
-              <a:ext uri="{FF2B5EF4-FFF2-40B4-BE49-F238E27FC236}">
-                <a16:creationId xmlns:a16="http://schemas.microsoft.com/office/drawing/2014/main" id="{BEBA2C4A-B0BF-F2E4-EA6E-614C99CBA184}"/>
-              </a:ext>
-            </a:extLst>
-          </p:cNvPr>
-          <p:cNvSpPr>
-            <a:spLocks noGrp="1"/>
-          </p:cNvSpPr>
-          <p:nvPr>
-            <p:ph idx="1"/>
-          </p:nvPr>
-        </p:nvSpPr>
-        <p:spPr>
-          <a:xfrm>
-            <a:off x="4572000" y="1414318"/>
-            <a:ext cx="4439412" cy="4898147"/>
-          </a:xfrm>
-        </p:spPr>
-        <p:txBody>
-          <a:bodyPr>
-            <a:normAutofit/>
-          </a:bodyPr>
-          <a:lstStyle/>
-          <a:p>
-            <a:pPr lvl="2" marL="228600" indent="-182880">
-              <a:spcBef>
-                <a:spcPts val="300"/>
-              </a:spcBef>
-              <a:spcAft>
-                <a:spcPts val="300"/>
-              </a:spcAft>
-              <a:buSzPct val="90000"/>
-              <a:buFont typeface="Wingdings" pitchFamily="2" charset="2"/>
-              <a:buChar char=""/>
-            </a:pPr>
-            <a:r>
-              <a:rPr sz="1400" b="1">
-                <a:solidFill>
-                  <a:srgbClr val="000000"/>
-                </a:solidFill>
-                <a:latin typeface="맑은 고딕"/>
-                <a:ea typeface="맑은 고딕"/>
-              </a:rPr>
-              <a:t>줄 산출물</a:t>
-            </a:r>
-          </a:p>
-          <a:p>
-            <a:pPr lvl="3" marL="457200" indent="-182880">
-              <a:spcBef>
-                <a:spcPts val="300"/>
-              </a:spcBef>
-              <a:spcAft>
-                <a:spcPts val="300"/>
-              </a:spcAft>
-              <a:buSzPct val="90000"/>
-              <a:buFont typeface="Wingdings" pitchFamily="2" charset="2"/>
-              <a:buChar char=""/>
-            </a:pPr>
-            <a:r>
-              <a:rPr sz="1200" b="1">
-                <a:solidFill>
-                  <a:srgbClr val="000000"/>
-                </a:solidFill>
-                <a:latin typeface="맑은 고딕"/>
-                <a:ea typeface="맑은 고딕"/>
-              </a:rPr>
-              <a:t>회차 상태 기계</a:t>
-            </a:r>
-            <a:r>
-              <a:rPr sz="1200" b="0">
-                <a:solidFill>
-                  <a:srgbClr val="000000"/>
-                </a:solidFill>
-                <a:latin typeface="맑은 고딕"/>
-                <a:ea typeface="맑은 고딕"/>
-              </a:rPr>
-              <a:t> —</a:t>
-            </a:r>
-            <a:r>
-              <a:rPr sz="1000" b="0">
-                <a:solidFill>
-                  <a:srgbClr val="000000"/>
-                </a:solidFill>
-                <a:latin typeface="맑은 고딕"/>
-                <a:ea typeface="맑은 고딕"/>
-              </a:rPr>
-              <a:t> 예정 → 배송 요청됨 → 배송됨</a:t>
-            </a:r>
-            <a:r>
-              <a:rPr sz="800" b="0">
-                <a:solidFill>
-                  <a:srgbClr val="000000"/>
-                </a:solidFill>
-                <a:latin typeface="맑은 고딕"/>
-                <a:ea typeface="맑은 고딕"/>
-              </a:rPr>
-              <a:t>(실습 12 보완)</a:t>
-            </a:r>
-          </a:p>
-          <a:p>
-            <a:pPr lvl="3" marL="457200" indent="-182880">
-              <a:spcBef>
-                <a:spcPts val="300"/>
-              </a:spcBef>
-              <a:spcAft>
-                <a:spcPts val="300"/>
-              </a:spcAft>
-              <a:buSzPct val="90000"/>
-              <a:buFont typeface="Wingdings" pitchFamily="2" charset="2"/>
-              <a:buChar char=""/>
-            </a:pPr>
-            <a:r>
-              <a:rPr sz="1200" b="1">
-                <a:solidFill>
-                  <a:srgbClr val="000000"/>
-                </a:solidFill>
-                <a:latin typeface="맑은 고딕"/>
-                <a:ea typeface="맑은 고딕"/>
-              </a:rPr>
-              <a:t>해지 계약</a:t>
-            </a:r>
-            <a:r>
-              <a:rPr sz="1200" b="0">
-                <a:solidFill>
-                  <a:srgbClr val="000000"/>
-                </a:solidFill>
-                <a:latin typeface="맑은 고딕"/>
-                <a:ea typeface="맑은 고딕"/>
-              </a:rPr>
-              <a:t> —</a:t>
-            </a:r>
-            <a:r>
-              <a:rPr sz="1000" b="0">
-                <a:solidFill>
-                  <a:srgbClr val="000000"/>
-                </a:solidFill>
-                <a:latin typeface="맑은 고딕"/>
-                <a:ea typeface="맑은 고딕"/>
-              </a:rPr>
-              <a:t> 예정 회차는 취소, 배송 요청된 회차는 그대로</a:t>
-            </a:r>
-          </a:p>
-          <a:p>
-            <a:pPr lvl="3" marL="457200" indent="-182880">
-              <a:spcBef>
-                <a:spcPts val="300"/>
-              </a:spcBef>
-              <a:spcAft>
-                <a:spcPts val="300"/>
-              </a:spcAft>
-              <a:buSzPct val="90000"/>
-              <a:buFont typeface="Wingdings" pitchFamily="2" charset="2"/>
-              <a:buChar char=""/>
-            </a:pPr>
-            <a:r>
-              <a:rPr sz="1200" b="1">
-                <a:solidFill>
-                  <a:srgbClr val="000000"/>
-                </a:solidFill>
-                <a:latin typeface="맑은 고딕"/>
-                <a:ea typeface="맑은 고딕"/>
-              </a:rPr>
-              <a:t>선례</a:t>
-            </a:r>
-            <a:r>
-              <a:rPr sz="1200" b="0">
-                <a:solidFill>
-                  <a:srgbClr val="000000"/>
-                </a:solidFill>
-                <a:latin typeface="맑은 고딕"/>
-                <a:ea typeface="맑은 고딕"/>
-              </a:rPr>
-              <a:t> —</a:t>
-            </a:r>
-            <a:r>
-              <a:rPr sz="1000" b="0">
-                <a:solidFill>
-                  <a:srgbClr val="000000"/>
-                </a:solidFill>
-                <a:latin typeface="맑은 고딕"/>
-                <a:ea typeface="맑은 고딕"/>
-              </a:rPr>
-              <a:t> 회차 취소 코드</a:t>
-            </a:r>
-          </a:p>
-          <a:p>
-            <a:pPr lvl="2" marL="228600" indent="-182880">
-              <a:spcBef>
-                <a:spcPts val="300"/>
-              </a:spcBef>
-              <a:spcAft>
-                <a:spcPts val="300"/>
-              </a:spcAft>
-              <a:buSzPct val="90000"/>
-              <a:buFont typeface="Wingdings" pitchFamily="2" charset="2"/>
-              <a:buChar char=""/>
-            </a:pPr>
-            <a:r>
-              <a:rPr sz="1400" b="1">
-                <a:solidFill>
-                  <a:srgbClr val="000000"/>
-                </a:solidFill>
-                <a:latin typeface="맑은 고딕"/>
-                <a:ea typeface="맑은 고딕"/>
-              </a:rPr>
-              <a:t>주지 않을 산출물</a:t>
-            </a:r>
-          </a:p>
-          <a:p>
-            <a:pPr lvl="3" marL="457200" indent="-182880">
-              <a:spcBef>
-                <a:spcPts val="300"/>
-              </a:spcBef>
-              <a:spcAft>
-                <a:spcPts val="300"/>
-              </a:spcAft>
-              <a:buSzPct val="90000"/>
-              <a:buFont typeface="Wingdings" pitchFamily="2" charset="2"/>
-              <a:buChar char=""/>
-            </a:pPr>
-            <a:r>
-              <a:rPr sz="1200" b="1">
-                <a:solidFill>
-                  <a:srgbClr val="000000"/>
-                </a:solidFill>
-                <a:latin typeface="맑은 고딕"/>
-                <a:ea typeface="맑은 고딕"/>
-              </a:rPr>
-              <a:t>결제·회계</a:t>
-            </a:r>
-            <a:r>
-              <a:rPr sz="1200" b="0">
-                <a:solidFill>
-                  <a:srgbClr val="000000"/>
-                </a:solidFill>
-                <a:latin typeface="맑은 고딕"/>
-                <a:ea typeface="맑은 고딕"/>
-              </a:rPr>
-              <a:t> —</a:t>
-            </a:r>
-            <a:r>
-              <a:rPr sz="1000" b="0">
-                <a:solidFill>
-                  <a:srgbClr val="000000"/>
-                </a:solidFill>
-                <a:latin typeface="맑은 고딕"/>
-                <a:ea typeface="맑은 고딕"/>
-              </a:rPr>
-              <a:t> 이 과제의 판단을 바꾸지 않는다.</a:t>
-            </a:r>
-          </a:p>
-        </p:txBody>
-      </p:sp>
-    </p:spTree>
-    <p:extLst>
-      <p:ext uri="{BB962C8B-B14F-4D97-AF65-F5344CB8AC3E}">
-        <p14:creationId xmlns:p14="http://schemas.microsoft.com/office/powerpoint/2010/main" val="3555436673"/>
-      </p:ext>
-    </p:extLst>
-  </p:cSld>
-  <p:clrMapOvr>
-    <a:masterClrMapping/>
-  </p:clrMapOvr>
-</p:sld>
-</file>
-
-<file path=ppt/slides/slide22.xml><?xml version="1.0" encoding="utf-8"?>
-<p:sld xmlns:a="http://schemas.openxmlformats.org/drawingml/2006/main" xmlns:r="http://schemas.openxmlformats.org/officeDocument/2006/relationships" xmlns:p="http://schemas.openxmlformats.org/presentationml/2006/main">
-  <p:cSld>
-    <p:spTree>
-      <p:nvGrpSpPr>
-        <p:cNvPr id="1" name="">
-          <a:extLst>
-            <a:ext uri="{FF2B5EF4-FFF2-40B4-BE49-F238E27FC236}">
-              <a16:creationId xmlns:a16="http://schemas.microsoft.com/office/drawing/2014/main" id="{60B87152-D004-1569-E429-90A42420A65C}"/>
-            </a:ext>
-          </a:extLst>
-        </p:cNvPr>
-        <p:cNvGrpSpPr/>
-        <p:nvPr/>
-      </p:nvGrpSpPr>
-      <p:grpSpPr>
-        <a:xfrm>
-          <a:off x="0" y="0"/>
-          <a:ext cx="0" cy="0"/>
-          <a:chOff x="0" y="0"/>
-          <a:chExt cx="0" cy="0"/>
-        </a:xfrm>
-      </p:grpSpPr>
-      <p:sp>
-        <p:nvSpPr>
-          <p:cNvPr id="2" name="제목 1">
-            <a:extLst>
-              <a:ext uri="{FF2B5EF4-FFF2-40B4-BE49-F238E27FC236}">
-                <a16:creationId xmlns:a16="http://schemas.microsoft.com/office/drawing/2014/main" id="{F2E2AB02-3ADE-69B8-887E-7981AD15EF24}"/>
-              </a:ext>
-            </a:extLst>
-          </p:cNvPr>
-          <p:cNvSpPr>
-            <a:spLocks noGrp="1"/>
-          </p:cNvSpPr>
-          <p:nvPr>
-            <p:ph type="title"/>
-          </p:nvPr>
-        </p:nvSpPr>
-        <p:spPr/>
-        <p:txBody>
-          <a:bodyPr/>
-          <a:lstStyle/>
-          <a:p>
-            <a:r>
-              <a:rPr sz="2400" b="1">
-                <a:solidFill>
-                  <a:srgbClr val="000000"/>
-                </a:solidFill>
-                <a:latin typeface="맑은 고딕"/>
-                <a:ea typeface="맑은 고딕"/>
-              </a:rPr>
-              <a:t>21. 검증 계획 </a:t>
-            </a:r>
-            <a:r>
-              <a:rPr sz="1800" b="1">
-                <a:solidFill>
-                  <a:srgbClr val="000000"/>
-                </a:solidFill>
-                <a:latin typeface="맑은 고딕"/>
-                <a:ea typeface="맑은 고딕"/>
-              </a:rPr>
-              <a:t>(안)</a:t>
-            </a:r>
-          </a:p>
-        </p:txBody>
-      </p:sp>
-      <p:sp>
-        <p:nvSpPr>
-          <p:cNvPr id="5" name="텍스트 개체 틀 4">
-            <a:extLst>
-              <a:ext uri="{FF2B5EF4-FFF2-40B4-BE49-F238E27FC236}">
-                <a16:creationId xmlns:a16="http://schemas.microsoft.com/office/drawing/2014/main" id="{F0895985-68EF-30BA-2165-4B3D90ECD41C}"/>
-              </a:ext>
-            </a:extLst>
-          </p:cNvPr>
-          <p:cNvSpPr>
-            <a:spLocks noGrp="1"/>
-          </p:cNvSpPr>
-          <p:nvPr>
-            <p:ph type="body" sz="quarter" idx="11"/>
-          </p:nvPr>
-        </p:nvSpPr>
-        <p:spPr/>
-        <p:txBody>
-          <a:bodyPr/>
-          <a:lstStyle/>
-          <a:p>
-            <a:r>
-              <a:rPr kumimoji="1" lang="en-US" altLang="ko-KR" sz="1400" dirty="0" err="1"/>
-              <a:t>14. AI-native SW공학</a:t>
-            </a:r>
-          </a:p>
-        </p:txBody>
-      </p:sp>
-      <p:sp>
-        <p:nvSpPr>
-          <p:cNvPr id="6" name="텍스트 개체 틀 5">
-            <a:extLst>
-              <a:ext uri="{FF2B5EF4-FFF2-40B4-BE49-F238E27FC236}">
-                <a16:creationId xmlns:a16="http://schemas.microsoft.com/office/drawing/2014/main" id="{D985C1FD-84C4-10F9-372D-6A84E1680E07}"/>
-              </a:ext>
-            </a:extLst>
-          </p:cNvPr>
-          <p:cNvSpPr>
-            <a:spLocks noGrp="1"/>
-          </p:cNvSpPr>
-          <p:nvPr>
-            <p:ph type="body" sz="quarter" idx="12"/>
-          </p:nvPr>
-        </p:nvSpPr>
-        <p:spPr/>
-        <p:txBody>
-          <a:bodyPr/>
-          <a:lstStyle/>
-          <a:p>
-            <a:endParaRPr kumimoji="1" lang="ko-KR" altLang="en-US" dirty="0"/>
-          </a:p>
-        </p:txBody>
-      </p:sp>
-      <p:sp>
-        <p:nvSpPr>
-          <p:cNvPr id="7" name="텍스트 개체 틀 6">
-            <a:extLst>
-              <a:ext uri="{FF2B5EF4-FFF2-40B4-BE49-F238E27FC236}">
-                <a16:creationId xmlns:a16="http://schemas.microsoft.com/office/drawing/2014/main" id="{E26A8878-48FF-5E3A-5D05-0F900C22011B}"/>
-              </a:ext>
-            </a:extLst>
-          </p:cNvPr>
-          <p:cNvSpPr>
-            <a:spLocks noGrp="1"/>
-          </p:cNvSpPr>
-          <p:nvPr>
-            <p:ph type="body" sz="quarter" idx="13"/>
-          </p:nvPr>
-        </p:nvSpPr>
-        <p:spPr/>
-        <p:txBody>
-          <a:bodyPr/>
-          <a:lstStyle/>
-          <a:p>
-            <a:endParaRPr lang="en-US" altLang="ko-KR" dirty="0"/>
-          </a:p>
-        </p:txBody>
-      </p:sp>
-      <p:graphicFrame>
-        <p:nvGraphicFramePr>
-          <p:cNvPr id="11" name="표 10">
-            <a:extLst>
-              <a:ext uri="{FF2B5EF4-FFF2-40B4-BE49-F238E27FC236}">
-                <a16:creationId xmlns:a16="http://schemas.microsoft.com/office/drawing/2014/main" id="{93753AB9-526C-CE2D-446D-7615D9B6D6D2}"/>
-              </a:ext>
-            </a:extLst>
-          </p:cNvPr>
-          <p:cNvGraphicFramePr>
-            <a:graphicFrameLocks noGrp="1"/>
-          </p:cNvGraphicFramePr>
-          <p:nvPr>
-            <p:extLst>
-              <p:ext uri="{D42A27DB-BD31-4B8C-83A1-F6EECF244321}">
-                <p14:modId xmlns:p14="http://schemas.microsoft.com/office/powerpoint/2010/main" val="1761827855"/>
-              </p:ext>
-            </p:extLst>
-          </p:nvPr>
-        </p:nvGraphicFramePr>
-        <p:xfrm>
-          <a:off x="1677226" y="1842998"/>
-          <a:ext cx="5775960" cy="3873500"/>
-        </p:xfrm>
-        <a:graphic>
-          <a:graphicData uri="http://schemas.openxmlformats.org/drawingml/2006/table">
-            <a:tbl>
-              <a:tblPr/>
-              <a:tblGrid>
-                <a:gridCol w="1450340"/>
-                <a:gridCol w="2819400"/>
-                <a:gridCol w="1506220"/>
-              </a:tblGrid>
-              <a:tr h="288000">
-                <a:tc>
-                  <a:txBody>
-                    <a:bodyPr/>
-                    <a:lstStyle/>
-                    <a:p>
-                      <a:pPr algn="ctr" fontAlgn="ctr">
-                        <a:buNone/>
-                      </a:pPr>
-                      <a:r>
-                        <a:rPr lang="ko-KR" altLang="en-US" sz="1000" b="1" i="0" u="none" strike="noStrike" dirty="0">
-                          <a:solidFill>
-                            <a:schemeClr val="bg1"/>
-                          </a:solidFill>
-                          <a:effectLst/>
-                          <a:latin typeface="맑은 고딕" panose="020B0503020000020004" pitchFamily="34" charset="-127"/>
-                          <a:ea typeface="맑은 고딕" panose="020B0503020000020004" pitchFamily="34" charset="-127"/>
-                          <a:cs typeface="맑은 고딕"/>
-                        </a:rPr>
-                        <a:t>센서</a:t>
-                      </a:r>
-                    </a:p>
-                  </a:txBody>
-                  <a:tcPr marL="6750" marR="6750" marT="6750" marB="0" anchor="ctr">
-                    <a:lnL>
-                      <a:noFill/>
-                    </a:lnL>
-                    <a:lnR w="9525" cap="flat" cmpd="sng" algn="ctr">
-                      <a:solidFill>
-                        <a:schemeClr val="bg1">
-                          <a:lumMod val="50000"/>
-                        </a:schemeClr>
-                      </a:solidFill>
-                      <a:prstDash val="solid"/>
-                      <a:round/>
-                      <a:headEnd type="none" w="med" len="med"/>
-                      <a:tailEnd type="none" w="med" len="med"/>
-                    </a:lnR>
-                    <a:lnT w="9525" cap="flat" cmpd="sng" algn="ctr">
-                      <a:solidFill>
-                        <a:schemeClr val="tx1"/>
-                      </a:solidFill>
-                      <a:prstDash val="solid"/>
-                      <a:round/>
-                      <a:headEnd type="none" w="med" len="med"/>
-                      <a:tailEnd type="none" w="med" len="med"/>
-                    </a:lnT>
-                    <a:lnB w="9525" cap="flat" cmpd="sng" algn="ctr">
-                      <a:solidFill>
-                        <a:schemeClr val="bg1">
-                          <a:lumMod val="50000"/>
-                        </a:schemeClr>
-                      </a:solidFill>
-                      <a:prstDash val="solid"/>
-                      <a:round/>
-                      <a:headEnd type="none" w="med" len="med"/>
-                      <a:tailEnd type="none" w="med" len="med"/>
-                    </a:lnB>
-                    <a:solidFill>
-                      <a:srgbClr val="002060"/>
-                    </a:solidFill>
-                  </a:tcPr>
-                </a:tc>
-                <a:tc>
-                  <a:txBody>
-                    <a:bodyPr/>
-                    <a:lstStyle/>
-                    <a:p>
-                      <a:pPr algn="ctr" fontAlgn="ctr">
-                        <a:buNone/>
-                      </a:pPr>
-                      <a:r>
-                        <a:rPr lang="ko-KR" altLang="en-US" sz="1000" b="1" i="0" u="none" strike="noStrike" dirty="0">
-                          <a:solidFill>
-                            <a:schemeClr val="bg1"/>
-                          </a:solidFill>
-                          <a:effectLst/>
-                          <a:latin typeface="맑은 고딕" panose="020B0503020000020004" pitchFamily="34" charset="-127"/>
-                          <a:ea typeface="맑은 고딕" panose="020B0503020000020004" pitchFamily="34" charset="-127"/>
-                          <a:cs typeface="맑은 고딕"/>
-                        </a:rPr>
-                        <a:t>확인하는 것</a:t>
-                      </a:r>
-                    </a:p>
-                  </a:txBody>
-                  <a:tcPr marL="6750" marR="6750" marT="6750" marB="0" anchor="ctr">
-                    <a:lnL w="9525" cap="flat" cmpd="sng" algn="ctr">
-                      <a:solidFill>
-                        <a:schemeClr val="bg1">
-                          <a:lumMod val="50000"/>
-                        </a:schemeClr>
-                      </a:solidFill>
-                      <a:prstDash val="solid"/>
-                      <a:round/>
-                      <a:headEnd type="none" w="med" len="med"/>
-                      <a:tailEnd type="none" w="med" len="med"/>
-                    </a:lnL>
-                    <a:lnR w="9525" cap="flat" cmpd="sng" algn="ctr">
-                      <a:solidFill>
-                        <a:schemeClr val="bg1">
-                          <a:lumMod val="50000"/>
-                        </a:schemeClr>
-                      </a:solidFill>
-                      <a:prstDash val="solid"/>
-                      <a:round/>
-                      <a:headEnd type="none" w="med" len="med"/>
-                      <a:tailEnd type="none" w="med" len="med"/>
-                    </a:lnR>
-                    <a:lnT w="9525" cap="flat" cmpd="sng" algn="ctr">
-                      <a:solidFill>
-                        <a:schemeClr val="tx1"/>
-                      </a:solidFill>
-                      <a:prstDash val="solid"/>
-                      <a:round/>
-                      <a:headEnd type="none" w="med" len="med"/>
-                      <a:tailEnd type="none" w="med" len="med"/>
-                    </a:lnT>
-                    <a:lnB w="9525" cap="flat" cmpd="sng" algn="ctr">
-                      <a:solidFill>
-                        <a:schemeClr val="bg1">
-                          <a:lumMod val="50000"/>
-                        </a:schemeClr>
-                      </a:solidFill>
-                      <a:prstDash val="solid"/>
-                      <a:round/>
-                      <a:headEnd type="none" w="med" len="med"/>
-                      <a:tailEnd type="none" w="med" len="med"/>
-                    </a:lnB>
-                    <a:solidFill>
-                      <a:srgbClr val="002060"/>
-                    </a:solidFill>
-                  </a:tcPr>
-                </a:tc>
-                <a:tc>
-                  <a:txBody>
-                    <a:bodyPr/>
-                    <a:lstStyle/>
-                    <a:p>
-                      <a:pPr algn="ctr" fontAlgn="ctr">
-                        <a:buNone/>
-                      </a:pPr>
-                      <a:r>
-                        <a:rPr lang="ko-KR" altLang="en-US" sz="1000" b="1" i="0" u="none" strike="noStrike" dirty="0" err="1">
-                          <a:solidFill>
-                            <a:schemeClr val="bg1"/>
-                          </a:solidFill>
-                          <a:effectLst/>
-                          <a:latin typeface="맑은 고딕" panose="020B0503020000020004" pitchFamily="34" charset="-127"/>
-                          <a:ea typeface="맑은 고딕" panose="020B0503020000020004" pitchFamily="34" charset="-127"/>
-                          <a:cs typeface="맑은 고딕"/>
-                        </a:rPr>
-                        <a:t>실패하면</a:t>
-                      </a:r>
-                    </a:p>
-                  </a:txBody>
-                  <a:tcPr marL="6750" marR="6750" marT="6750" marB="0" anchor="ctr">
-                    <a:lnL w="9525" cap="flat" cmpd="sng" algn="ctr">
-                      <a:solidFill>
-                        <a:schemeClr val="bg1">
-                          <a:lumMod val="50000"/>
-                        </a:schemeClr>
-                      </a:solidFill>
-                      <a:prstDash val="solid"/>
-                      <a:round/>
-                      <a:headEnd type="none" w="med" len="med"/>
-                      <a:tailEnd type="none" w="med" len="med"/>
-                    </a:lnL>
-                    <a:lnR w="9525" cap="flat" cmpd="sng" algn="ctr">
-                      <a:solidFill>
-                        <a:schemeClr val="bg1">
-                          <a:lumMod val="50000"/>
-                        </a:schemeClr>
-                      </a:solidFill>
-                      <a:prstDash val="solid"/>
-                      <a:round/>
-                      <a:headEnd type="none" w="med" len="med"/>
-                      <a:tailEnd type="none" w="med" len="med"/>
-                    </a:lnR>
-                    <a:lnT w="9525" cap="flat" cmpd="sng" algn="ctr">
-                      <a:solidFill>
-                        <a:schemeClr val="tx1"/>
-                      </a:solidFill>
-                      <a:prstDash val="solid"/>
-                      <a:round/>
-                      <a:headEnd type="none" w="med" len="med"/>
-                      <a:tailEnd type="none" w="med" len="med"/>
-                    </a:lnT>
-                    <a:lnB w="9525" cap="flat" cmpd="sng" algn="ctr">
-                      <a:solidFill>
-                        <a:schemeClr val="bg1">
-                          <a:lumMod val="50000"/>
-                        </a:schemeClr>
-                      </a:solidFill>
-                      <a:prstDash val="solid"/>
-                      <a:round/>
-                      <a:headEnd type="none" w="med" len="med"/>
-                      <a:tailEnd type="none" w="med" len="med"/>
-                    </a:lnB>
-                    <a:solidFill>
-                      <a:srgbClr val="002060"/>
-                    </a:solidFill>
-                  </a:tcPr>
-                </a:tc>
-              </a:tr>
-              <a:tr h="288000">
-                <a:tc>
-                  <a:txBody>
-                    <a:bodyPr/>
-                    <a:lstStyle/>
-                    <a:p>
-                      <a:pPr algn="l" fontAlgn="ctr">
-                        <a:buNone/>
-                      </a:pPr>
-                      <a:r>
-                        <a:rPr lang="en" sz="1000" b="1" i="0" u="none" strike="noStrike" dirty="0">
-                          <a:solidFill>
-                            <a:schemeClr val="tx1"/>
-                          </a:solidFill>
-                          <a:effectLst/>
-                          <a:latin typeface="맑은 고딕" panose="020B0503020000020004" pitchFamily="34" charset="-127"/>
-                          <a:ea typeface="맑은 고딕" panose="020B0503020000020004" pitchFamily="34" charset="-127"/>
-                          <a:cs typeface="맑은 고딕"/>
-                        </a:rPr>
-                        <a:t>재현 테스트</a:t>
-                      </a:r>
-                    </a:p>
-                  </a:txBody>
-                  <a:tcPr marL="81005" marR="6750" marT="6750" marB="0" anchor="ctr">
-                    <a:lnL>
-                      <a:noFill/>
-                    </a:lnL>
-                    <a:lnR>
-                      <a:noFill/>
-                    </a:lnR>
-                    <a:lnT w="9525" cap="flat" cmpd="sng" algn="ctr">
-                      <a:solidFill>
-                        <a:schemeClr val="bg1">
-                          <a:lumMod val="50000"/>
-                        </a:schemeClr>
-                      </a:solidFill>
-                      <a:prstDash val="solid"/>
-                      <a:round/>
-                      <a:headEnd type="none" w="med" len="med"/>
-                      <a:tailEnd type="none" w="med" len="med"/>
-                    </a:lnT>
-                    <a:lnB w="9525" cap="flat" cmpd="sng" algn="ctr">
-                      <a:solidFill>
-                        <a:schemeClr val="bg1">
-                          <a:lumMod val="50000"/>
-                        </a:schemeClr>
-                      </a:solidFill>
-                      <a:prstDash val="solid"/>
-                      <a:round/>
-                      <a:headEnd type="none" w="med" len="med"/>
-                      <a:tailEnd type="none" w="med" len="med"/>
-                    </a:lnB>
-                    <a:noFill/>
-                  </a:tcPr>
-                </a:tc>
-                <a:tc>
-                  <a:txBody>
-                    <a:bodyPr/>
-                    <a:lstStyle/>
-                    <a:p>
-                      <a:pPr algn="l" fontAlgn="ctr">
-                        <a:buNone/>
-                      </a:pPr>
-                      <a:r>
-                        <a:rPr lang="ko-KR" altLang="en-US" sz="1000" b="0" i="0" u="none" strike="noStrike" dirty="0">
-                          <a:solidFill>
-                            <a:srgbClr val="000000"/>
-                          </a:solidFill>
-                          <a:effectLst/>
-                          <a:latin typeface="맑은 고딕" panose="020B0503020000020004" pitchFamily="34" charset="-127"/>
-                          <a:ea typeface="맑은 고딕" panose="020B0503020000020004" pitchFamily="34" charset="-127"/>
-                          <a:cs typeface="맑은 고딕"/>
-                        </a:rPr>
-                        <a:t>해지 뒤에도 배송 요청된 회차는 배송</a:t>
-                      </a:r>
-                    </a:p>
-                  </a:txBody>
-                  <a:tcPr marL="81005" marR="6750" marT="6750" marB="0" anchor="ctr">
-                    <a:lnL>
-                      <a:noFill/>
-                    </a:lnL>
-                    <a:lnR>
-                      <a:noFill/>
-                    </a:lnR>
-                    <a:lnT w="9525" cap="flat" cmpd="sng" algn="ctr">
-                      <a:solidFill>
-                        <a:schemeClr val="bg1">
-                          <a:lumMod val="50000"/>
-                        </a:schemeClr>
-                      </a:solidFill>
-                      <a:prstDash val="solid"/>
-                      <a:round/>
-                      <a:headEnd type="none" w="med" len="med"/>
-                      <a:tailEnd type="none" w="med" len="med"/>
-                    </a:lnT>
-                    <a:lnB w="9525" cap="flat" cmpd="sng" algn="ctr">
-                      <a:solidFill>
-                        <a:schemeClr val="bg1">
-                          <a:lumMod val="50000"/>
-                        </a:schemeClr>
-                      </a:solidFill>
-                      <a:prstDash val="solid"/>
-                      <a:round/>
-                      <a:headEnd type="none" w="med" len="med"/>
-                      <a:tailEnd type="none" w="med" len="med"/>
-                    </a:lnB>
-                    <a:solidFill>
-                      <a:srgbClr val="FFFFFF"/>
-                    </a:solidFill>
-                  </a:tcPr>
-                </a:tc>
-                <a:tc>
-                  <a:txBody>
-                    <a:bodyPr/>
-                    <a:lstStyle/>
-                    <a:p>
-                      <a:pPr algn="l" fontAlgn="ctr">
-                        <a:buNone/>
-                      </a:pPr>
-                      <a:r>
-                        <a:rPr lang="ko-KR" altLang="en-US" sz="1000" b="0" i="0" u="none" strike="noStrike" dirty="0">
-                          <a:solidFill>
-                            <a:srgbClr val="000000"/>
-                          </a:solidFill>
-                          <a:effectLst/>
-                          <a:latin typeface="맑은 고딕" panose="020B0503020000020004" pitchFamily="34" charset="-127"/>
-                          <a:ea typeface="맑은 고딕" panose="020B0503020000020004" pitchFamily="34" charset="-127"/>
-                          <a:cs typeface="맑은 고딕"/>
-                        </a:rPr>
-                        <a:t>에이전트가 고친다</a:t>
-                      </a:r>
-                    </a:p>
-                  </a:txBody>
-                  <a:tcPr marL="81005" marR="6750" marT="6750" marB="0" anchor="ctr">
-                    <a:lnL>
-                      <a:noFill/>
-                    </a:lnL>
-                    <a:lnR>
-                      <a:noFill/>
-                    </a:lnR>
-                    <a:lnT w="9525" cap="flat" cmpd="sng" algn="ctr">
-                      <a:solidFill>
-                        <a:schemeClr val="bg1">
-                          <a:lumMod val="50000"/>
-                        </a:schemeClr>
-                      </a:solidFill>
-                      <a:prstDash val="solid"/>
-                      <a:round/>
-                      <a:headEnd type="none" w="med" len="med"/>
-                      <a:tailEnd type="none" w="med" len="med"/>
-                    </a:lnT>
-                    <a:lnB w="9525" cap="flat" cmpd="sng" algn="ctr">
-                      <a:solidFill>
-                        <a:schemeClr val="bg1">
-                          <a:lumMod val="50000"/>
-                        </a:schemeClr>
-                      </a:solidFill>
-                      <a:prstDash val="solid"/>
-                      <a:round/>
-                      <a:headEnd type="none" w="med" len="med"/>
-                      <a:tailEnd type="none" w="med" len="med"/>
-                    </a:lnB>
-                    <a:solidFill>
-                      <a:srgbClr val="FFFFFF"/>
-                    </a:solidFill>
-                  </a:tcPr>
-                </a:tc>
-              </a:tr>
-              <a:tr h="288000">
-                <a:tc>
-                  <a:txBody>
-                    <a:bodyPr/>
-                    <a:lstStyle/>
-                    <a:p>
-                      <a:pPr algn="l" fontAlgn="ctr">
-                        <a:buNone/>
-                      </a:pPr>
-                      <a:r>
-                        <a:rPr lang="en" sz="1000" b="1" i="0" u="none" strike="noStrike" dirty="0">
-                          <a:solidFill>
-                            <a:schemeClr val="tx1"/>
-                          </a:solidFill>
-                          <a:effectLst/>
-                          <a:latin typeface="맑은 고딕" panose="020B0503020000020004" pitchFamily="34" charset="-127"/>
-                          <a:ea typeface="맑은 고딕" panose="020B0503020000020004" pitchFamily="34" charset="-127"/>
-                          <a:cs typeface="맑은 고딕"/>
-                        </a:rPr>
-                        <a:t>회차 상태 테스트</a:t>
-                      </a:r>
-                    </a:p>
-                  </a:txBody>
-                  <a:tcPr marL="81005" marR="6750" marT="6750" marB="0" anchor="ctr">
-                    <a:lnL>
-                      <a:noFill/>
-                    </a:lnL>
-                    <a:lnR>
-                      <a:noFill/>
-                    </a:lnR>
-                    <a:lnT w="9525" cap="flat" cmpd="sng" algn="ctr">
-                      <a:solidFill>
-                        <a:schemeClr val="bg1">
-                          <a:lumMod val="50000"/>
-                        </a:schemeClr>
-                      </a:solidFill>
-                      <a:prstDash val="solid"/>
-                      <a:round/>
-                      <a:headEnd type="none" w="med" len="med"/>
-                      <a:tailEnd type="none" w="med" len="med"/>
-                    </a:lnT>
-                    <a:lnB w="9525" cap="flat" cmpd="sng" algn="ctr">
-                      <a:solidFill>
-                        <a:schemeClr val="bg1">
-                          <a:lumMod val="50000"/>
-                        </a:schemeClr>
-                      </a:solidFill>
-                      <a:prstDash val="solid"/>
-                      <a:round/>
-                      <a:headEnd type="none" w="med" len="med"/>
-                      <a:tailEnd type="none" w="med" len="med"/>
-                    </a:lnB>
-                    <a:noFill/>
-                  </a:tcPr>
-                </a:tc>
-                <a:tc>
-                  <a:txBody>
-                    <a:bodyPr/>
-                    <a:lstStyle/>
-                    <a:p>
-                      <a:pPr algn="l" fontAlgn="ctr">
-                        <a:buNone/>
-                      </a:pPr>
-                      <a:r>
-                        <a:rPr lang="ko-KR" altLang="en-US" sz="1000" b="0" i="0" u="none" strike="noStrike" dirty="0">
-                          <a:solidFill>
-                            <a:srgbClr val="000000"/>
-                          </a:solidFill>
-                          <a:effectLst/>
-                          <a:latin typeface="맑은 고딕" panose="020B0503020000020004" pitchFamily="34" charset="-127"/>
-                          <a:ea typeface="맑은 고딕" panose="020B0503020000020004" pitchFamily="34" charset="-127"/>
-                          <a:cs typeface="맑은 고딕"/>
-                        </a:rPr>
-                        <a:t>예정 → 배송 요청됨 → 배송됨</a:t>
-                      </a:r>
-                    </a:p>
-                  </a:txBody>
-                  <a:tcPr marL="81005" marR="6750" marT="6750" marB="0" anchor="ctr">
-                    <a:lnL>
-                      <a:noFill/>
-                    </a:lnL>
-                    <a:lnR>
-                      <a:noFill/>
-                    </a:lnR>
-                    <a:lnT w="9525" cap="flat" cmpd="sng" algn="ctr">
-                      <a:solidFill>
-                        <a:schemeClr val="bg1">
-                          <a:lumMod val="50000"/>
-                        </a:schemeClr>
-                      </a:solidFill>
-                      <a:prstDash val="solid"/>
-                      <a:round/>
-                      <a:headEnd type="none" w="med" len="med"/>
-                      <a:tailEnd type="none" w="med" len="med"/>
-                    </a:lnT>
-                    <a:lnB w="9525" cap="flat" cmpd="sng" algn="ctr">
-                      <a:solidFill>
-                        <a:schemeClr val="bg1">
-                          <a:lumMod val="50000"/>
-                        </a:schemeClr>
-                      </a:solidFill>
-                      <a:prstDash val="solid"/>
-                      <a:round/>
-                      <a:headEnd type="none" w="med" len="med"/>
-                      <a:tailEnd type="none" w="med" len="med"/>
-                    </a:lnB>
-                    <a:solidFill>
-                      <a:srgbClr val="FFFFFF"/>
-                    </a:solidFill>
-                  </a:tcPr>
-                </a:tc>
-                <a:tc>
-                  <a:txBody>
-                    <a:bodyPr/>
-                    <a:lstStyle/>
-                    <a:p>
-                      <a:pPr algn="l" fontAlgn="ctr">
-                        <a:buNone/>
-                      </a:pPr>
-                      <a:r>
-                        <a:rPr lang="ko-KR" altLang="en-US" sz="1000" b="0" i="0" u="none" strike="noStrike" dirty="0">
-                          <a:solidFill>
-                            <a:srgbClr val="000000"/>
-                          </a:solidFill>
-                          <a:effectLst/>
-                          <a:latin typeface="맑은 고딕" panose="020B0503020000020004" pitchFamily="34" charset="-127"/>
-                          <a:ea typeface="맑은 고딕" panose="020B0503020000020004" pitchFamily="34" charset="-127"/>
-                          <a:cs typeface="맑은 고딕"/>
-                        </a:rPr>
-                        <a:t>에이전트가 고친다</a:t>
-                      </a:r>
-                    </a:p>
-                  </a:txBody>
-                  <a:tcPr marL="81005" marR="6750" marT="6750" marB="0" anchor="ctr">
-                    <a:lnL>
-                      <a:noFill/>
-                    </a:lnL>
-                    <a:lnR>
-                      <a:noFill/>
-                    </a:lnR>
-                    <a:lnT w="9525" cap="flat" cmpd="sng" algn="ctr">
-                      <a:solidFill>
-                        <a:schemeClr val="bg1">
-                          <a:lumMod val="50000"/>
-                        </a:schemeClr>
-                      </a:solidFill>
-                      <a:prstDash val="solid"/>
-                      <a:round/>
-                      <a:headEnd type="none" w="med" len="med"/>
-                      <a:tailEnd type="none" w="med" len="med"/>
-                    </a:lnT>
-                    <a:lnB w="9525" cap="flat" cmpd="sng" algn="ctr">
-                      <a:solidFill>
-                        <a:schemeClr val="bg1">
-                          <a:lumMod val="50000"/>
-                        </a:schemeClr>
-                      </a:solidFill>
-                      <a:prstDash val="solid"/>
-                      <a:round/>
-                      <a:headEnd type="none" w="med" len="med"/>
-                      <a:tailEnd type="none" w="med" len="med"/>
-                    </a:lnB>
-                    <a:solidFill>
-                      <a:srgbClr val="FFFFFF"/>
-                    </a:solidFill>
-                  </a:tcPr>
-                </a:tc>
-              </a:tr>
-              <a:tr h="288000">
-                <a:tc>
-                  <a:txBody>
-                    <a:bodyPr/>
-                    <a:lstStyle/>
-                    <a:p>
-                      <a:pPr algn="l" fontAlgn="ctr">
-                        <a:buNone/>
-                      </a:pPr>
-                      <a:r>
-                        <a:rPr lang="en" sz="1000" b="1" i="0" u="none" strike="noStrike" dirty="0">
-                          <a:solidFill>
-                            <a:schemeClr val="tx1"/>
-                          </a:solidFill>
-                          <a:effectLst/>
-                          <a:latin typeface="맑은 고딕" panose="020B0503020000020004" pitchFamily="34" charset="-127"/>
-                          <a:ea typeface="맑은 고딕" panose="020B0503020000020004" pitchFamily="34" charset="-127"/>
-                          <a:cs typeface="맑은 고딕"/>
-                        </a:rPr>
-                        <a:t>앞 실습의 테스트</a:t>
-                      </a:r>
-                    </a:p>
-                  </a:txBody>
-                  <a:tcPr marL="81005" marR="6750" marT="6750" marB="0" anchor="ctr">
-                    <a:lnL>
-                      <a:noFill/>
-                    </a:lnL>
-                    <a:lnR>
-                      <a:noFill/>
-                    </a:lnR>
-                    <a:lnT w="9525" cap="flat" cmpd="sng" algn="ctr">
-                      <a:solidFill>
-                        <a:schemeClr val="bg1">
-                          <a:lumMod val="50000"/>
-                        </a:schemeClr>
-                      </a:solidFill>
-                      <a:prstDash val="solid"/>
-                      <a:round/>
-                      <a:headEnd type="none" w="med" len="med"/>
-                      <a:tailEnd type="none" w="med" len="med"/>
-                    </a:lnT>
-                    <a:lnB w="9525" cap="flat" cmpd="sng" algn="ctr">
-                      <a:solidFill>
-                        <a:schemeClr val="bg1">
-                          <a:lumMod val="50000"/>
-                        </a:schemeClr>
-                      </a:solidFill>
-                      <a:prstDash val="solid"/>
-                      <a:round/>
-                      <a:headEnd type="none" w="med" len="med"/>
-                      <a:tailEnd type="none" w="med" len="med"/>
-                    </a:lnB>
-                    <a:noFill/>
-                  </a:tcPr>
-                </a:tc>
-                <a:tc>
-                  <a:txBody>
-                    <a:bodyPr/>
-                    <a:lstStyle/>
-                    <a:p>
-                      <a:pPr algn="l" fontAlgn="ctr">
-                        <a:buNone/>
-                      </a:pPr>
-                      <a:r>
-                        <a:rPr lang="ko-KR" altLang="en-US" sz="1000" b="0" i="0" u="none" strike="noStrike" dirty="0">
-                          <a:solidFill>
-                            <a:srgbClr val="000000"/>
-                          </a:solidFill>
-                          <a:effectLst/>
-                          <a:latin typeface="맑은 고딕" panose="020B0503020000020004" pitchFamily="34" charset="-127"/>
-                          <a:ea typeface="맑은 고딕" panose="020B0503020000020004" pitchFamily="34" charset="-127"/>
-                          <a:cs typeface="맑은 고딕"/>
-                        </a:rPr>
-                        <a:t>해지·청구의 기존 기대값</a:t>
-                      </a:r>
-                    </a:p>
-                  </a:txBody>
-                  <a:tcPr marL="81005" marR="6750" marT="6750" marB="0" anchor="ctr">
-                    <a:lnL>
-                      <a:noFill/>
-                    </a:lnL>
-                    <a:lnR>
-                      <a:noFill/>
-                    </a:lnR>
-                    <a:lnT w="9525" cap="flat" cmpd="sng" algn="ctr">
-                      <a:solidFill>
-                        <a:schemeClr val="bg1">
-                          <a:lumMod val="50000"/>
-                        </a:schemeClr>
-                      </a:solidFill>
-                      <a:prstDash val="solid"/>
-                      <a:round/>
-                      <a:headEnd type="none" w="med" len="med"/>
-                      <a:tailEnd type="none" w="med" len="med"/>
-                    </a:lnT>
-                    <a:lnB w="9525" cap="flat" cmpd="sng" algn="ctr">
-                      <a:solidFill>
-                        <a:schemeClr val="bg1">
-                          <a:lumMod val="50000"/>
-                        </a:schemeClr>
-                      </a:solidFill>
-                      <a:prstDash val="solid"/>
-                      <a:round/>
-                      <a:headEnd type="none" w="med" len="med"/>
-                      <a:tailEnd type="none" w="med" len="med"/>
-                    </a:lnB>
-                    <a:solidFill>
-                      <a:srgbClr val="FFFFFF"/>
-                    </a:solidFill>
-                  </a:tcPr>
-                </a:tc>
-                <a:tc>
-                  <a:txBody>
-                    <a:bodyPr/>
-                    <a:lstStyle/>
-                    <a:p>
-                      <a:pPr algn="l" fontAlgn="ctr">
-                        <a:buNone/>
-                      </a:pPr>
-                      <a:r>
-                        <a:rPr lang="ko-KR" altLang="en-US" sz="1000" b="0" i="0" u="none" strike="noStrike" dirty="0">
-                          <a:solidFill>
-                            <a:srgbClr val="000000"/>
-                          </a:solidFill>
-                          <a:effectLst/>
-                          <a:latin typeface="맑은 고딕" panose="020B0503020000020004" pitchFamily="34" charset="-127"/>
-                          <a:ea typeface="맑은 고딕" panose="020B0503020000020004" pitchFamily="34" charset="-127"/>
-                          <a:cs typeface="맑은 고딕"/>
-                        </a:rPr>
-                        <a:t>멈추고 사람에게</a:t>
-                      </a:r>
-                    </a:p>
-                  </a:txBody>
-                  <a:tcPr marL="81005" marR="6750" marT="6750" marB="0" anchor="ctr">
-                    <a:lnL>
-                      <a:noFill/>
-                    </a:lnL>
-                    <a:lnR>
-                      <a:noFill/>
-                    </a:lnR>
-                    <a:lnT w="9525" cap="flat" cmpd="sng" algn="ctr">
-                      <a:solidFill>
-                        <a:schemeClr val="bg1">
-                          <a:lumMod val="50000"/>
-                        </a:schemeClr>
-                      </a:solidFill>
-                      <a:prstDash val="solid"/>
-                      <a:round/>
-                      <a:headEnd type="none" w="med" len="med"/>
-                      <a:tailEnd type="none" w="med" len="med"/>
-                    </a:lnT>
-                    <a:lnB w="9525" cap="flat" cmpd="sng" algn="ctr">
-                      <a:solidFill>
-                        <a:schemeClr val="bg1">
-                          <a:lumMod val="50000"/>
-                        </a:schemeClr>
-                      </a:solidFill>
-                      <a:prstDash val="solid"/>
-                      <a:round/>
-                      <a:headEnd type="none" w="med" len="med"/>
-                      <a:tailEnd type="none" w="med" len="med"/>
-                    </a:lnB>
-                    <a:solidFill>
-                      <a:srgbClr val="FFFFFF"/>
-                    </a:solidFill>
-                  </a:tcPr>
-                </a:tc>
-              </a:tr>
-              <a:tr h="288000">
-                <a:tc>
-                  <a:txBody>
-                    <a:bodyPr/>
-                    <a:lstStyle/>
-                    <a:p>
-                      <a:pPr algn="l" fontAlgn="ctr">
-                        <a:buNone/>
-                      </a:pPr>
-                      <a:r>
-                        <a:rPr lang="en" sz="1000" b="1" i="0" u="none" strike="noStrike" dirty="0">
-                          <a:solidFill>
-                            <a:schemeClr val="tx1"/>
-                          </a:solidFill>
-                          <a:effectLst/>
-                          <a:latin typeface="맑은 고딕" panose="020B0503020000020004" pitchFamily="34" charset="-127"/>
-                          <a:ea typeface="맑은 고딕" panose="020B0503020000020004" pitchFamily="34" charset="-127"/>
-                          <a:cs typeface="맑은 고딕"/>
-                        </a:rPr>
-                        <a:t>의존 규칙 검사</a:t>
-                      </a:r>
-                    </a:p>
-                  </a:txBody>
-                  <a:tcPr marL="81005" marR="6750" marT="6750" marB="0" anchor="ctr">
-                    <a:lnL>
-                      <a:noFill/>
-                    </a:lnL>
-                    <a:lnR>
-                      <a:noFill/>
-                    </a:lnR>
-                    <a:lnT w="9525" cap="flat" cmpd="sng" algn="ctr">
-                      <a:solidFill>
-                        <a:schemeClr val="bg1">
-                          <a:lumMod val="50000"/>
-                        </a:schemeClr>
-                      </a:solidFill>
-                      <a:prstDash val="solid"/>
-                      <a:round/>
-                      <a:headEnd type="none" w="med" len="med"/>
-                      <a:tailEnd type="none" w="med" len="med"/>
-                    </a:lnT>
-                    <a:lnB w="9525" cap="flat" cmpd="sng" algn="ctr">
-                      <a:solidFill>
-                        <a:schemeClr val="bg1">
-                          <a:lumMod val="50000"/>
-                        </a:schemeClr>
-                      </a:solidFill>
-                      <a:prstDash val="solid"/>
-                      <a:round/>
-                      <a:headEnd type="none" w="med" len="med"/>
-                      <a:tailEnd type="none" w="med" len="med"/>
-                    </a:lnB>
-                    <a:noFill/>
-                  </a:tcPr>
-                </a:tc>
-                <a:tc>
-                  <a:txBody>
-                    <a:bodyPr/>
-                    <a:lstStyle/>
-                    <a:p>
-                      <a:pPr algn="l" fontAlgn="ctr">
-                        <a:buNone/>
-                      </a:pPr>
-                      <a:r>
-                        <a:rPr lang="ko-KR" altLang="en-US" sz="1000" b="0" i="0" u="none" strike="noStrike" dirty="0">
-                          <a:solidFill>
-                            <a:srgbClr val="000000"/>
-                          </a:solidFill>
-                          <a:effectLst/>
-                          <a:latin typeface="맑은 고딕" panose="020B0503020000020004" pitchFamily="34" charset="-127"/>
-                          <a:ea typeface="맑은 고딕" panose="020B0503020000020004" pitchFamily="34" charset="-127"/>
-                          <a:cs typeface="맑은 고딕"/>
-                        </a:rPr>
-                        <a:t>subscription이 연동을 모른다</a:t>
-                      </a:r>
-                    </a:p>
-                  </a:txBody>
-                  <a:tcPr marL="81005" marR="6750" marT="6750" marB="0" anchor="ctr">
-                    <a:lnL>
-                      <a:noFill/>
-                    </a:lnL>
-                    <a:lnR>
-                      <a:noFill/>
-                    </a:lnR>
-                    <a:lnT w="9525" cap="flat" cmpd="sng" algn="ctr">
-                      <a:solidFill>
-                        <a:schemeClr val="bg1">
-                          <a:lumMod val="50000"/>
-                        </a:schemeClr>
-                      </a:solidFill>
-                      <a:prstDash val="solid"/>
-                      <a:round/>
-                      <a:headEnd type="none" w="med" len="med"/>
-                      <a:tailEnd type="none" w="med" len="med"/>
-                    </a:lnT>
-                    <a:lnB w="9525" cap="flat" cmpd="sng" algn="ctr">
-                      <a:solidFill>
-                        <a:schemeClr val="bg1">
-                          <a:lumMod val="50000"/>
-                        </a:schemeClr>
-                      </a:solidFill>
-                      <a:prstDash val="solid"/>
-                      <a:round/>
-                      <a:headEnd type="none" w="med" len="med"/>
-                      <a:tailEnd type="none" w="med" len="med"/>
-                    </a:lnB>
-                    <a:solidFill>
-                      <a:srgbClr val="FFFFFF"/>
-                    </a:solidFill>
-                  </a:tcPr>
-                </a:tc>
-                <a:tc>
-                  <a:txBody>
-                    <a:bodyPr/>
-                    <a:lstStyle/>
-                    <a:p>
-                      <a:pPr algn="l" fontAlgn="ctr">
-                        <a:buNone/>
-                      </a:pPr>
-                      <a:r>
-                        <a:rPr lang="ko-KR" altLang="en-US" sz="1000" b="0" i="0" u="none" strike="noStrike" dirty="0">
-                          <a:solidFill>
-                            <a:srgbClr val="000000"/>
-                          </a:solidFill>
-                          <a:effectLst/>
-                          <a:latin typeface="맑은 고딕" panose="020B0503020000020004" pitchFamily="34" charset="-127"/>
-                          <a:ea typeface="맑은 고딕" panose="020B0503020000020004" pitchFamily="34" charset="-127"/>
-                          <a:cs typeface="맑은 고딕"/>
-                        </a:rPr>
-                        <a:t>멈추고 사람에게</a:t>
-                      </a:r>
-                    </a:p>
-                  </a:txBody>
-                  <a:tcPr marL="81005" marR="6750" marT="6750" marB="0" anchor="ctr">
-                    <a:lnL>
-                      <a:noFill/>
-                    </a:lnL>
-                    <a:lnR>
-                      <a:noFill/>
-                    </a:lnR>
-                    <a:lnT w="9525" cap="flat" cmpd="sng" algn="ctr">
-                      <a:solidFill>
-                        <a:schemeClr val="bg1">
-                          <a:lumMod val="50000"/>
-                        </a:schemeClr>
-                      </a:solidFill>
-                      <a:prstDash val="solid"/>
-                      <a:round/>
-                      <a:headEnd type="none" w="med" len="med"/>
-                      <a:tailEnd type="none" w="med" len="med"/>
-                    </a:lnT>
-                    <a:lnB w="9525" cap="flat" cmpd="sng" algn="ctr">
-                      <a:solidFill>
-                        <a:schemeClr val="bg1">
-                          <a:lumMod val="50000"/>
-                        </a:schemeClr>
-                      </a:solidFill>
-                      <a:prstDash val="solid"/>
-                      <a:round/>
-                      <a:headEnd type="none" w="med" len="med"/>
-                      <a:tailEnd type="none" w="med" len="med"/>
-                    </a:lnB>
-                    <a:solidFill>
-                      <a:srgbClr val="FFFFFF"/>
-                    </a:solidFill>
-                  </a:tcPr>
-                </a:tc>
-              </a:tr>
-            </a:tbl>
-          </a:graphicData>
-        </a:graphic>
-      </p:graphicFrame>
-      <p:sp>
-        <p:nvSpPr>
-          <p:cNvPr id="13" name="TextBox 12">
-            <a:extLst>
-              <a:ext uri="{FF2B5EF4-FFF2-40B4-BE49-F238E27FC236}">
-                <a16:creationId xmlns:a16="http://schemas.microsoft.com/office/drawing/2014/main" id="{654EDDB4-901F-3D48-A715-17D163E8A7AC}"/>
-              </a:ext>
-            </a:extLst>
-          </p:cNvPr>
-          <p:cNvSpPr txBox="1"/>
-          <p:nvPr/>
-        </p:nvSpPr>
-        <p:spPr>
-          <a:xfrm>
-            <a:off x="365760" y="960120"/>
-            <a:ext cx="8412480" cy="781278"/>
-          </a:xfrm>
-          <a:prstGeom prst="rect">
-            <a:avLst/>
-          </a:prstGeom>
-          <a:noFill/>
-        </p:spPr>
-        <p:txBody>
-          <a:bodyPr wrap="square">
-            <a:spAutoFit/>
-          </a:bodyPr>
-          <a:lstStyle/>
-          <a:p>
-            <a:pPr marL="0" indent="0">
-              <a:spcBef>
-                <a:spcPts val="600"/>
-              </a:spcBef>
-              <a:spcAft>
-                <a:spcPts val="600"/>
-              </a:spcAft>
-              <a:buNone/>
-            </a:pPr>
-            <a:r>
-              <a:rPr sz="1800" b="0">
-                <a:solidFill>
-                  <a:srgbClr val="000000"/>
-                </a:solidFill>
-                <a:latin typeface="맑은 고딕"/>
-                <a:ea typeface="맑은 고딕"/>
-              </a:rPr>
-              <a:t>센서마다 </a:t>
-            </a:r>
-            <a:r>
-              <a:rPr sz="1800" b="1">
-                <a:solidFill>
-                  <a:srgbClr val="000000"/>
-                </a:solidFill>
-                <a:latin typeface="맑은 고딕"/>
-                <a:ea typeface="맑은 고딕"/>
-              </a:rPr>
-              <a:t>실패하면 어떻게 할지</a:t>
-            </a:r>
-            <a:r>
-              <a:rPr sz="1800" b="0">
-                <a:solidFill>
-                  <a:srgbClr val="000000"/>
-                </a:solidFill>
-                <a:latin typeface="맑은 고딕"/>
-                <a:ea typeface="맑은 고딕"/>
-              </a:rPr>
-              <a:t>를 정했다. 표의 위 둘은 에이전트가 고치고, 아래 둘은 멈추고 사람에게 돌린다.</a:t>
-            </a:r>
-          </a:p>
-        </p:txBody>
-      </p:sp>
-      <p:sp>
-        <p:nvSpPr>
-          <p:cNvPr id="8" name="슬라이드 번호 개체 틀 2">
-            <a:extLst>
-              <a:ext uri="{FF2B5EF4-FFF2-40B4-BE49-F238E27FC236}">
-                <a16:creationId xmlns:a16="http://schemas.microsoft.com/office/drawing/2014/main" id="{741B75C6-7ED3-AA4C-41B6-F69C599EA447}"/>
-              </a:ext>
-            </a:extLst>
-          </p:cNvPr>
-          <p:cNvSpPr>
-            <a:spLocks noGrp="1"/>
-          </p:cNvSpPr>
-          <p:nvPr>
-            <p:ph type="sldNum" sz="quarter" idx="10"/>
-          </p:nvPr>
-        </p:nvSpPr>
-        <p:spPr>
-          <a:xfrm>
-            <a:off x="3508472" y="6449625"/>
-            <a:ext cx="2133600" cy="238277"/>
-          </a:xfrm>
-        </p:spPr>
-        <p:txBody>
-          <a:bodyPr>
-            <a:normAutofit/>
-          </a:bodyPr>
-          <a:lstStyle/>
-          <a:p>
-            <a:pPr marL="0" marR="0" lvl="0" indent="0" algn="ctr" defTabSz="457200" rtl="0" eaLnBrk="1" fontAlgn="auto" latinLnBrk="0" hangingPunct="1">
-              <a:lnSpc>
-                <a:spcPct val="100000"/>
-              </a:lnSpc>
-              <a:spcBef>
-                <a:spcPts val="0"/>
-              </a:spcBef>
-              <a:spcAft>
-                <a:spcPts val="600"/>
-              </a:spcAft>
-              <a:buClrTx/>
-              <a:buSzTx/>
-              <a:buFontTx/>
-              <a:buNone/>
-              <a:tabLst/>
-              <a:defRPr/>
-            </a:pPr>
-            <a:r>
-              <a:rPr kumimoji="0" lang="en-US" altLang="ko-KR" sz="800" b="0" i="0" u="none" strike="noStrike" kern="1200" cap="none" spc="0" normalizeH="0" baseline="0" noProof="0">
-                <a:ln>
-                  <a:noFill/>
-                </a:ln>
-                <a:solidFill>
-                  <a:prstClr val="black"/>
-                </a:solidFill>
-                <a:effectLst/>
-                <a:uLnTx/>
-                <a:uFillTx/>
-                <a:latin typeface="맑은 고딕" panose="020B0503020000020004" pitchFamily="34" charset="-127"/>
-                <a:ea typeface="맑은 고딕" panose="020B0503020000020004" pitchFamily="34" charset="-127"/>
-                <a:cs typeface="+mn-cs"/>
-              </a:rPr>
-              <a:t>- 22 -</a:t>
-            </a:r>
-          </a:p>
-        </p:txBody>
-      </p:sp>
-      <p:sp>
-        <p:nvSpPr>
-          <p:cNvPr id="14" name="TextBox 12">
-            <a:extLst>
-              <a:ext uri="{FF2B5EF4-FFF2-40B4-BE49-F238E27FC236}">
-                <a16:creationId xmlns:a16="http://schemas.microsoft.com/office/drawing/2014/main" id="{654EDDB4-901F-3D48-A715-17D163E8A7AC}"/>
-              </a:ext>
-            </a:extLst>
-          </p:cNvPr>
-          <p:cNvSpPr txBox="1"/>
-          <p:nvPr/>
-        </p:nvSpPr>
-        <p:spPr>
-          <a:xfrm>
-            <a:off x="365760" y="3384598"/>
-            <a:ext cx="8412480" cy="781278"/>
-          </a:xfrm>
-          <a:prstGeom prst="rect">
-            <a:avLst/>
-          </a:prstGeom>
-          <a:noFill/>
-        </p:spPr>
-        <p:txBody>
-          <a:bodyPr wrap="square">
-            <a:spAutoFit/>
-          </a:bodyPr>
-          <a:lstStyle/>
-          <a:p>
-            <a:pPr lvl="2" marL="723900" indent="-368300">
-              <a:spcBef>
-                <a:spcPts val="600"/>
-              </a:spcBef>
-              <a:spcAft>
-                <a:spcPts val="600"/>
-              </a:spcAft>
-              <a:buSzPct val="90000"/>
-              <a:buFont typeface="Wingdings" pitchFamily="2" charset="2"/>
-              <a:buChar char=""/>
-            </a:pPr>
-            <a:r>
-              <a:rPr sz="1800" b="1">
-                <a:solidFill>
-                  <a:srgbClr val="000000"/>
-                </a:solidFill>
-                <a:latin typeface="맑은 고딕"/>
-                <a:ea typeface="맑은 고딕"/>
-              </a:rPr>
-              <a:t>확인 지점</a:t>
-            </a:r>
-            <a:r>
-              <a:rPr sz="1800" b="0">
-                <a:solidFill>
-                  <a:srgbClr val="000000"/>
-                </a:solidFill>
-                <a:latin typeface="맑은 고딕"/>
-                <a:ea typeface="맑은 고딕"/>
-              </a:rPr>
-              <a:t> —</a:t>
-            </a:r>
-            <a:r>
-              <a:rPr sz="1600" b="0">
-                <a:solidFill>
-                  <a:srgbClr val="000000"/>
-                </a:solidFill>
-                <a:latin typeface="맑은 고딕"/>
-                <a:ea typeface="맑은 고딕"/>
-              </a:rPr>
-              <a:t> 계획 뒤, 빨강 뒤, 병합 전. 병합 전에는 전체 테스트 출력과 바뀐 파일 목록을 본다.</a:t>
-            </a:r>
-          </a:p>
-        </p:txBody>
-      </p:sp>
-    </p:spTree>
-    <p:extLst>
-      <p:ext uri="{BB962C8B-B14F-4D97-AF65-F5344CB8AC3E}">
-        <p14:creationId xmlns:p14="http://schemas.microsoft.com/office/powerpoint/2010/main" val="2789569477"/>
-      </p:ext>
-    </p:extLst>
-  </p:cSld>
-  <p:clrMapOvr>
-    <a:masterClrMapping/>
-  </p:clrMapOvr>
-</p:sld>
-</file>
-
-<file path=ppt/slides/slide23.xml><?xml version="1.0" encoding="utf-8"?>
-<p:sld xmlns:a="http://schemas.openxmlformats.org/drawingml/2006/main" xmlns:r="http://schemas.openxmlformats.org/officeDocument/2006/relationships" xmlns:p="http://schemas.openxmlformats.org/presentationml/2006/main">
-  <p:cSld>
-    <p:spTree>
-      <p:nvGrpSpPr>
-        <p:cNvPr id="1" name="">
-          <a:extLst>
-            <a:ext uri="{FF2B5EF4-FFF2-40B4-BE49-F238E27FC236}">
-              <a16:creationId xmlns:a16="http://schemas.microsoft.com/office/drawing/2014/main" id="{8E4F1F13-426B-086B-7D8C-9A58A0F879DB}"/>
-            </a:ext>
-          </a:extLst>
-        </p:cNvPr>
-        <p:cNvGrpSpPr/>
-        <p:nvPr/>
-      </p:nvGrpSpPr>
-      <p:grpSpPr>
-        <a:xfrm>
-          <a:off x="0" y="0"/>
-          <a:ext cx="0" cy="0"/>
-          <a:chOff x="0" y="0"/>
-          <a:chExt cx="0" cy="0"/>
-        </a:xfrm>
-      </p:grpSpPr>
-      <p:sp>
-        <p:nvSpPr>
-          <p:cNvPr id="2" name="제목 1">
-            <a:extLst>
-              <a:ext uri="{FF2B5EF4-FFF2-40B4-BE49-F238E27FC236}">
-                <a16:creationId xmlns:a16="http://schemas.microsoft.com/office/drawing/2014/main" id="{AA26A92D-924E-0575-9551-F8FD7BFD3FAD}"/>
-              </a:ext>
-            </a:extLst>
-          </p:cNvPr>
-          <p:cNvSpPr>
-            <a:spLocks noGrp="1"/>
-          </p:cNvSpPr>
-          <p:nvPr>
-            <p:ph type="title"/>
-          </p:nvPr>
-        </p:nvSpPr>
-        <p:spPr/>
-        <p:txBody>
-          <a:bodyPr/>
-          <a:lstStyle/>
-          <a:p>
-            <a:r>
-              <a:rPr sz="2400" b="1">
-                <a:solidFill>
-                  <a:srgbClr val="000000"/>
-                </a:solidFill>
-                <a:latin typeface="맑은 고딕"/>
-                <a:ea typeface="맑은 고딕"/>
-              </a:rPr>
-              <a:t>22. 과정 보완 </a:t>
-            </a:r>
-            <a:r>
-              <a:rPr sz="1800" b="1">
-                <a:solidFill>
-                  <a:srgbClr val="000000"/>
-                </a:solidFill>
-                <a:latin typeface="맑은 고딕"/>
-                <a:ea typeface="맑은 고딕"/>
-              </a:rPr>
-              <a:t>(안)</a:t>
-            </a:r>
-          </a:p>
-        </p:txBody>
-      </p:sp>
-      <p:sp>
-        <p:nvSpPr>
-          <p:cNvPr id="3" name="슬라이드 번호 개체 틀 2">
-            <a:extLst>
-              <a:ext uri="{FF2B5EF4-FFF2-40B4-BE49-F238E27FC236}">
-                <a16:creationId xmlns:a16="http://schemas.microsoft.com/office/drawing/2014/main" id="{12CF30EE-4DFD-8063-56B8-B8689E76DFCA}"/>
-              </a:ext>
-            </a:extLst>
-          </p:cNvPr>
-          <p:cNvSpPr>
-            <a:spLocks noGrp="1"/>
-          </p:cNvSpPr>
-          <p:nvPr>
-            <p:ph type="sldNum" sz="quarter" idx="10"/>
-          </p:nvPr>
-        </p:nvSpPr>
-        <p:spPr/>
-        <p:txBody>
-          <a:bodyPr/>
-          <a:lstStyle/>
-          <a:p>
-            <a:pPr>
-              <a:defRPr/>
-            </a:pPr>
-            <a:r>
-              <a:rPr lang="en-US" altLang="ko-KR">
-                <a:solidFill>
-                  <a:prstClr val="black"/>
-                </a:solidFill>
-              </a:rPr>
-              <a:t>- 23 -</a:t>
-            </a:r>
-          </a:p>
-        </p:txBody>
-      </p:sp>
-      <p:sp>
-        <p:nvSpPr>
-          <p:cNvPr id="5" name="텍스트 개체 틀 4">
-            <a:extLst>
-              <a:ext uri="{FF2B5EF4-FFF2-40B4-BE49-F238E27FC236}">
-                <a16:creationId xmlns:a16="http://schemas.microsoft.com/office/drawing/2014/main" id="{D66274C8-E16F-5AEB-614B-D8D32DA3E8C6}"/>
-              </a:ext>
-            </a:extLst>
-          </p:cNvPr>
-          <p:cNvSpPr>
-            <a:spLocks noGrp="1"/>
-          </p:cNvSpPr>
-          <p:nvPr>
-            <p:ph type="body" sz="quarter" idx="11"/>
-          </p:nvPr>
-        </p:nvSpPr>
-        <p:spPr/>
-        <p:txBody>
-          <a:bodyPr/>
-          <a:lstStyle/>
-          <a:p>
-            <a:r>
-              <a:rPr kumimoji="1" lang="en-US" altLang="ko-KR" sz="1400" dirty="0" err="1"/>
-              <a:t>14. AI-native SW공학</a:t>
-            </a:r>
-          </a:p>
-        </p:txBody>
-      </p:sp>
-      <p:sp>
-        <p:nvSpPr>
-          <p:cNvPr id="6" name="텍스트 개체 틀 5">
-            <a:extLst>
-              <a:ext uri="{FF2B5EF4-FFF2-40B4-BE49-F238E27FC236}">
-                <a16:creationId xmlns:a16="http://schemas.microsoft.com/office/drawing/2014/main" id="{A24E58E1-194B-A320-AEEE-24D08685BB67}"/>
-              </a:ext>
-            </a:extLst>
-          </p:cNvPr>
-          <p:cNvSpPr>
-            <a:spLocks noGrp="1"/>
-          </p:cNvSpPr>
-          <p:nvPr>
-            <p:ph type="body" sz="quarter" idx="12"/>
-          </p:nvPr>
-        </p:nvSpPr>
-        <p:spPr/>
-        <p:txBody>
-          <a:bodyPr/>
-          <a:lstStyle/>
-          <a:p>
-            <a:endParaRPr kumimoji="1" lang="ko-KR" altLang="en-US" dirty="0"/>
-          </a:p>
-        </p:txBody>
-      </p:sp>
-      <p:sp>
-        <p:nvSpPr>
-          <p:cNvPr id="7" name="텍스트 개체 틀 6">
-            <a:extLst>
-              <a:ext uri="{FF2B5EF4-FFF2-40B4-BE49-F238E27FC236}">
-                <a16:creationId xmlns:a16="http://schemas.microsoft.com/office/drawing/2014/main" id="{A219F420-613B-6234-45F6-0955A9A4505F}"/>
-              </a:ext>
-            </a:extLst>
-          </p:cNvPr>
-          <p:cNvSpPr>
-            <a:spLocks noGrp="1"/>
-          </p:cNvSpPr>
-          <p:nvPr>
-            <p:ph type="body" sz="quarter" idx="13"/>
-          </p:nvPr>
-        </p:nvSpPr>
-        <p:spPr/>
-        <p:txBody>
-          <a:bodyPr/>
-          <a:lstStyle/>
-          <a:p>
-            <a:endParaRPr kumimoji="1" lang="en-US" altLang="ko-KR" dirty="0"/>
-          </a:p>
-        </p:txBody>
-      </p:sp>
-      <p:sp>
-        <p:nvSpPr>
-          <p:cNvPr id="8" name="내용 개체 틀 7">
-            <a:extLst>
-              <a:ext uri="{FF2B5EF4-FFF2-40B4-BE49-F238E27FC236}">
-                <a16:creationId xmlns:a16="http://schemas.microsoft.com/office/drawing/2014/main" id="{BEBA2C4A-B0BF-F2E4-EA6E-614C99CBA184}"/>
-              </a:ext>
-            </a:extLst>
-          </p:cNvPr>
-          <p:cNvSpPr>
-            <a:spLocks noGrp="1"/>
-          </p:cNvSpPr>
-          <p:nvPr>
-            <p:ph idx="1"/>
-          </p:nvPr>
-        </p:nvSpPr>
-        <p:spPr>
-          <a:xfrm>
-            <a:off x="233172" y="1414318"/>
-            <a:ext cx="4338828" cy="4898147"/>
-          </a:xfrm>
-        </p:spPr>
-        <p:txBody>
-          <a:bodyPr>
-            <a:normAutofit/>
-          </a:bodyPr>
-          <a:lstStyle/>
-          <a:p>
-            <a:pPr lvl="2" marL="228600" indent="-182880">
-              <a:spcBef>
-                <a:spcPts val="300"/>
-              </a:spcBef>
-              <a:spcAft>
-                <a:spcPts val="300"/>
-              </a:spcAft>
-              <a:buSzPct val="90000"/>
-              <a:buFont typeface="Wingdings" pitchFamily="2" charset="2"/>
-              <a:buChar char=""/>
-            </a:pPr>
-            <a:r>
-              <a:rPr sz="1400" b="1">
-                <a:solidFill>
-                  <a:srgbClr val="000000"/>
-                </a:solidFill>
-                <a:latin typeface="맑은 고딕"/>
-                <a:ea typeface="맑은 고딕"/>
-              </a:rPr>
-              <a:t>용어집</a:t>
-            </a:r>
-            <a:r>
-              <a:rPr sz="1000" b="0">
-                <a:solidFill>
-                  <a:srgbClr val="000000"/>
-                </a:solidFill>
-                <a:latin typeface="맑은 고딕"/>
-                <a:ea typeface="맑은 고딕"/>
-              </a:rPr>
-              <a:t>(실습 2)</a:t>
-            </a:r>
-          </a:p>
-          <a:p>
-            <a:pPr lvl="3" marL="457200" indent="-182880">
-              <a:spcBef>
-                <a:spcPts val="300"/>
-              </a:spcBef>
-              <a:spcAft>
-                <a:spcPts val="300"/>
-              </a:spcAft>
-              <a:buSzPct val="90000"/>
-              <a:buFont typeface="Wingdings" pitchFamily="2" charset="2"/>
-              <a:buChar char=""/>
-            </a:pPr>
-            <a:r>
-              <a:rPr sz="1200" b="1">
-                <a:solidFill>
-                  <a:srgbClr val="000000"/>
-                </a:solidFill>
-                <a:latin typeface="맑은 고딕"/>
-                <a:ea typeface="맑은 고딕"/>
-              </a:rPr>
-              <a:t>맥락 파일로</a:t>
-            </a:r>
-            <a:r>
-              <a:rPr sz="1200" b="0">
-                <a:solidFill>
-                  <a:srgbClr val="000000"/>
-                </a:solidFill>
-                <a:latin typeface="맑은 고딕"/>
-                <a:ea typeface="맑은 고딕"/>
-              </a:rPr>
-              <a:t> —</a:t>
-            </a:r>
-            <a:r>
-              <a:rPr sz="1000" b="0">
-                <a:solidFill>
-                  <a:srgbClr val="000000"/>
-                </a:solidFill>
-                <a:latin typeface="맑은 고딕"/>
-                <a:ea typeface="맑은 고딕"/>
-              </a:rPr>
-              <a:t> 용어집을 저장소의 문서로 두고 맥락 파일이 가리킨다.</a:t>
-            </a:r>
-          </a:p>
-          <a:p>
-            <a:pPr lvl="2" marL="228600" indent="-182880">
-              <a:spcBef>
-                <a:spcPts val="300"/>
-              </a:spcBef>
-              <a:spcAft>
-                <a:spcPts val="300"/>
-              </a:spcAft>
-              <a:buSzPct val="90000"/>
-              <a:buFont typeface="Wingdings" pitchFamily="2" charset="2"/>
-              <a:buChar char=""/>
-            </a:pPr>
-            <a:r>
-              <a:rPr sz="1400" b="1">
-                <a:solidFill>
-                  <a:srgbClr val="000000"/>
-                </a:solidFill>
-                <a:latin typeface="맑은 고딕"/>
-                <a:ea typeface="맑은 고딕"/>
-              </a:rPr>
-              <a:t>상태 기계</a:t>
-            </a:r>
-            <a:r>
-              <a:rPr sz="1000" b="0">
-                <a:solidFill>
-                  <a:srgbClr val="000000"/>
-                </a:solidFill>
-                <a:latin typeface="맑은 고딕"/>
-                <a:ea typeface="맑은 고딕"/>
-              </a:rPr>
-              <a:t>(실습 4·11·12)</a:t>
-            </a:r>
-          </a:p>
-          <a:p>
-            <a:pPr lvl="3" marL="457200" indent="-182880">
-              <a:spcBef>
-                <a:spcPts val="300"/>
-              </a:spcBef>
-              <a:spcAft>
-                <a:spcPts val="300"/>
-              </a:spcAft>
-              <a:buSzPct val="90000"/>
-              <a:buFont typeface="Wingdings" pitchFamily="2" charset="2"/>
-              <a:buChar char=""/>
-            </a:pPr>
-            <a:r>
-              <a:rPr sz="1200" b="1">
-                <a:solidFill>
-                  <a:srgbClr val="000000"/>
-                </a:solidFill>
-                <a:latin typeface="맑은 고딕"/>
-                <a:ea typeface="맑은 고딕"/>
-              </a:rPr>
-              <a:t>검사 가능하게</a:t>
-            </a:r>
-            <a:r>
-              <a:rPr sz="1200" b="0">
-                <a:solidFill>
-                  <a:srgbClr val="000000"/>
-                </a:solidFill>
-                <a:latin typeface="맑은 고딕"/>
-                <a:ea typeface="맑은 고딕"/>
-              </a:rPr>
-              <a:t> —</a:t>
-            </a:r>
-            <a:r>
-              <a:rPr sz="1000" b="0">
-                <a:solidFill>
-                  <a:srgbClr val="000000"/>
-                </a:solidFill>
-                <a:latin typeface="맑은 고딕"/>
-                <a:ea typeface="맑은 고딕"/>
-              </a:rPr>
-              <a:t> 전이 목록을 테스트의 기대값으로 옮긴다.</a:t>
-            </a:r>
-          </a:p>
-        </p:txBody>
-      </p:sp>
-      <p:sp>
-        <p:nvSpPr>
-          <p:cNvPr id="9" name="내용 개체 틀 7">
-            <a:extLst>
-              <a:ext uri="{FF2B5EF4-FFF2-40B4-BE49-F238E27FC236}">
-                <a16:creationId xmlns:a16="http://schemas.microsoft.com/office/drawing/2014/main" id="{BEBA2C4A-B0BF-F2E4-EA6E-614C99CBA184}"/>
-              </a:ext>
-            </a:extLst>
-          </p:cNvPr>
-          <p:cNvSpPr>
-            <a:spLocks noGrp="1"/>
-          </p:cNvSpPr>
-          <p:nvPr>
-            <p:ph idx="1"/>
-          </p:nvPr>
-        </p:nvSpPr>
-        <p:spPr>
-          <a:xfrm>
-            <a:off x="233172" y="960120"/>
-            <a:ext cx="8778240" cy="454198"/>
-          </a:xfrm>
-        </p:spPr>
-        <p:txBody>
-          <a:bodyPr>
-            <a:normAutofit/>
-          </a:bodyPr>
-          <a:lstStyle/>
-          <a:p>
-            <a:pPr marL="0" indent="0">
-              <a:spcBef>
-                <a:spcPts val="300"/>
-              </a:spcBef>
-              <a:spcAft>
-                <a:spcPts val="300"/>
-              </a:spcAft>
-              <a:buNone/>
-            </a:pPr>
-            <a:r>
-              <a:rPr sz="1400" b="0">
-                <a:solidFill>
-                  <a:srgbClr val="000000"/>
-                </a:solidFill>
-                <a:latin typeface="맑은 고딕"/>
-                <a:ea typeface="맑은 고딕"/>
-              </a:rPr>
-              <a:t>과정 전체의 산출물을 에이전트와 일하는 관점에서 </a:t>
-            </a:r>
-            <a:r>
-              <a:rPr sz="1400" b="1">
-                <a:solidFill>
-                  <a:srgbClr val="000000"/>
-                </a:solidFill>
-                <a:latin typeface="맑은 고딕"/>
-                <a:ea typeface="맑은 고딕"/>
-              </a:rPr>
-              <a:t>다시 본다</a:t>
-            </a:r>
-            <a:r>
-              <a:rPr sz="1400" b="0">
-                <a:solidFill>
-                  <a:srgbClr val="000000"/>
-                </a:solidFill>
-                <a:latin typeface="맑은 고딕"/>
-                <a:ea typeface="맑은 고딕"/>
-              </a:rPr>
-              <a:t>. 후속 작업에 영향을 미치는 것만 반영한다.</a:t>
-            </a:r>
-          </a:p>
-        </p:txBody>
-      </p:sp>
-      <p:sp>
-        <p:nvSpPr>
-          <p:cNvPr id="10" name="내용 개체 틀 7">
-            <a:extLst>
-              <a:ext uri="{FF2B5EF4-FFF2-40B4-BE49-F238E27FC236}">
-                <a16:creationId xmlns:a16="http://schemas.microsoft.com/office/drawing/2014/main" id="{BEBA2C4A-B0BF-F2E4-EA6E-614C99CBA184}"/>
-              </a:ext>
-            </a:extLst>
-          </p:cNvPr>
-          <p:cNvSpPr>
-            <a:spLocks noGrp="1"/>
-          </p:cNvSpPr>
-          <p:nvPr>
-            <p:ph idx="1"/>
-          </p:nvPr>
-        </p:nvSpPr>
-        <p:spPr>
-          <a:xfrm>
-            <a:off x="4572000" y="1414318"/>
-            <a:ext cx="4439412" cy="4898147"/>
-          </a:xfrm>
-        </p:spPr>
-        <p:txBody>
-          <a:bodyPr>
-            <a:normAutofit/>
-          </a:bodyPr>
-          <a:lstStyle/>
-          <a:p>
-            <a:pPr lvl="2" marL="228600" indent="-182880">
-              <a:spcBef>
-                <a:spcPts val="300"/>
-              </a:spcBef>
-              <a:spcAft>
-                <a:spcPts val="300"/>
-              </a:spcAft>
-              <a:buSzPct val="90000"/>
-              <a:buFont typeface="Wingdings" pitchFamily="2" charset="2"/>
-              <a:buChar char=""/>
-            </a:pPr>
-            <a:r>
-              <a:rPr sz="1400" b="1">
-                <a:solidFill>
-                  <a:srgbClr val="000000"/>
-                </a:solidFill>
-                <a:latin typeface="맑은 고딕"/>
-                <a:ea typeface="맑은 고딕"/>
-              </a:rPr>
-              <a:t>결정 기록</a:t>
-            </a:r>
-            <a:r>
-              <a:rPr sz="1000" b="0">
-                <a:solidFill>
-                  <a:srgbClr val="000000"/>
-                </a:solidFill>
-                <a:latin typeface="맑은 고딕"/>
-                <a:ea typeface="맑은 고딕"/>
-              </a:rPr>
-              <a:t>(실습 9·13)</a:t>
-            </a:r>
-          </a:p>
-          <a:p>
-            <a:pPr lvl="3" marL="457200" indent="-182880">
-              <a:spcBef>
-                <a:spcPts val="300"/>
-              </a:spcBef>
-              <a:spcAft>
-                <a:spcPts val="300"/>
-              </a:spcAft>
-              <a:buSzPct val="90000"/>
-              <a:buFont typeface="Wingdings" pitchFamily="2" charset="2"/>
-              <a:buChar char=""/>
-            </a:pPr>
-            <a:r>
-              <a:rPr sz="1200" b="1">
-                <a:solidFill>
-                  <a:srgbClr val="000000"/>
-                </a:solidFill>
-                <a:latin typeface="맑은 고딕"/>
-                <a:ea typeface="맑은 고딕"/>
-              </a:rPr>
-              <a:t>맥락으로</a:t>
-            </a:r>
-            <a:r>
-              <a:rPr sz="1200" b="0">
-                <a:solidFill>
-                  <a:srgbClr val="000000"/>
-                </a:solidFill>
-                <a:latin typeface="맑은 고딕"/>
-                <a:ea typeface="맑은 고딕"/>
-              </a:rPr>
-              <a:t> —</a:t>
-            </a:r>
-            <a:r>
-              <a:rPr sz="1000" b="0">
-                <a:solidFill>
-                  <a:srgbClr val="000000"/>
-                </a:solidFill>
-                <a:latin typeface="맑은 고딕"/>
-                <a:ea typeface="맑은 고딕"/>
-              </a:rPr>
-              <a:t> 에이전트가 읽을 수 있게 저장소에 둔다.</a:t>
-            </a:r>
-          </a:p>
-          <a:p>
-            <a:pPr lvl="2" marL="228600" indent="-182880">
-              <a:spcBef>
-                <a:spcPts val="300"/>
-              </a:spcBef>
-              <a:spcAft>
-                <a:spcPts val="300"/>
-              </a:spcAft>
-              <a:buSzPct val="90000"/>
-              <a:buFont typeface="Wingdings" pitchFamily="2" charset="2"/>
-              <a:buChar char=""/>
-            </a:pPr>
-            <a:r>
-              <a:rPr sz="1400" b="1">
-                <a:solidFill>
-                  <a:srgbClr val="000000"/>
-                </a:solidFill>
-                <a:latin typeface="맑은 고딕"/>
-                <a:ea typeface="맑은 고딕"/>
-              </a:rPr>
-              <a:t>※ 현행화 기준</a:t>
-            </a:r>
-          </a:p>
-          <a:p>
-            <a:pPr lvl="3" marL="457200" indent="-182880">
-              <a:spcBef>
-                <a:spcPts val="300"/>
-              </a:spcBef>
-              <a:spcAft>
-                <a:spcPts val="300"/>
-              </a:spcAft>
-              <a:buSzPct val="90000"/>
-              <a:buFont typeface="Wingdings" pitchFamily="2" charset="2"/>
-              <a:buChar char=""/>
-            </a:pPr>
-            <a:r>
-              <a:rPr sz="1200" b="1">
-                <a:solidFill>
-                  <a:srgbClr val="000000"/>
-                </a:solidFill>
-                <a:latin typeface="맑은 고딕"/>
-                <a:ea typeface="맑은 고딕"/>
-              </a:rPr>
-              <a:t>반영</a:t>
-            </a:r>
-            <a:r>
-              <a:rPr sz="1200" b="0">
-                <a:solidFill>
-                  <a:srgbClr val="000000"/>
-                </a:solidFill>
-                <a:latin typeface="맑은 고딕"/>
-                <a:ea typeface="맑은 고딕"/>
-              </a:rPr>
-              <a:t> —</a:t>
-            </a:r>
-            <a:r>
-              <a:rPr sz="1000" b="0">
-                <a:solidFill>
-                  <a:srgbClr val="000000"/>
-                </a:solidFill>
-                <a:latin typeface="맑은 고딕"/>
-                <a:ea typeface="맑은 고딕"/>
-              </a:rPr>
-              <a:t> 용어집·상태 기계·결정 기록의 위치와 형식.</a:t>
-            </a:r>
-          </a:p>
-          <a:p>
-            <a:pPr lvl="3" marL="457200" indent="-182880">
-              <a:spcBef>
-                <a:spcPts val="300"/>
-              </a:spcBef>
-              <a:spcAft>
-                <a:spcPts val="300"/>
-              </a:spcAft>
-              <a:buSzPct val="90000"/>
-              <a:buFont typeface="Wingdings" pitchFamily="2" charset="2"/>
-              <a:buChar char=""/>
-            </a:pPr>
-            <a:r>
-              <a:rPr sz="1200" b="1">
-                <a:solidFill>
-                  <a:srgbClr val="000000"/>
-                </a:solidFill>
-                <a:latin typeface="맑은 고딕"/>
-                <a:ea typeface="맑은 고딕"/>
-              </a:rPr>
-              <a:t>기록만</a:t>
-            </a:r>
-            <a:r>
-              <a:rPr sz="1200" b="0">
-                <a:solidFill>
-                  <a:srgbClr val="000000"/>
-                </a:solidFill>
-                <a:latin typeface="맑은 고딕"/>
-                <a:ea typeface="맑은 고딕"/>
-              </a:rPr>
-              <a:t> —</a:t>
-            </a:r>
-            <a:r>
-              <a:rPr sz="1000" b="0">
-                <a:solidFill>
-                  <a:srgbClr val="000000"/>
-                </a:solidFill>
-                <a:latin typeface="맑은 고딕"/>
-                <a:ea typeface="맑은 고딕"/>
-              </a:rPr>
-              <a:t> 맥락 패키지의 초안.</a:t>
-            </a:r>
-          </a:p>
-        </p:txBody>
-      </p:sp>
-    </p:spTree>
-    <p:extLst>
-      <p:ext uri="{BB962C8B-B14F-4D97-AF65-F5344CB8AC3E}">
-        <p14:creationId xmlns:p14="http://schemas.microsoft.com/office/powerpoint/2010/main" val="3555436673"/>
-      </p:ext>
-    </p:extLst>
-  </p:cSld>
-  <p:clrMapOvr>
-    <a:masterClrMapping/>
-  </p:clrMapOvr>
-</p:sld>
-</file>
-
-<file path=ppt/slides/slide24.xml><?xml version="1.0" encoding="utf-8"?>
-<p:sld xmlns:a="http://schemas.openxmlformats.org/drawingml/2006/main" xmlns:r="http://schemas.openxmlformats.org/officeDocument/2006/relationships" xmlns:p="http://schemas.openxmlformats.org/presentationml/2006/main">
-  <p:cSld>
-    <p:spTree>
-      <p:nvGrpSpPr>
-        <p:cNvPr id="1" name="">
-          <a:extLst>
-            <a:ext uri="{FF2B5EF4-FFF2-40B4-BE49-F238E27FC236}">
-              <a16:creationId xmlns:a16="http://schemas.microsoft.com/office/drawing/2014/main" id="{8E4F1F13-426B-086B-7D8C-9A58A0F879DB}"/>
-            </a:ext>
-          </a:extLst>
-        </p:cNvPr>
-        <p:cNvGrpSpPr/>
-        <p:nvPr/>
-      </p:nvGrpSpPr>
-      <p:grpSpPr>
-        <a:xfrm>
-          <a:off x="0" y="0"/>
-          <a:ext cx="0" cy="0"/>
-          <a:chOff x="0" y="0"/>
-          <a:chExt cx="0" cy="0"/>
-        </a:xfrm>
-      </p:grpSpPr>
-      <p:sp>
-        <p:nvSpPr>
-          <p:cNvPr id="2" name="제목 1">
-            <a:extLst>
-              <a:ext uri="{FF2B5EF4-FFF2-40B4-BE49-F238E27FC236}">
-                <a16:creationId xmlns:a16="http://schemas.microsoft.com/office/drawing/2014/main" id="{AA26A92D-924E-0575-9551-F8FD7BFD3FAD}"/>
-              </a:ext>
-            </a:extLst>
-          </p:cNvPr>
-          <p:cNvSpPr>
-            <a:spLocks noGrp="1"/>
-          </p:cNvSpPr>
-          <p:nvPr>
-            <p:ph type="title"/>
-          </p:nvPr>
-        </p:nvSpPr>
-        <p:spPr/>
-        <p:txBody>
-          <a:bodyPr/>
-          <a:lstStyle/>
-          <a:p>
-            <a:r>
-              <a:rPr sz="2400" b="1">
-                <a:solidFill>
-                  <a:srgbClr val="000000"/>
-                </a:solidFill>
-                <a:latin typeface="맑은 고딕"/>
-                <a:ea typeface="맑은 고딕"/>
-              </a:rPr>
-              <a:t>23. 요약</a:t>
-            </a:r>
-          </a:p>
-        </p:txBody>
-      </p:sp>
-      <p:sp>
-        <p:nvSpPr>
-          <p:cNvPr id="3" name="슬라이드 번호 개체 틀 2">
-            <a:extLst>
-              <a:ext uri="{FF2B5EF4-FFF2-40B4-BE49-F238E27FC236}">
-                <a16:creationId xmlns:a16="http://schemas.microsoft.com/office/drawing/2014/main" id="{12CF30EE-4DFD-8063-56B8-B8689E76DFCA}"/>
-              </a:ext>
-            </a:extLst>
-          </p:cNvPr>
-          <p:cNvSpPr>
-            <a:spLocks noGrp="1"/>
-          </p:cNvSpPr>
-          <p:nvPr>
-            <p:ph type="sldNum" sz="quarter" idx="10"/>
-          </p:nvPr>
-        </p:nvSpPr>
-        <p:spPr/>
-        <p:txBody>
-          <a:bodyPr/>
-          <a:lstStyle/>
-          <a:p>
-            <a:pPr>
-              <a:defRPr/>
-            </a:pPr>
-            <a:r>
-              <a:rPr lang="en-US" altLang="ko-KR">
-                <a:solidFill>
-                  <a:prstClr val="black"/>
-                </a:solidFill>
-              </a:rPr>
-              <a:t>- 24 -</a:t>
             </a:r>
           </a:p>
         </p:txBody>
@@ -15930,7 +11961,7 @@
                 <a:latin typeface="맑은 고딕"/>
                 <a:ea typeface="맑은 고딕"/>
               </a:rPr>
-              <a:t>후속 AI-native SW공학 과정</a:t>
+              <a:t>AI-native SW 공학</a:t>
             </a:r>
             <a:r>
               <a:rPr sz="1800" b="0">
@@ -15940,7 +11971,7 @@
                 <a:latin typeface="맑은 고딕"/>
                 <a:ea typeface="맑은 고딕"/>
               </a:rPr>
-              <a:t>" —</a:t>
+              <a:t>" 과정 —</a:t>
             </a:r>
             <a:r>
               <a:rPr sz="1600" b="0">
@@ -15950,7 +11981,7 @@
                 <a:latin typeface="맑은 고딕"/>
                 <a:ea typeface="맑은 고딕"/>
               </a:rPr>
-              <a:t> 이 과정의 판단과 산출물을 에이전트의 맥락·가드레일·하네스로 설계하고 운영한다.</a:t>
+              <a:t> 개발 작업을 에이전트에게 맡길 때의 명세·맥락·위임 경계·가드레일·하네스·평가를 설계하고 운영한다.</a:t>
             </a:r>
           </a:p>
         </p:txBody>
@@ -16469,7 +12500,7 @@
                           <a:ea typeface="맑은 고딕" panose="020B0503020000020004" pitchFamily="34" charset="-127"/>
                           <a:cs typeface="맑은 고딕"/>
                         </a:rPr>
-                        <a:t>무엇을 만드는가</a:t>
+                        <a:t>무엇을 만드는가?</a:t>
                       </a:r>
                     </a:p>
                   </a:txBody>
@@ -16637,7 +12668,7 @@
                           <a:ea typeface="맑은 고딕" panose="020B0503020000020004" pitchFamily="34" charset="-127"/>
                           <a:cs typeface="맑은 고딕"/>
                         </a:rPr>
-                        <a:t>어떤 이름과 규칙을 쓰는가</a:t>
+                        <a:t>어떤 이름과 규칙을 쓰는가?</a:t>
                       </a:r>
                     </a:p>
                   </a:txBody>
@@ -16805,7 +12836,7 @@
                           <a:ea typeface="맑은 고딕" panose="020B0503020000020004" pitchFamily="34" charset="-127"/>
                           <a:cs typeface="맑은 고딕"/>
                         </a:rPr>
-                        <a:t>어디를 고쳐도 되는가</a:t>
+                        <a:t>어디를 고쳐도 되는가?</a:t>
                       </a:r>
                     </a:p>
                   </a:txBody>
@@ -16973,7 +13004,7 @@
                           <a:ea typeface="맑은 고딕" panose="020B0503020000020004" pitchFamily="34" charset="-127"/>
                           <a:cs typeface="맑은 고딕"/>
                         </a:rPr>
-                        <a:t>누가 무엇을 보장하는가</a:t>
+                        <a:t>누가 무엇을 보장하는가?</a:t>
                       </a:r>
                     </a:p>
                   </a:txBody>

--- a/courses/ooad/sessions/s14.pptx
+++ b/courses/ooad/sessions/s14.pptx
@@ -557,7 +557,7 @@
             <a:pPr lvl="0"/>
             <a:r>
               <a:rPr lang="ko-KR" sz="1200"/>
-              <a:t>확인 지점이 많으면 에이전트의 속도를 잃고, 적으면 틀린 것이 멀리 간다. 위험이 큰 곳에만 둔다("11. 통합 설계와 적정 모델링"의 위험 주도).</a:t>
+              <a:t>확인 지점이 많으면 에이전트의 속도를 잃고, 적으면 틀린 것이 멀리 간다. 위험이 큰 곳에만 둔다("세션 11. 통합 설계와 적정 모델링"의 위험 주도).</a:t>
             </a:r>
           </a:p>
         </p:txBody>
@@ -625,7 +625,7 @@
             <a:pPr lvl="0"/>
             <a:r>
               <a:rPr lang="ko-KR" sz="1200"/>
-              <a:t>용어의 범위가 다르다. Böckeler의 하네스는 모델 밖의 모든 것(가드레일 포함)이고, 이 과정은 "01. OOAD 개요"의 구분대로 가드레일(맥락·제약)과 하네스(실행·검증 환경)를 나눠 부른다.</a:t>
+              <a:t>용어의 범위가 다르다. Böckeler의 하네스는 모델 밖의 모든 것(가드레일 포함)이고, 이 과정은 "세션 01. OOAD 개요"의 구분대로 가드레일(맥락·제약)과 하네스(실행·검증 환경)를 나눠 부른다.</a:t>
             </a:r>
           </a:p>
         </p:txBody>
@@ -693,7 +693,7 @@
             <a:pPr lvl="0"/>
             <a:r>
               <a:rPr lang="ko-KR" sz="1200"/>
-              <a:t>오른쪽 열은 모두 "12. 구현·검증·DevOps와 SW공학 피드백"에서 만든 것이다. 사람을 위한 feedback 층이 그대로 에이전트의 센서가 된다.</a:t>
+              <a:t>오른쪽 열은 모두 "세션 12. 구현·검증·DevOps와 SW공학 피드백"에서 만든 것이다. 사람을 위한 feedback 층이 그대로 에이전트의 센서가 된다.</a:t>
             </a:r>
           </a:p>
         </p:txBody>
@@ -965,7 +965,7 @@
             <a:pPr lvl="0"/>
             <a:r>
               <a:rPr lang="ko-KR" sz="1200"/>
-              <a:t>"12. 구현·검증·DevOps와 SW공학 피드백"의 「14. CI 실패가 가리키는 곳」과 같은 표다. 사람의 역추적 규칙이 에이전트의 멈춤 규칙이 된다.</a:t>
+              <a:t>"세션 12. 구현·검증·DevOps와 SW공학 피드백"의 「14. CI 실패가 가리키는 곳」과 같은 표다. 사람의 역추적 규칙이 에이전트의 멈춤 규칙이 된다.</a:t>
             </a:r>
           </a:p>
         </p:txBody>
@@ -1033,7 +1033,7 @@
             <a:pPr lvl="0"/>
             <a:r>
               <a:rPr lang="ko-KR" sz="1200"/>
-              <a:t>"12. 구현·검증·DevOps와 SW공학 피드백"의 테스트를 코드에 맞추기가 에이전트에서 더 빠르게 일어난다.</a:t>
+              <a:t>"세션 12. 구현·검증·DevOps와 SW공학 피드백"의 테스트를 코드에 맞추기가 에이전트에서 더 빠르게 일어난다.</a:t>
             </a:r>
           </a:p>
         </p:txBody>
@@ -1094,7 +1094,7 @@
             <a:pPr lvl="0"/>
             <a:r>
               <a:rPr lang="ko-KR" sz="1200"/>
-              <a:t>적정 모델링("11. 통합 설계와 적정 모델링")의 반대 관행 — 분석 마비 — 이 맥락에서 되풀이되는 모습이다.</a:t>
+              <a:t>적정 모델링("세션 11. 통합 설계와 적정 모델링")의 반대 관행 — 분석 마비 — 이 맥락에서 되풀이되는 모습이다.</a:t>
             </a:r>
           </a:p>
         </p:txBody>
@@ -1216,14 +1216,14 @@
             <a:pPr lvl="0"/>
             <a:r>
               <a:rPr lang="ko-KR" sz="1200"/>
-              <a:t>"01. OOAD 개요"의 「AI-native SW공학」에서 예고한 구분 — 사람이 최종 책임지는 판단, 사람과 AI의 협업, AI가 주도할 수 있는 실행 — 을 실제 과제에 적용한다.</a:t>
+              <a:t>"세션 01. OOAD 개요"의 「AI-native SW공학」에서 예고한 구분 — 사람이 최종 책임지는 판단, 사람과 AI의 협업, AI가 주도할 수 있는 실행 — 을 실제 과제에 적용한다.</a:t>
             </a:r>
           </a:p>
           <a:p>
             <a:pPr lvl="0"/>
             <a:r>
               <a:rPr lang="ko-KR" sz="1200"/>
-              <a:t>세션 전체가 같은 예를 쓴다 — "12. 구현·검증·DevOps와 SW공학 피드백"에서 남긴 질문, 배송 시작 통보도 중복될 수 있다를 에이전트에게 맡긴다. 코드의 테스트(code/s14/test/AgentTaskTest.java)도 같은 과제다.</a:t>
+              <a:t>세션 전체가 같은 예를 쓴다 — "세션 12. 구현·검증·DevOps와 SW공학 피드백"에서 남긴 질문, 배송 시작 통보도 중복될 수 있다를 에이전트에게 맡긴다. 코드의 테스트(code/s14/test/AgentTaskTest.java)도 같은 과제다.</a:t>
             </a:r>
           </a:p>
         </p:txBody>
@@ -1352,7 +1352,7 @@
             <a:pPr lvl="0"/>
             <a:r>
               <a:rPr lang="ko-KR" sz="1200"/>
-              <a:t>"01. OOAD 개요"의 원칙("AI 시대에도 본질은 그대로")이 여기서 구체가 된다. 바뀐 것은 판단을 실행하는 속도다.</a:t>
+              <a:t>"세션 01. OOAD 개요"의 원칙("AI 시대에도 본질은 그대로")이 여기서 구체가 된다. 바뀐 것은 판단을 실행하는 속도다.</a:t>
             </a:r>
           </a:p>
         </p:txBody>
@@ -1413,7 +1413,7 @@
             <a:pPr lvl="0"/>
             <a:r>
               <a:rPr lang="ko-KR" sz="1200"/>
-              <a:t>요구와 상태 기계를 사람이 정하는 이유는 "12. 구현·검증·DevOps와 SW공학 피드백"의 역추적과 같다 — 원인 수준에서 판단하고 아래로 내려온다. 에이전트에게는 판단이 끝난 뒤의 실행을 맡긴다.</a:t>
+              <a:t>요구와 상태 기계를 사람이 정하는 이유는 "세션 12. 구현·검증·DevOps와 SW공학 피드백"의 역추적과 같다 — 원인 수준에서 판단하고 아래로 내려온다. 에이전트에게는 판단이 끝난 뒤의 실행을 맡긴다.</a:t>
             </a:r>
           </a:p>
           <a:p>
@@ -1488,7 +1488,7 @@
             <a:pPr lvl="0"/>
             <a:r>
               <a:rPr lang="ko-KR" sz="1200"/>
-              <a:t>"11. 통합 설계와 적정 모델링"의 판단과 같은 모양이다 — 모델이 판단을 개선할 때만 더하듯, 맥락도 결과를 바꿀 때만 더한다.</a:t>
+              <a:t>"세션 11. 통합 설계와 적정 모델링"의 판단과 같은 모양이다 — 모델이 판단을 개선할 때만 더하듯, 맥락도 결과를 바꿀 때만 더한다.</a:t>
             </a:r>
           </a:p>
         </p:txBody>
@@ -1549,7 +1549,7 @@
             <a:pPr lvl="0"/>
             <a:r>
               <a:rPr lang="ko-KR" sz="1200"/>
-              <a:t>"02. 요구 분석과 유스케이스"부터 식별자·흐름 번호·용어집을 고정한 이유가 여기서도 드러난다. 사람 사이의 공통 언어가 에이전트와의 공통 언어가 된다.</a:t>
+              <a:t>"세션 02. 요구 분석과 유스케이스"부터 식별자·흐름 번호·용어집을 고정한 이유가 여기서도 드러난다. 사람 사이의 공통 언어가 에이전트와의 공통 언어가 된다.</a:t>
             </a:r>
           </a:p>
         </p:txBody>
@@ -1610,7 +1610,7 @@
             <a:pPr lvl="0"/>
             <a:r>
               <a:rPr lang="ko-KR" sz="1200"/>
-              <a:t>온톨로지의 정의(Gruber, 1993)는 "01. OOAD 개요"에서 인용했다 — 개념화의 명시적 명세.</a:t>
+              <a:t>온톨로지의 정의(Gruber, 1993)는 "세션 01. OOAD 개요"에서 인용했다 — 개념화의 명시적 명세.</a:t>
             </a:r>
           </a:p>
           <a:p>
@@ -1678,7 +1678,7 @@
             <a:pPr lvl="0"/>
             <a:r>
               <a:rPr lang="ko-KR" sz="1200"/>
-              <a:t>각 줄의 출처: 용어집("02. 요구 분석과 유스케이스"), 책임 배치("07. 책임·협력·계약"), 의존 규칙("05. 구조적 경계와 의존성"), 상태 기계("04. 동적 모델 — 상호작용과 상태"), 기대값("12. 구현·검증·DevOps와 SW공학 피드백").</a:t>
+              <a:t>각 줄의 출처: 용어집("세션 02. 요구 분석과 유스케이스"), 책임 배치("세션 07. 책임·협력·계약"), 의존 규칙("세션 05. 구조적 경계와 의존성"), 상태 기계("세션 04. 동적 모델 — 상호작용과 상태"), 기대값("세션 12. 구현·검증·DevOps와 SW공학 피드백").</a:t>
             </a:r>
           </a:p>
           <a:p>
@@ -1760,7 +1760,7 @@
             <a:pPr lvl="0"/>
             <a:r>
               <a:rPr lang="ko-KR" sz="1200"/>
-              <a:t>"01. OOAD 개요"의 세 영역과 대응한다 — 요구·상태 기계는 사람이 최종 책임지는 판단, 계획은 협업, 코드·테스트 실행은 AI가 주도할 수 있는 실행이다.</a:t>
+              <a:t>"세션 01. OOAD 개요"의 세 영역과 대응한다 — 요구·상태 기계는 사람이 최종 책임지는 판단, 계획은 협업, 코드·테스트 실행은 AI가 주도할 수 있는 실행이다.</a:t>
             </a:r>
           </a:p>
         </p:txBody>
@@ -3710,7 +3710,7 @@
           </p:nvPr>
         </p:nvGraphicFramePr>
         <p:xfrm>
-          <a:off x="2067115" y="3058085"/>
+          <a:off x="2067115" y="2874818"/>
           <a:ext cx="4996180" cy="3873500"/>
         </p:xfrm>
         <a:graphic>
@@ -4322,7 +4322,7 @@
         <p:spPr>
           <a:xfrm>
             <a:off x="365760" y="960120"/>
-            <a:ext cx="8412480" cy="1996365"/>
+            <a:ext cx="8412480" cy="1844479"/>
           </a:xfrm>
           <a:prstGeom prst="rect">
             <a:avLst/>
@@ -4579,7 +4579,7 @@
         </p:nvSpPr>
         <p:spPr>
           <a:xfrm>
-            <a:off x="365760" y="4599685"/>
+            <a:off x="365760" y="4543418"/>
             <a:ext cx="8412480" cy="524240"/>
           </a:xfrm>
           <a:prstGeom prst="rect">
@@ -4806,7 +4806,7 @@
           </p:nvPr>
         </p:nvGraphicFramePr>
         <p:xfrm>
-          <a:off x="2041716" y="2906199"/>
+          <a:off x="2041716" y="2874818"/>
           <a:ext cx="5046980" cy="3873500"/>
         </p:xfrm>
         <a:graphic>
@@ -5947,7 +5947,7 @@
           </p:nvPr>
         </p:nvGraphicFramePr>
         <p:xfrm>
-          <a:off x="3100896" y="3315123"/>
+          <a:off x="3100896" y="3149138"/>
           <a:ext cx="2928620" cy="3873500"/>
         </p:xfrm>
         <a:graphic>
@@ -6559,7 +6559,7 @@
         <p:spPr>
           <a:xfrm>
             <a:off x="365760" y="960120"/>
-            <a:ext cx="8412480" cy="2253403"/>
+            <a:ext cx="8412480" cy="2101517"/>
           </a:xfrm>
           <a:prstGeom prst="rect">
             <a:avLst/>
@@ -6816,7 +6816,7 @@
         </p:nvSpPr>
         <p:spPr>
           <a:xfrm>
-            <a:off x="365760" y="4856723"/>
+            <a:off x="365760" y="4817738"/>
             <a:ext cx="8412480" cy="781278"/>
           </a:xfrm>
           <a:prstGeom prst="rect">
@@ -7384,7 +7384,7 @@
         </p:nvSpPr>
         <p:spPr>
           <a:xfrm>
-            <a:off x="365760" y="3357336"/>
+            <a:off x="365760" y="3484336"/>
             <a:ext cx="8412480" cy="781278"/>
           </a:xfrm>
           <a:prstGeom prst="rect">
@@ -8551,7 +8551,7 @@
           </p:nvPr>
         </p:nvGraphicFramePr>
         <p:xfrm>
-          <a:off x="2431606" y="2100036"/>
+          <a:off x="2431606" y="2087880"/>
           <a:ext cx="4267200" cy="3873500"/>
         </p:xfrm>
         <a:graphic>
@@ -9592,7 +9592,7 @@
         </p:nvSpPr>
         <p:spPr>
           <a:xfrm>
-            <a:off x="365760" y="3641636"/>
+            <a:off x="365760" y="3756480"/>
             <a:ext cx="8412480" cy="781278"/>
           </a:xfrm>
           <a:prstGeom prst="rect">
@@ -12155,7 +12155,7 @@
           </p:nvPr>
         </p:nvGraphicFramePr>
         <p:xfrm>
-          <a:off x="1762316" y="2100036"/>
+          <a:off x="1762316" y="2087880"/>
           <a:ext cx="5605780" cy="3873500"/>
         </p:xfrm>
         <a:graphic>
@@ -13216,7 +13216,7 @@
         </p:nvSpPr>
         <p:spPr>
           <a:xfrm>
-            <a:off x="365760" y="3641636"/>
+            <a:off x="365760" y="3756480"/>
             <a:ext cx="8412480" cy="781278"/>
           </a:xfrm>
           <a:prstGeom prst="rect">
@@ -13443,7 +13443,7 @@
           </p:nvPr>
         </p:nvGraphicFramePr>
         <p:xfrm>
-          <a:off x="1942656" y="2100036"/>
+          <a:off x="1942656" y="2087880"/>
           <a:ext cx="5245100" cy="3873500"/>
         </p:xfrm>
         <a:graphic>
@@ -14380,7 +14380,7 @@
                 <a:latin typeface="맑은 고딕"/>
                 <a:ea typeface="맑은 고딕"/>
               </a:rPr>
-              <a:t>과제는 "12. 구현·검증·DevOps와 SW공학 피드백"에서 남긴 질문이다. 환불 완료 통보처럼 </a:t>
+              <a:t>과제는 "세션 12. 구현·검증·DevOps와 SW공학 피드백"에서 남긴 질문이다. 환불 완료 통보처럼 </a:t>
             </a:r>
             <a:r>
               <a:rPr sz="1800" b="1">
@@ -14504,7 +14504,7 @@
         </p:nvSpPr>
         <p:spPr>
           <a:xfrm>
-            <a:off x="365760" y="3641636"/>
+            <a:off x="365760" y="3756480"/>
             <a:ext cx="8412480" cy="781278"/>
           </a:xfrm>
           <a:prstGeom prst="rect">
@@ -14751,7 +14751,7 @@
           </p:nvPr>
         </p:nvGraphicFramePr>
         <p:xfrm>
-          <a:off x="2150936" y="3058085"/>
+          <a:off x="2150936" y="3036916"/>
           <a:ext cx="4828540" cy="3873500"/>
         </p:xfrm>
         <a:graphic>
@@ -15600,7 +15600,7 @@
         </p:nvSpPr>
         <p:spPr>
           <a:xfrm>
-            <a:off x="365760" y="4599685"/>
+            <a:off x="365760" y="4705516"/>
             <a:ext cx="8412480" cy="781278"/>
           </a:xfrm>
           <a:prstGeom prst="rect">
@@ -15827,7 +15827,7 @@
           </p:nvPr>
         </p:nvGraphicFramePr>
         <p:xfrm>
-          <a:off x="2209356" y="2100036"/>
+          <a:off x="2209356" y="2087880"/>
           <a:ext cx="4711700" cy="3873500"/>
         </p:xfrm>
         <a:graphic>
@@ -16888,7 +16888,7 @@
         </p:nvSpPr>
         <p:spPr>
           <a:xfrm>
-            <a:off x="365760" y="3641636"/>
+            <a:off x="365760" y="3756480"/>
             <a:ext cx="8412480" cy="781278"/>
           </a:xfrm>
           <a:prstGeom prst="rect">
@@ -17115,7 +17115,7 @@
           </p:nvPr>
         </p:nvGraphicFramePr>
         <p:xfrm>
-          <a:off x="2138235" y="2100036"/>
+          <a:off x="2138235" y="2087880"/>
           <a:ext cx="4853940" cy="3873500"/>
         </p:xfrm>
         <a:graphic>
@@ -18156,7 +18156,7 @@
         </p:nvSpPr>
         <p:spPr>
           <a:xfrm>
-            <a:off x="365760" y="3641636"/>
+            <a:off x="365760" y="3756480"/>
             <a:ext cx="8412480" cy="781278"/>
           </a:xfrm>
           <a:prstGeom prst="rect">
@@ -18843,7 +18843,7 @@
           </p:nvPr>
         </p:nvGraphicFramePr>
         <p:xfrm>
-          <a:off x="2265236" y="2906199"/>
+          <a:off x="2265236" y="2874818"/>
           <a:ext cx="4599940" cy="3873500"/>
         </p:xfrm>
         <a:graphic>
@@ -20027,7 +20027,7 @@
         </p:nvSpPr>
         <p:spPr>
           <a:xfrm>
-            <a:off x="365760" y="4447799"/>
+            <a:off x="365760" y="4543418"/>
             <a:ext cx="8412480" cy="781278"/>
           </a:xfrm>
           <a:prstGeom prst="rect">

--- a/courses/ooad/sessions/s14.pptx
+++ b/courses/ooad/sessions/s14.pptx
@@ -9488,7 +9488,7 @@
                 <a:latin typeface="맑은 고딕"/>
                 <a:ea typeface="맑은 고딕"/>
               </a:rPr>
-              <a:t>센서가 실패하면 에이전트는 코드를 고치려 한다. 그러나 어떤 실패는 </a:t>
+              <a:t>센서가 실패하면 에이전트는 코드를 고치려 한다. 그러나 앞 세션의 테스트나 의존 규칙이 깨진 것은 </a:t>
             </a:r>
             <a:r>
               <a:rPr sz="1800" b="1">
@@ -9498,7 +9498,7 @@
                 <a:latin typeface="맑은 고딕"/>
                 <a:ea typeface="맑은 고딕"/>
               </a:rPr>
-              <a:t>판단</a:t>
+              <a:t>판단이 어긋났다</a:t>
             </a:r>
             <a:r>
               <a:rPr sz="1800" b="0">
@@ -9508,7 +9508,7 @@
                 <a:latin typeface="맑은 고딕"/>
                 <a:ea typeface="맑은 고딕"/>
               </a:rPr>
-              <a:t>을 가리키고, 그때는 에이전트가 멈추고 사람에게 돌려야 한다. 표의 오른쪽 열이 그 구분이다.</a:t>
+              <a:t>는 뜻이고, 그때는 멈추고 사람에게 돌려야 한다.</a:t>
             </a:r>
           </a:p>
         </p:txBody>
